--- a/PoemMemorizer.pptx
+++ b/PoemMemorizer.pptx
@@ -1,20 +1,23 @@
 
 <file path=ppt/presentation.xml><?xml version="1.0" encoding="utf-8"?>
-<p:presentation xmlns:a="http://schemas.openxmlformats.org/drawingml/2006/main" xmlns:r="http://schemas.openxmlformats.org/officeDocument/2006/relationships" xmlns:p="http://schemas.openxmlformats.org/presentationml/2006/main" saveSubsetFonts="1" autoCompressPictures="0">
+<p:presentation xmlns:a="http://schemas.openxmlformats.org/drawingml/2006/main" xmlns:r="http://schemas.openxmlformats.org/officeDocument/2006/relationships" xmlns:p="http://schemas.openxmlformats.org/presentationml/2006/main" xmlns:m="http://schemas.openxmlformats.org/officeDocument/2006/math" xmlns:w="http://schemas.openxmlformats.org/wordprocessingml/2006/main" autoCompressPictures="0" saveSubsetFonts="1">
   <p:sldMasterIdLst>
     <p:sldMasterId id="2147483648" r:id="rId1"/>
   </p:sldMasterIdLst>
+  <p:notesMasterIdLst>
+    <p:notesMasterId r:id="rId14"/>
+  </p:notesMasterIdLst>
   <p:sldIdLst>
-    <p:sldId id="256" r:id="rId7"/>
-    <p:sldId id="257" r:id="rId8"/>
-    <p:sldId id="258" r:id="rId9"/>
-    <p:sldId id="259" r:id="rId10"/>
-    <p:sldId id="260" r:id="rId11"/>
-    <p:sldId id="261" r:id="rId12"/>
-    <p:sldId id="262" r:id="rId13"/>
-    <p:sldId id="263" r:id="rId14"/>
-    <p:sldId id="264" r:id="rId15"/>
-    <p:sldId id="265" r:id="rId16"/>
+    <p:sldId id="256" r:id="rId4"/>
+    <p:sldId id="257" r:id="rId5"/>
+    <p:sldId id="258" r:id="rId6"/>
+    <p:sldId id="259" r:id="rId7"/>
+    <p:sldId id="260" r:id="rId8"/>
+    <p:sldId id="261" r:id="rId9"/>
+    <p:sldId id="262" r:id="rId10"/>
+    <p:sldId id="263" r:id="rId11"/>
+    <p:sldId id="264" r:id="rId12"/>
+    <p:sldId id="265" r:id="rId13"/>
   </p:sldIdLst>
   <p:sldSz cx="9144000" cy="5143500" type="screen4x3"/>
   <p:notesSz cx="6858000" cy="9144000"/>
@@ -22,8 +25,8 @@
     <a:defPPr>
       <a:defRPr lang="en-US"/>
     </a:defPPr>
-    <a:lvl1pPr marL="0" algn="l" defTabSz="457200" rtl="0" eaLnBrk="1" latinLnBrk="0" hangingPunct="1">
-      <a:defRPr sz="1800" kern="1200">
+    <a:lvl1pPr marL="0" algn="l" defTabSz="457200" rtl="0">
+      <a:defRPr sz="1800">
         <a:solidFill>
           <a:schemeClr val="tx1"/>
         </a:solidFill>
@@ -32,8 +35,8 @@
         <a:cs typeface="+mn-cs"/>
       </a:defRPr>
     </a:lvl1pPr>
-    <a:lvl2pPr marL="457200" algn="l" defTabSz="457200" rtl="0" eaLnBrk="1" latinLnBrk="0" hangingPunct="1">
-      <a:defRPr sz="1800" kern="1200">
+    <a:lvl2pPr marL="457200" algn="l" defTabSz="457200" rtl="0">
+      <a:defRPr sz="1800">
         <a:solidFill>
           <a:schemeClr val="tx1"/>
         </a:solidFill>
@@ -42,8 +45,8 @@
         <a:cs typeface="+mn-cs"/>
       </a:defRPr>
     </a:lvl2pPr>
-    <a:lvl3pPr marL="914400" algn="l" defTabSz="457200" rtl="0" eaLnBrk="1" latinLnBrk="0" hangingPunct="1">
-      <a:defRPr sz="1800" kern="1200">
+    <a:lvl3pPr marL="914400" algn="l" defTabSz="457200" rtl="0">
+      <a:defRPr sz="1800">
         <a:solidFill>
           <a:schemeClr val="tx1"/>
         </a:solidFill>
@@ -52,8 +55,8 @@
         <a:cs typeface="+mn-cs"/>
       </a:defRPr>
     </a:lvl3pPr>
-    <a:lvl4pPr marL="1371600" algn="l" defTabSz="457200" rtl="0" eaLnBrk="1" latinLnBrk="0" hangingPunct="1">
-      <a:defRPr sz="1800" kern="1200">
+    <a:lvl4pPr marL="1371600" algn="l" defTabSz="457200" rtl="0">
+      <a:defRPr sz="1800">
         <a:solidFill>
           <a:schemeClr val="tx1"/>
         </a:solidFill>
@@ -62,8 +65,8 @@
         <a:cs typeface="+mn-cs"/>
       </a:defRPr>
     </a:lvl4pPr>
-    <a:lvl5pPr marL="1828800" algn="l" defTabSz="457200" rtl="0" eaLnBrk="1" latinLnBrk="0" hangingPunct="1">
-      <a:defRPr sz="1800" kern="1200">
+    <a:lvl5pPr marL="1828800" algn="l" defTabSz="457200" rtl="0">
+      <a:defRPr sz="1800">
         <a:solidFill>
           <a:schemeClr val="tx1"/>
         </a:solidFill>
@@ -72,8 +75,8 @@
         <a:cs typeface="+mn-cs"/>
       </a:defRPr>
     </a:lvl5pPr>
-    <a:lvl6pPr marL="2286000" algn="l" defTabSz="457200" rtl="0" eaLnBrk="1" latinLnBrk="0" hangingPunct="1">
-      <a:defRPr sz="1800" kern="1200">
+    <a:lvl6pPr marL="2286000" algn="l" defTabSz="457200" rtl="0">
+      <a:defRPr sz="1800">
         <a:solidFill>
           <a:schemeClr val="tx1"/>
         </a:solidFill>
@@ -82,8 +85,8 @@
         <a:cs typeface="+mn-cs"/>
       </a:defRPr>
     </a:lvl6pPr>
-    <a:lvl7pPr marL="2743200" algn="l" defTabSz="457200" rtl="0" eaLnBrk="1" latinLnBrk="0" hangingPunct="1">
-      <a:defRPr sz="1800" kern="1200">
+    <a:lvl7pPr marL="2743200" algn="l" defTabSz="457200" rtl="0">
+      <a:defRPr sz="1800">
         <a:solidFill>
           <a:schemeClr val="tx1"/>
         </a:solidFill>
@@ -92,8 +95,8 @@
         <a:cs typeface="+mn-cs"/>
       </a:defRPr>
     </a:lvl7pPr>
-    <a:lvl8pPr marL="3200400" algn="l" defTabSz="457200" rtl="0" eaLnBrk="1" latinLnBrk="0" hangingPunct="1">
-      <a:defRPr sz="1800" kern="1200">
+    <a:lvl8pPr marL="3200400" algn="l" defTabSz="457200" rtl="0">
+      <a:defRPr sz="1800">
         <a:solidFill>
           <a:schemeClr val="tx1"/>
         </a:solidFill>
@@ -102,8 +105,8 @@
         <a:cs typeface="+mn-cs"/>
       </a:defRPr>
     </a:lvl8pPr>
-    <a:lvl9pPr marL="3657600" algn="l" defTabSz="457200" rtl="0" eaLnBrk="1" latinLnBrk="0" hangingPunct="1">
-      <a:defRPr sz="1800" kern="1200">
+    <a:lvl9pPr marL="3657600" algn="l" defTabSz="457200" rtl="0">
+      <a:defRPr sz="1800">
         <a:solidFill>
           <a:schemeClr val="tx1"/>
         </a:solidFill>
@@ -116,8 +119,1178 @@
 </p:presentation>
 </file>
 
+<file path=ppt/notesMasters/notesMaster1.xml><?xml version="1.0" encoding="utf-8"?>
+<p:notesMaster xmlns:a="http://schemas.openxmlformats.org/drawingml/2006/main" xmlns:r="http://schemas.openxmlformats.org/officeDocument/2006/relationships" xmlns:p="http://schemas.openxmlformats.org/presentationml/2006/main">
+  <p:cSld name="">
+    <p:bg>
+      <p:bgRef idx="1001">
+        <a:schemeClr val="bg1"/>
+      </p:bgRef>
+    </p:bg>
+    <p:spTree>
+      <p:nvGrpSpPr>
+        <p:cNvPr id="1" name=""/>
+        <p:cNvGrpSpPr/>
+        <p:nvPr/>
+      </p:nvGrpSpPr>
+      <p:grpSpPr bwMode="auto">
+        <a:xfrm>
+          <a:off x="0" y="0"/>
+          <a:ext cx="0" cy="0"/>
+          <a:chOff x="0" y="0"/>
+          <a:chExt cx="0" cy="0"/>
+        </a:xfrm>
+      </p:grpSpPr>
+      <p:sp>
+        <p:nvSpPr>
+          <p:cNvPr id="2" name="Header Placeholder 1"/>
+          <p:cNvSpPr>
+            <a:spLocks noGrp="1"/>
+          </p:cNvSpPr>
+          <p:nvPr>
+            <p:ph type="hdr" sz="quarter"/>
+          </p:nvPr>
+        </p:nvSpPr>
+        <p:spPr bwMode="auto">
+          <a:xfrm>
+            <a:off x="0" y="0"/>
+            <a:ext cx="2971800" cy="458788"/>
+          </a:xfrm>
+          <a:prstGeom prst="rect">
+            <a:avLst/>
+          </a:prstGeom>
+        </p:spPr>
+        <p:txBody>
+          <a:bodyPr vert="horz" lIns="91440" tIns="45720" rIns="91440" bIns="45720" rtlCol="0" anchor="ctr"/>
+          <a:lstStyle>
+            <a:lvl1pPr algn="l">
+              <a:defRPr sz="1200"/>
+            </a:lvl1pPr>
+          </a:lstStyle>
+          <a:p>
+            <a:pPr>
+              <a:defRPr/>
+            </a:pPr>
+            <a:endParaRPr/>
+          </a:p>
+        </p:txBody>
+      </p:sp>
+      <p:sp>
+        <p:nvSpPr>
+          <p:cNvPr id="3" name="Date Placeholder 2"/>
+          <p:cNvSpPr>
+            <a:spLocks noGrp="1"/>
+          </p:cNvSpPr>
+          <p:nvPr>
+            <p:ph type="dt" idx="2"/>
+          </p:nvPr>
+        </p:nvSpPr>
+        <p:spPr bwMode="auto">
+          <a:xfrm>
+            <a:off x="3884613" y="0"/>
+            <a:ext cx="2971800" cy="458788"/>
+          </a:xfrm>
+          <a:prstGeom prst="rect">
+            <a:avLst/>
+          </a:prstGeom>
+        </p:spPr>
+        <p:txBody>
+          <a:bodyPr vert="horz" lIns="91440" tIns="45720" rIns="91440" bIns="45720" rtlCol="0" anchor="ctr"/>
+          <a:lstStyle>
+            <a:lvl1pPr algn="r">
+              <a:defRPr sz="1200"/>
+            </a:lvl1pPr>
+          </a:lstStyle>
+          <a:p>
+            <a:pPr>
+              <a:defRPr/>
+            </a:pPr>
+            <a:endParaRPr/>
+          </a:p>
+        </p:txBody>
+      </p:sp>
+      <p:sp>
+        <p:nvSpPr>
+          <p:cNvPr id="3" name="Date Placeholder 2"/>
+          <p:cNvSpPr>
+            <a:spLocks noGrp="1"/>
+          </p:cNvSpPr>
+          <p:nvPr>
+            <p:ph type="dt" idx="3"/>
+          </p:nvPr>
+        </p:nvSpPr>
+        <p:spPr bwMode="auto">
+          <a:xfrm>
+            <a:off x="3884613" y="0"/>
+            <a:ext cx="2971800" cy="458788"/>
+          </a:xfrm>
+          <a:prstGeom prst="rect">
+            <a:avLst/>
+          </a:prstGeom>
+        </p:spPr>
+        <p:txBody>
+          <a:bodyPr vert="horz" lIns="91440" tIns="45720" rIns="91440" bIns="45720" rtlCol="0" anchor="ctr"/>
+          <a:lstStyle>
+            <a:lvl1pPr algn="r">
+              <a:defRPr sz="1200"/>
+            </a:lvl1pPr>
+          </a:lstStyle>
+          <a:p>
+            <a:pPr>
+              <a:defRPr/>
+            </a:pPr>
+            <a:endParaRPr/>
+          </a:p>
+        </p:txBody>
+      </p:sp>
+      <p:sp>
+        <p:nvSpPr>
+          <p:cNvPr id="5" name="Notes Placeholder 4"/>
+          <p:cNvSpPr>
+            <a:spLocks noGrp="1"/>
+          </p:cNvSpPr>
+          <p:nvPr>
+            <p:ph type="body" sz="quarter" idx="1"/>
+          </p:nvPr>
+        </p:nvSpPr>
+        <p:spPr bwMode="auto">
+          <a:xfrm>
+            <a:off x="685800" y="4400550"/>
+            <a:ext cx="5486400" cy="3600450"/>
+          </a:xfrm>
+          <a:prstGeom prst="rect">
+            <a:avLst/>
+          </a:prstGeom>
+        </p:spPr>
+        <p:txBody>
+          <a:bodyPr vert="horz" lIns="91440" tIns="45720" rIns="91440" bIns="45720" rtlCol="0" anchor="ctr"/>
+          <a:lstStyle/>
+          <a:p>
+            <a:pPr>
+              <a:defRPr/>
+            </a:pPr>
+            <a:endParaRPr/>
+          </a:p>
+        </p:txBody>
+      </p:sp>
+      <p:sp>
+        <p:nvSpPr>
+          <p:cNvPr id="6" name="Footer Placeholder 5"/>
+          <p:cNvSpPr>
+            <a:spLocks noGrp="1"/>
+          </p:cNvSpPr>
+          <p:nvPr>
+            <p:ph type="ftr" sz="quarter" idx="4"/>
+          </p:nvPr>
+        </p:nvSpPr>
+        <p:spPr bwMode="auto">
+          <a:xfrm>
+            <a:off x="0" y="8685213"/>
+            <a:ext cx="2971800" cy="458787"/>
+          </a:xfrm>
+          <a:prstGeom prst="rect">
+            <a:avLst/>
+          </a:prstGeom>
+        </p:spPr>
+        <p:txBody>
+          <a:bodyPr vert="horz" lIns="91440" tIns="45720" rIns="91440" bIns="45720" rtlCol="0" anchor="b"/>
+          <a:lstStyle>
+            <a:lvl1pPr algn="l">
+              <a:defRPr sz="1200"/>
+            </a:lvl1pPr>
+          </a:lstStyle>
+          <a:p>
+            <a:pPr>
+              <a:defRPr/>
+            </a:pPr>
+            <a:endParaRPr/>
+          </a:p>
+        </p:txBody>
+      </p:sp>
+      <p:sp>
+        <p:nvSpPr>
+          <p:cNvPr id="7" name="Slide Number Placeholder 6"/>
+          <p:cNvSpPr>
+            <a:spLocks noGrp="1"/>
+          </p:cNvSpPr>
+          <p:nvPr>
+            <p:ph type="sldNum" sz="quarter" idx="10"/>
+          </p:nvPr>
+        </p:nvSpPr>
+        <p:spPr bwMode="auto">
+          <a:xfrm>
+            <a:off x="3884613" y="8685213"/>
+            <a:ext cx="2971800" cy="458787"/>
+          </a:xfrm>
+          <a:prstGeom prst="rect">
+            <a:avLst/>
+          </a:prstGeom>
+        </p:spPr>
+        <p:txBody>
+          <a:bodyPr vert="horz" lIns="91440" tIns="45720" rIns="91440" bIns="45720" rtlCol="0" anchor="b"/>
+          <a:lstStyle>
+            <a:lvl1pPr algn="r">
+              <a:defRPr sz="1200"/>
+            </a:lvl1pPr>
+          </a:lstStyle>
+          <a:p>
+            <a:pPr>
+              <a:defRPr/>
+            </a:pPr>
+            <a:endParaRPr/>
+          </a:p>
+        </p:txBody>
+      </p:sp>
+    </p:spTree>
+  </p:cSld>
+  <p:clrMap bg1="lt1" tx1="dk1" bg2="lt2" tx2="dk2" accent1="accent1" accent2="accent2" accent3="accent3" accent4="accent4" accent5="accent5" accent6="accent6" hlink="hlink" folHlink="folHlink"/>
+  <p:notesStyle>
+    <a:lvl1pPr marL="0" algn="l" defTabSz="914400">
+      <a:defRPr sz="1200">
+        <a:solidFill>
+          <a:schemeClr val="tx1"/>
+        </a:solidFill>
+        <a:latin typeface="+mn-lt"/>
+        <a:ea typeface="+mn-ea"/>
+        <a:cs typeface="+mn-cs"/>
+      </a:defRPr>
+    </a:lvl1pPr>
+    <a:lvl2pPr marL="457200" algn="l" defTabSz="914400">
+      <a:defRPr sz="1200">
+        <a:solidFill>
+          <a:schemeClr val="tx1"/>
+        </a:solidFill>
+        <a:latin typeface="+mn-lt"/>
+        <a:ea typeface="+mn-ea"/>
+        <a:cs typeface="+mn-cs"/>
+      </a:defRPr>
+    </a:lvl2pPr>
+    <a:lvl3pPr marL="914400" algn="l" defTabSz="914400">
+      <a:defRPr sz="1200">
+        <a:solidFill>
+          <a:schemeClr val="tx1"/>
+        </a:solidFill>
+        <a:latin typeface="+mn-lt"/>
+        <a:ea typeface="+mn-ea"/>
+        <a:cs typeface="+mn-cs"/>
+      </a:defRPr>
+    </a:lvl3pPr>
+    <a:lvl4pPr marL="1371600" algn="l" defTabSz="914400">
+      <a:defRPr sz="1200">
+        <a:solidFill>
+          <a:schemeClr val="tx1"/>
+        </a:solidFill>
+        <a:latin typeface="+mn-lt"/>
+        <a:ea typeface="+mn-ea"/>
+        <a:cs typeface="+mn-cs"/>
+      </a:defRPr>
+    </a:lvl4pPr>
+    <a:lvl5pPr marL="1828800" algn="l" defTabSz="914400">
+      <a:defRPr sz="1200">
+        <a:solidFill>
+          <a:schemeClr val="tx1"/>
+        </a:solidFill>
+        <a:latin typeface="+mn-lt"/>
+        <a:ea typeface="+mn-ea"/>
+        <a:cs typeface="+mn-cs"/>
+      </a:defRPr>
+    </a:lvl5pPr>
+    <a:lvl6pPr marL="2286000" algn="l" defTabSz="914400">
+      <a:defRPr sz="1200">
+        <a:solidFill>
+          <a:schemeClr val="tx1"/>
+        </a:solidFill>
+        <a:latin typeface="+mn-lt"/>
+        <a:ea typeface="+mn-ea"/>
+        <a:cs typeface="+mn-cs"/>
+      </a:defRPr>
+    </a:lvl6pPr>
+    <a:lvl7pPr marL="2743200" algn="l" defTabSz="914400">
+      <a:defRPr sz="1200">
+        <a:solidFill>
+          <a:schemeClr val="tx1"/>
+        </a:solidFill>
+        <a:latin typeface="+mn-lt"/>
+        <a:ea typeface="+mn-ea"/>
+        <a:cs typeface="+mn-cs"/>
+      </a:defRPr>
+    </a:lvl7pPr>
+    <a:lvl8pPr marL="3200400" algn="l" defTabSz="914400">
+      <a:defRPr sz="1200">
+        <a:solidFill>
+          <a:schemeClr val="tx1"/>
+        </a:solidFill>
+        <a:latin typeface="+mn-lt"/>
+        <a:ea typeface="+mn-ea"/>
+        <a:cs typeface="+mn-cs"/>
+      </a:defRPr>
+    </a:lvl8pPr>
+    <a:lvl9pPr marL="3657600" algn="l" defTabSz="914400">
+      <a:defRPr sz="1200">
+        <a:solidFill>
+          <a:schemeClr val="tx1"/>
+        </a:solidFill>
+        <a:latin typeface="+mn-lt"/>
+        <a:ea typeface="+mn-ea"/>
+        <a:cs typeface="+mn-cs"/>
+      </a:defRPr>
+    </a:lvl9pPr>
+  </p:notesStyle>
+</p:notesMaster>
+</file>
+
+<file path=ppt/notesSlides/notesSlide1.xml><?xml version="1.0" encoding="utf-8"?>
+<p:notes xmlns:a="http://schemas.openxmlformats.org/drawingml/2006/main" xmlns:r="http://schemas.openxmlformats.org/officeDocument/2006/relationships" xmlns:p="http://schemas.openxmlformats.org/presentationml/2006/main" xmlns:m="http://schemas.openxmlformats.org/officeDocument/2006/math" xmlns:w="http://schemas.openxmlformats.org/wordprocessingml/2006/main">
+  <p:cSld name="">
+    <p:spTree>
+      <p:nvGrpSpPr>
+        <p:cNvPr id="1" name=""/>
+        <p:cNvGrpSpPr/>
+        <p:nvPr/>
+      </p:nvGrpSpPr>
+      <p:grpSpPr bwMode="auto">
+        <a:xfrm>
+          <a:off x="0" y="0"/>
+          <a:ext cx="0" cy="0"/>
+          <a:chOff x="0" y="0"/>
+          <a:chExt cx="0" cy="0"/>
+        </a:xfrm>
+      </p:grpSpPr>
+      <p:sp>
+        <p:nvSpPr>
+          <p:cNvPr id="2" name="Slide Image Placeholder 1"/>
+          <p:cNvSpPr>
+            <a:spLocks noChangeAspect="1" noGrp="1" noRot="1"/>
+          </p:cNvSpPr>
+          <p:nvPr>
+            <p:ph type="sldImg"/>
+          </p:nvPr>
+        </p:nvSpPr>
+        <p:spPr bwMode="auto"/>
+      </p:sp>
+      <p:sp>
+        <p:nvSpPr>
+          <p:cNvPr id="3" name="Notes Placeholder 2"/>
+          <p:cNvSpPr>
+            <a:spLocks noGrp="1"/>
+          </p:cNvSpPr>
+          <p:nvPr>
+            <p:ph type="body" idx="1"/>
+          </p:nvPr>
+        </p:nvSpPr>
+        <p:spPr bwMode="auto"/>
+        <p:txBody>
+          <a:bodyPr/>
+          <a:lstStyle/>
+          <a:p>
+            <a:pPr>
+              <a:defRPr/>
+            </a:pPr>
+            <a:endParaRPr/>
+          </a:p>
+        </p:txBody>
+      </p:sp>
+      <p:sp>
+        <p:nvSpPr>
+          <p:cNvPr id="4" name="Slide Number Placeholder 3"/>
+          <p:cNvSpPr>
+            <a:spLocks noGrp="1"/>
+          </p:cNvSpPr>
+          <p:nvPr>
+            <p:ph type="sldNum" sz="quarter" idx="10"/>
+          </p:nvPr>
+        </p:nvSpPr>
+        <p:spPr bwMode="auto"/>
+        <p:txBody>
+          <a:bodyPr/>
+          <a:lstStyle/>
+          <a:p>
+            <a:pPr>
+              <a:defRPr/>
+            </a:pPr>
+            <a:fld id="{806E941F-7740-6537-3A73-4B4D4EE3C5FD}" type="slidenum">
+              <a:rPr/>
+              <a:t/>
+            </a:fld>
+            <a:endParaRPr/>
+          </a:p>
+        </p:txBody>
+      </p:sp>
+    </p:spTree>
+  </p:cSld>
+  <p:clrMapOvr>
+    <a:masterClrMapping/>
+  </p:clrMapOvr>
+</p:notes>
+</file>
+
+<file path=ppt/notesSlides/notesSlide10.xml><?xml version="1.0" encoding="utf-8"?>
+<p:notes xmlns:a="http://schemas.openxmlformats.org/drawingml/2006/main" xmlns:r="http://schemas.openxmlformats.org/officeDocument/2006/relationships" xmlns:p="http://schemas.openxmlformats.org/presentationml/2006/main" xmlns:m="http://schemas.openxmlformats.org/officeDocument/2006/math" xmlns:w="http://schemas.openxmlformats.org/wordprocessingml/2006/main">
+  <p:cSld name="">
+    <p:spTree>
+      <p:nvGrpSpPr>
+        <p:cNvPr id="1" name=""/>
+        <p:cNvGrpSpPr/>
+        <p:nvPr/>
+      </p:nvGrpSpPr>
+      <p:grpSpPr bwMode="auto">
+        <a:xfrm>
+          <a:off x="0" y="0"/>
+          <a:ext cx="0" cy="0"/>
+          <a:chOff x="0" y="0"/>
+          <a:chExt cx="0" cy="0"/>
+        </a:xfrm>
+      </p:grpSpPr>
+      <p:sp>
+        <p:nvSpPr>
+          <p:cNvPr id="2" name="Slide Image Placeholder 1"/>
+          <p:cNvSpPr>
+            <a:spLocks noChangeAspect="1" noGrp="1" noRot="1"/>
+          </p:cNvSpPr>
+          <p:nvPr>
+            <p:ph type="sldImg"/>
+          </p:nvPr>
+        </p:nvSpPr>
+        <p:spPr bwMode="auto"/>
+      </p:sp>
+      <p:sp>
+        <p:nvSpPr>
+          <p:cNvPr id="3" name="Notes Placeholder 2"/>
+          <p:cNvSpPr>
+            <a:spLocks noGrp="1"/>
+          </p:cNvSpPr>
+          <p:nvPr>
+            <p:ph type="body" idx="1"/>
+          </p:nvPr>
+        </p:nvSpPr>
+        <p:spPr bwMode="auto"/>
+        <p:txBody>
+          <a:bodyPr/>
+          <a:lstStyle/>
+          <a:p>
+            <a:pPr>
+              <a:defRPr/>
+            </a:pPr>
+            <a:endParaRPr/>
+          </a:p>
+        </p:txBody>
+      </p:sp>
+      <p:sp>
+        <p:nvSpPr>
+          <p:cNvPr id="4" name="Slide Number Placeholder 3"/>
+          <p:cNvSpPr>
+            <a:spLocks noGrp="1"/>
+          </p:cNvSpPr>
+          <p:nvPr>
+            <p:ph type="sldNum" sz="quarter" idx="10"/>
+          </p:nvPr>
+        </p:nvSpPr>
+        <p:spPr bwMode="auto"/>
+        <p:txBody>
+          <a:bodyPr/>
+          <a:lstStyle/>
+          <a:p>
+            <a:pPr>
+              <a:defRPr/>
+            </a:pPr>
+            <a:fld id="{582A092D-C528-7075-F36E-08A5D4A5A9E8}" type="slidenum">
+              <a:rPr/>
+              <a:t/>
+            </a:fld>
+            <a:endParaRPr/>
+          </a:p>
+        </p:txBody>
+      </p:sp>
+    </p:spTree>
+  </p:cSld>
+  <p:clrMapOvr>
+    <a:masterClrMapping/>
+  </p:clrMapOvr>
+</p:notes>
+</file>
+
+<file path=ppt/notesSlides/notesSlide2.xml><?xml version="1.0" encoding="utf-8"?>
+<p:notes xmlns:a="http://schemas.openxmlformats.org/drawingml/2006/main" xmlns:r="http://schemas.openxmlformats.org/officeDocument/2006/relationships" xmlns:p="http://schemas.openxmlformats.org/presentationml/2006/main" xmlns:m="http://schemas.openxmlformats.org/officeDocument/2006/math" xmlns:w="http://schemas.openxmlformats.org/wordprocessingml/2006/main">
+  <p:cSld name="">
+    <p:spTree>
+      <p:nvGrpSpPr>
+        <p:cNvPr id="1" name=""/>
+        <p:cNvGrpSpPr/>
+        <p:nvPr/>
+      </p:nvGrpSpPr>
+      <p:grpSpPr bwMode="auto">
+        <a:xfrm>
+          <a:off x="0" y="0"/>
+          <a:ext cx="0" cy="0"/>
+          <a:chOff x="0" y="0"/>
+          <a:chExt cx="0" cy="0"/>
+        </a:xfrm>
+      </p:grpSpPr>
+      <p:sp>
+        <p:nvSpPr>
+          <p:cNvPr id="2" name="Slide Image Placeholder 1"/>
+          <p:cNvSpPr>
+            <a:spLocks noChangeAspect="1" noGrp="1" noRot="1"/>
+          </p:cNvSpPr>
+          <p:nvPr>
+            <p:ph type="sldImg"/>
+          </p:nvPr>
+        </p:nvSpPr>
+        <p:spPr bwMode="auto"/>
+      </p:sp>
+      <p:sp>
+        <p:nvSpPr>
+          <p:cNvPr id="3" name="Notes Placeholder 2"/>
+          <p:cNvSpPr>
+            <a:spLocks noGrp="1"/>
+          </p:cNvSpPr>
+          <p:nvPr>
+            <p:ph type="body" idx="1"/>
+          </p:nvPr>
+        </p:nvSpPr>
+        <p:spPr bwMode="auto"/>
+        <p:txBody>
+          <a:bodyPr/>
+          <a:lstStyle/>
+          <a:p>
+            <a:pPr>
+              <a:defRPr/>
+            </a:pPr>
+            <a:endParaRPr/>
+          </a:p>
+        </p:txBody>
+      </p:sp>
+      <p:sp>
+        <p:nvSpPr>
+          <p:cNvPr id="4" name="Slide Number Placeholder 3"/>
+          <p:cNvSpPr>
+            <a:spLocks noGrp="1"/>
+          </p:cNvSpPr>
+          <p:nvPr>
+            <p:ph type="sldNum" sz="quarter" idx="10"/>
+          </p:nvPr>
+        </p:nvSpPr>
+        <p:spPr bwMode="auto"/>
+        <p:txBody>
+          <a:bodyPr/>
+          <a:lstStyle/>
+          <a:p>
+            <a:pPr>
+              <a:defRPr/>
+            </a:pPr>
+            <a:fld id="{7028FE0D-9673-288A-C4E1-FD84B99DDB25}" type="slidenum">
+              <a:rPr/>
+              <a:t/>
+            </a:fld>
+            <a:endParaRPr/>
+          </a:p>
+        </p:txBody>
+      </p:sp>
+    </p:spTree>
+  </p:cSld>
+  <p:clrMapOvr>
+    <a:masterClrMapping/>
+  </p:clrMapOvr>
+</p:notes>
+</file>
+
+<file path=ppt/notesSlides/notesSlide3.xml><?xml version="1.0" encoding="utf-8"?>
+<p:notes xmlns:a="http://schemas.openxmlformats.org/drawingml/2006/main" xmlns:r="http://schemas.openxmlformats.org/officeDocument/2006/relationships" xmlns:p="http://schemas.openxmlformats.org/presentationml/2006/main" xmlns:m="http://schemas.openxmlformats.org/officeDocument/2006/math" xmlns:w="http://schemas.openxmlformats.org/wordprocessingml/2006/main">
+  <p:cSld name="">
+    <p:spTree>
+      <p:nvGrpSpPr>
+        <p:cNvPr id="1" name=""/>
+        <p:cNvGrpSpPr/>
+        <p:nvPr/>
+      </p:nvGrpSpPr>
+      <p:grpSpPr bwMode="auto">
+        <a:xfrm>
+          <a:off x="0" y="0"/>
+          <a:ext cx="0" cy="0"/>
+          <a:chOff x="0" y="0"/>
+          <a:chExt cx="0" cy="0"/>
+        </a:xfrm>
+      </p:grpSpPr>
+      <p:sp>
+        <p:nvSpPr>
+          <p:cNvPr id="2" name="Slide Image Placeholder 1"/>
+          <p:cNvSpPr>
+            <a:spLocks noChangeAspect="1" noGrp="1" noRot="1"/>
+          </p:cNvSpPr>
+          <p:nvPr>
+            <p:ph type="sldImg"/>
+          </p:nvPr>
+        </p:nvSpPr>
+        <p:spPr bwMode="auto"/>
+      </p:sp>
+      <p:sp>
+        <p:nvSpPr>
+          <p:cNvPr id="3" name="Notes Placeholder 2"/>
+          <p:cNvSpPr>
+            <a:spLocks noGrp="1"/>
+          </p:cNvSpPr>
+          <p:nvPr>
+            <p:ph type="body" idx="1"/>
+          </p:nvPr>
+        </p:nvSpPr>
+        <p:spPr bwMode="auto"/>
+        <p:txBody>
+          <a:bodyPr/>
+          <a:lstStyle/>
+          <a:p>
+            <a:pPr>
+              <a:defRPr/>
+            </a:pPr>
+            <a:endParaRPr/>
+          </a:p>
+        </p:txBody>
+      </p:sp>
+      <p:sp>
+        <p:nvSpPr>
+          <p:cNvPr id="4" name="Slide Number Placeholder 3"/>
+          <p:cNvSpPr>
+            <a:spLocks noGrp="1"/>
+          </p:cNvSpPr>
+          <p:nvPr>
+            <p:ph type="sldNum" sz="quarter" idx="10"/>
+          </p:nvPr>
+        </p:nvSpPr>
+        <p:spPr bwMode="auto"/>
+        <p:txBody>
+          <a:bodyPr/>
+          <a:lstStyle/>
+          <a:p>
+            <a:pPr>
+              <a:defRPr/>
+            </a:pPr>
+            <a:fld id="{28AC9FD2-422D-1558-DFB1-E8A6B75D3F5D}" type="slidenum">
+              <a:rPr/>
+              <a:t/>
+            </a:fld>
+            <a:endParaRPr/>
+          </a:p>
+        </p:txBody>
+      </p:sp>
+    </p:spTree>
+  </p:cSld>
+  <p:clrMapOvr>
+    <a:masterClrMapping/>
+  </p:clrMapOvr>
+</p:notes>
+</file>
+
+<file path=ppt/notesSlides/notesSlide4.xml><?xml version="1.0" encoding="utf-8"?>
+<p:notes xmlns:a="http://schemas.openxmlformats.org/drawingml/2006/main" xmlns:r="http://schemas.openxmlformats.org/officeDocument/2006/relationships" xmlns:p="http://schemas.openxmlformats.org/presentationml/2006/main" xmlns:m="http://schemas.openxmlformats.org/officeDocument/2006/math" xmlns:w="http://schemas.openxmlformats.org/wordprocessingml/2006/main">
+  <p:cSld name="">
+    <p:spTree>
+      <p:nvGrpSpPr>
+        <p:cNvPr id="1" name=""/>
+        <p:cNvGrpSpPr/>
+        <p:nvPr/>
+      </p:nvGrpSpPr>
+      <p:grpSpPr bwMode="auto">
+        <a:xfrm>
+          <a:off x="0" y="0"/>
+          <a:ext cx="0" cy="0"/>
+          <a:chOff x="0" y="0"/>
+          <a:chExt cx="0" cy="0"/>
+        </a:xfrm>
+      </p:grpSpPr>
+      <p:sp>
+        <p:nvSpPr>
+          <p:cNvPr id="2" name="Slide Image Placeholder 1"/>
+          <p:cNvSpPr>
+            <a:spLocks noChangeAspect="1" noGrp="1" noRot="1"/>
+          </p:cNvSpPr>
+          <p:nvPr>
+            <p:ph type="sldImg"/>
+          </p:nvPr>
+        </p:nvSpPr>
+        <p:spPr bwMode="auto"/>
+      </p:sp>
+      <p:sp>
+        <p:nvSpPr>
+          <p:cNvPr id="3" name="Notes Placeholder 2"/>
+          <p:cNvSpPr>
+            <a:spLocks noGrp="1"/>
+          </p:cNvSpPr>
+          <p:nvPr>
+            <p:ph type="body" idx="1"/>
+          </p:nvPr>
+        </p:nvSpPr>
+        <p:spPr bwMode="auto"/>
+        <p:txBody>
+          <a:bodyPr/>
+          <a:lstStyle/>
+          <a:p>
+            <a:pPr>
+              <a:defRPr/>
+            </a:pPr>
+            <a:endParaRPr/>
+          </a:p>
+        </p:txBody>
+      </p:sp>
+      <p:sp>
+        <p:nvSpPr>
+          <p:cNvPr id="4" name="Slide Number Placeholder 3"/>
+          <p:cNvSpPr>
+            <a:spLocks noGrp="1"/>
+          </p:cNvSpPr>
+          <p:nvPr>
+            <p:ph type="sldNum" sz="quarter" idx="10"/>
+          </p:nvPr>
+        </p:nvSpPr>
+        <p:spPr bwMode="auto"/>
+        <p:txBody>
+          <a:bodyPr/>
+          <a:lstStyle/>
+          <a:p>
+            <a:pPr>
+              <a:defRPr/>
+            </a:pPr>
+            <a:fld id="{A7C6A538-DE20-86B7-201D-4DA83E54F212}" type="slidenum">
+              <a:rPr/>
+              <a:t/>
+            </a:fld>
+            <a:endParaRPr/>
+          </a:p>
+        </p:txBody>
+      </p:sp>
+    </p:spTree>
+  </p:cSld>
+  <p:clrMapOvr>
+    <a:masterClrMapping/>
+  </p:clrMapOvr>
+</p:notes>
+</file>
+
+<file path=ppt/notesSlides/notesSlide5.xml><?xml version="1.0" encoding="utf-8"?>
+<p:notes xmlns:a="http://schemas.openxmlformats.org/drawingml/2006/main" xmlns:r="http://schemas.openxmlformats.org/officeDocument/2006/relationships" xmlns:p="http://schemas.openxmlformats.org/presentationml/2006/main" xmlns:m="http://schemas.openxmlformats.org/officeDocument/2006/math" xmlns:w="http://schemas.openxmlformats.org/wordprocessingml/2006/main">
+  <p:cSld name="">
+    <p:spTree>
+      <p:nvGrpSpPr>
+        <p:cNvPr id="1" name=""/>
+        <p:cNvGrpSpPr/>
+        <p:nvPr/>
+      </p:nvGrpSpPr>
+      <p:grpSpPr bwMode="auto">
+        <a:xfrm>
+          <a:off x="0" y="0"/>
+          <a:ext cx="0" cy="0"/>
+          <a:chOff x="0" y="0"/>
+          <a:chExt cx="0" cy="0"/>
+        </a:xfrm>
+      </p:grpSpPr>
+      <p:sp>
+        <p:nvSpPr>
+          <p:cNvPr id="2" name="Slide Image Placeholder 1"/>
+          <p:cNvSpPr>
+            <a:spLocks noChangeAspect="1" noGrp="1" noRot="1"/>
+          </p:cNvSpPr>
+          <p:nvPr>
+            <p:ph type="sldImg"/>
+          </p:nvPr>
+        </p:nvSpPr>
+        <p:spPr bwMode="auto"/>
+      </p:sp>
+      <p:sp>
+        <p:nvSpPr>
+          <p:cNvPr id="3" name="Notes Placeholder 2"/>
+          <p:cNvSpPr>
+            <a:spLocks noGrp="1"/>
+          </p:cNvSpPr>
+          <p:nvPr>
+            <p:ph type="body" idx="1"/>
+          </p:nvPr>
+        </p:nvSpPr>
+        <p:spPr bwMode="auto"/>
+        <p:txBody>
+          <a:bodyPr/>
+          <a:lstStyle/>
+          <a:p>
+            <a:pPr>
+              <a:defRPr/>
+            </a:pPr>
+            <a:endParaRPr/>
+          </a:p>
+        </p:txBody>
+      </p:sp>
+      <p:sp>
+        <p:nvSpPr>
+          <p:cNvPr id="4" name="Slide Number Placeholder 3"/>
+          <p:cNvSpPr>
+            <a:spLocks noGrp="1"/>
+          </p:cNvSpPr>
+          <p:nvPr>
+            <p:ph type="sldNum" sz="quarter" idx="10"/>
+          </p:nvPr>
+        </p:nvSpPr>
+        <p:spPr bwMode="auto"/>
+        <p:txBody>
+          <a:bodyPr/>
+          <a:lstStyle/>
+          <a:p>
+            <a:pPr>
+              <a:defRPr/>
+            </a:pPr>
+            <a:fld id="{413699E3-D07B-6736-C4D0-AC1386EB9950}" type="slidenum">
+              <a:rPr/>
+              <a:t/>
+            </a:fld>
+            <a:endParaRPr/>
+          </a:p>
+        </p:txBody>
+      </p:sp>
+    </p:spTree>
+  </p:cSld>
+  <p:clrMapOvr>
+    <a:masterClrMapping/>
+  </p:clrMapOvr>
+</p:notes>
+</file>
+
+<file path=ppt/notesSlides/notesSlide6.xml><?xml version="1.0" encoding="utf-8"?>
+<p:notes xmlns:a="http://schemas.openxmlformats.org/drawingml/2006/main" xmlns:r="http://schemas.openxmlformats.org/officeDocument/2006/relationships" xmlns:p="http://schemas.openxmlformats.org/presentationml/2006/main" xmlns:m="http://schemas.openxmlformats.org/officeDocument/2006/math" xmlns:w="http://schemas.openxmlformats.org/wordprocessingml/2006/main">
+  <p:cSld name="">
+    <p:spTree>
+      <p:nvGrpSpPr>
+        <p:cNvPr id="1" name=""/>
+        <p:cNvGrpSpPr/>
+        <p:nvPr/>
+      </p:nvGrpSpPr>
+      <p:grpSpPr bwMode="auto">
+        <a:xfrm>
+          <a:off x="0" y="0"/>
+          <a:ext cx="0" cy="0"/>
+          <a:chOff x="0" y="0"/>
+          <a:chExt cx="0" cy="0"/>
+        </a:xfrm>
+      </p:grpSpPr>
+      <p:sp>
+        <p:nvSpPr>
+          <p:cNvPr id="2" name="Slide Image Placeholder 1"/>
+          <p:cNvSpPr>
+            <a:spLocks noChangeAspect="1" noGrp="1" noRot="1"/>
+          </p:cNvSpPr>
+          <p:nvPr>
+            <p:ph type="sldImg"/>
+          </p:nvPr>
+        </p:nvSpPr>
+        <p:spPr bwMode="auto"/>
+      </p:sp>
+      <p:sp>
+        <p:nvSpPr>
+          <p:cNvPr id="3" name="Notes Placeholder 2"/>
+          <p:cNvSpPr>
+            <a:spLocks noGrp="1"/>
+          </p:cNvSpPr>
+          <p:nvPr>
+            <p:ph type="body" idx="1"/>
+          </p:nvPr>
+        </p:nvSpPr>
+        <p:spPr bwMode="auto"/>
+        <p:txBody>
+          <a:bodyPr/>
+          <a:lstStyle/>
+          <a:p>
+            <a:pPr>
+              <a:defRPr/>
+            </a:pPr>
+            <a:endParaRPr/>
+          </a:p>
+        </p:txBody>
+      </p:sp>
+      <p:sp>
+        <p:nvSpPr>
+          <p:cNvPr id="4" name="Slide Number Placeholder 3"/>
+          <p:cNvSpPr>
+            <a:spLocks noGrp="1"/>
+          </p:cNvSpPr>
+          <p:nvPr>
+            <p:ph type="sldNum" sz="quarter" idx="10"/>
+          </p:nvPr>
+        </p:nvSpPr>
+        <p:spPr bwMode="auto"/>
+        <p:txBody>
+          <a:bodyPr/>
+          <a:lstStyle/>
+          <a:p>
+            <a:pPr>
+              <a:defRPr/>
+            </a:pPr>
+            <a:fld id="{DAFBF9C8-B872-EB0F-3055-89B0BF338B9B}" type="slidenum">
+              <a:rPr/>
+              <a:t/>
+            </a:fld>
+            <a:endParaRPr/>
+          </a:p>
+        </p:txBody>
+      </p:sp>
+    </p:spTree>
+  </p:cSld>
+  <p:clrMapOvr>
+    <a:masterClrMapping/>
+  </p:clrMapOvr>
+</p:notes>
+</file>
+
+<file path=ppt/notesSlides/notesSlide7.xml><?xml version="1.0" encoding="utf-8"?>
+<p:notes xmlns:a="http://schemas.openxmlformats.org/drawingml/2006/main" xmlns:r="http://schemas.openxmlformats.org/officeDocument/2006/relationships" xmlns:p="http://schemas.openxmlformats.org/presentationml/2006/main" xmlns:m="http://schemas.openxmlformats.org/officeDocument/2006/math" xmlns:w="http://schemas.openxmlformats.org/wordprocessingml/2006/main">
+  <p:cSld name="">
+    <p:spTree>
+      <p:nvGrpSpPr>
+        <p:cNvPr id="1" name=""/>
+        <p:cNvGrpSpPr/>
+        <p:nvPr/>
+      </p:nvGrpSpPr>
+      <p:grpSpPr bwMode="auto">
+        <a:xfrm>
+          <a:off x="0" y="0"/>
+          <a:ext cx="0" cy="0"/>
+          <a:chOff x="0" y="0"/>
+          <a:chExt cx="0" cy="0"/>
+        </a:xfrm>
+      </p:grpSpPr>
+      <p:sp>
+        <p:nvSpPr>
+          <p:cNvPr id="2" name="Slide Image Placeholder 1"/>
+          <p:cNvSpPr>
+            <a:spLocks noChangeAspect="1" noGrp="1" noRot="1"/>
+          </p:cNvSpPr>
+          <p:nvPr>
+            <p:ph type="sldImg"/>
+          </p:nvPr>
+        </p:nvSpPr>
+        <p:spPr bwMode="auto"/>
+      </p:sp>
+      <p:sp>
+        <p:nvSpPr>
+          <p:cNvPr id="3" name="Notes Placeholder 2"/>
+          <p:cNvSpPr>
+            <a:spLocks noGrp="1"/>
+          </p:cNvSpPr>
+          <p:nvPr>
+            <p:ph type="body" idx="1"/>
+          </p:nvPr>
+        </p:nvSpPr>
+        <p:spPr bwMode="auto"/>
+        <p:txBody>
+          <a:bodyPr/>
+          <a:lstStyle/>
+          <a:p>
+            <a:pPr>
+              <a:defRPr/>
+            </a:pPr>
+            <a:endParaRPr/>
+          </a:p>
+        </p:txBody>
+      </p:sp>
+      <p:sp>
+        <p:nvSpPr>
+          <p:cNvPr id="4" name="Slide Number Placeholder 3"/>
+          <p:cNvSpPr>
+            <a:spLocks noGrp="1"/>
+          </p:cNvSpPr>
+          <p:nvPr>
+            <p:ph type="sldNum" sz="quarter" idx="10"/>
+          </p:nvPr>
+        </p:nvSpPr>
+        <p:spPr bwMode="auto"/>
+        <p:txBody>
+          <a:bodyPr/>
+          <a:lstStyle/>
+          <a:p>
+            <a:pPr>
+              <a:defRPr/>
+            </a:pPr>
+            <a:fld id="{14E94B25-F1E1-E67C-6E74-17A4FE8F42D0}" type="slidenum">
+              <a:rPr/>
+              <a:t/>
+            </a:fld>
+            <a:endParaRPr/>
+          </a:p>
+        </p:txBody>
+      </p:sp>
+    </p:spTree>
+  </p:cSld>
+  <p:clrMapOvr>
+    <a:masterClrMapping/>
+  </p:clrMapOvr>
+</p:notes>
+</file>
+
+<file path=ppt/notesSlides/notesSlide8.xml><?xml version="1.0" encoding="utf-8"?>
+<p:notes xmlns:a="http://schemas.openxmlformats.org/drawingml/2006/main" xmlns:r="http://schemas.openxmlformats.org/officeDocument/2006/relationships" xmlns:p="http://schemas.openxmlformats.org/presentationml/2006/main" xmlns:m="http://schemas.openxmlformats.org/officeDocument/2006/math" xmlns:w="http://schemas.openxmlformats.org/wordprocessingml/2006/main">
+  <p:cSld name="">
+    <p:spTree>
+      <p:nvGrpSpPr>
+        <p:cNvPr id="1" name=""/>
+        <p:cNvGrpSpPr/>
+        <p:nvPr/>
+      </p:nvGrpSpPr>
+      <p:grpSpPr bwMode="auto">
+        <a:xfrm>
+          <a:off x="0" y="0"/>
+          <a:ext cx="0" cy="0"/>
+          <a:chOff x="0" y="0"/>
+          <a:chExt cx="0" cy="0"/>
+        </a:xfrm>
+      </p:grpSpPr>
+      <p:sp>
+        <p:nvSpPr>
+          <p:cNvPr id="2" name="Slide Image Placeholder 1"/>
+          <p:cNvSpPr>
+            <a:spLocks noChangeAspect="1" noGrp="1" noRot="1"/>
+          </p:cNvSpPr>
+          <p:nvPr>
+            <p:ph type="sldImg"/>
+          </p:nvPr>
+        </p:nvSpPr>
+        <p:spPr bwMode="auto"/>
+      </p:sp>
+      <p:sp>
+        <p:nvSpPr>
+          <p:cNvPr id="3" name="Notes Placeholder 2"/>
+          <p:cNvSpPr>
+            <a:spLocks noGrp="1"/>
+          </p:cNvSpPr>
+          <p:nvPr>
+            <p:ph type="body" idx="1"/>
+          </p:nvPr>
+        </p:nvSpPr>
+        <p:spPr bwMode="auto"/>
+        <p:txBody>
+          <a:bodyPr/>
+          <a:lstStyle/>
+          <a:p>
+            <a:pPr>
+              <a:defRPr/>
+            </a:pPr>
+            <a:endParaRPr/>
+          </a:p>
+        </p:txBody>
+      </p:sp>
+      <p:sp>
+        <p:nvSpPr>
+          <p:cNvPr id="4" name="Slide Number Placeholder 3"/>
+          <p:cNvSpPr>
+            <a:spLocks noGrp="1"/>
+          </p:cNvSpPr>
+          <p:nvPr>
+            <p:ph type="sldNum" sz="quarter" idx="10"/>
+          </p:nvPr>
+        </p:nvSpPr>
+        <p:spPr bwMode="auto"/>
+        <p:txBody>
+          <a:bodyPr/>
+          <a:lstStyle/>
+          <a:p>
+            <a:pPr>
+              <a:defRPr/>
+            </a:pPr>
+            <a:fld id="{27F3B971-ECBD-BAEE-A9EF-9B4784C80393}" type="slidenum">
+              <a:rPr/>
+              <a:t/>
+            </a:fld>
+            <a:endParaRPr/>
+          </a:p>
+        </p:txBody>
+      </p:sp>
+    </p:spTree>
+  </p:cSld>
+  <p:clrMapOvr>
+    <a:masterClrMapping/>
+  </p:clrMapOvr>
+</p:notes>
+</file>
+
+<file path=ppt/notesSlides/notesSlide9.xml><?xml version="1.0" encoding="utf-8"?>
+<p:notes xmlns:a="http://schemas.openxmlformats.org/drawingml/2006/main" xmlns:r="http://schemas.openxmlformats.org/officeDocument/2006/relationships" xmlns:p="http://schemas.openxmlformats.org/presentationml/2006/main" xmlns:m="http://schemas.openxmlformats.org/officeDocument/2006/math" xmlns:w="http://schemas.openxmlformats.org/wordprocessingml/2006/main">
+  <p:cSld name="">
+    <p:spTree>
+      <p:nvGrpSpPr>
+        <p:cNvPr id="1" name=""/>
+        <p:cNvGrpSpPr/>
+        <p:nvPr/>
+      </p:nvGrpSpPr>
+      <p:grpSpPr bwMode="auto">
+        <a:xfrm>
+          <a:off x="0" y="0"/>
+          <a:ext cx="0" cy="0"/>
+          <a:chOff x="0" y="0"/>
+          <a:chExt cx="0" cy="0"/>
+        </a:xfrm>
+      </p:grpSpPr>
+      <p:sp>
+        <p:nvSpPr>
+          <p:cNvPr id="2" name="Slide Image Placeholder 1"/>
+          <p:cNvSpPr>
+            <a:spLocks noChangeAspect="1" noGrp="1" noRot="1"/>
+          </p:cNvSpPr>
+          <p:nvPr>
+            <p:ph type="sldImg"/>
+          </p:nvPr>
+        </p:nvSpPr>
+        <p:spPr bwMode="auto"/>
+      </p:sp>
+      <p:sp>
+        <p:nvSpPr>
+          <p:cNvPr id="3" name="Notes Placeholder 2"/>
+          <p:cNvSpPr>
+            <a:spLocks noGrp="1"/>
+          </p:cNvSpPr>
+          <p:nvPr>
+            <p:ph type="body" idx="1"/>
+          </p:nvPr>
+        </p:nvSpPr>
+        <p:spPr bwMode="auto"/>
+        <p:txBody>
+          <a:bodyPr/>
+          <a:lstStyle/>
+          <a:p>
+            <a:pPr>
+              <a:defRPr/>
+            </a:pPr>
+            <a:endParaRPr/>
+          </a:p>
+        </p:txBody>
+      </p:sp>
+      <p:sp>
+        <p:nvSpPr>
+          <p:cNvPr id="4" name="Slide Number Placeholder 3"/>
+          <p:cNvSpPr>
+            <a:spLocks noGrp="1"/>
+          </p:cNvSpPr>
+          <p:nvPr>
+            <p:ph type="sldNum" sz="quarter" idx="10"/>
+          </p:nvPr>
+        </p:nvSpPr>
+        <p:spPr bwMode="auto"/>
+        <p:txBody>
+          <a:bodyPr/>
+          <a:lstStyle/>
+          <a:p>
+            <a:pPr>
+              <a:defRPr/>
+            </a:pPr>
+            <a:fld id="{46280B1C-A683-3429-D6F7-D5E877C67833}" type="slidenum">
+              <a:rPr/>
+              <a:t/>
+            </a:fld>
+            <a:endParaRPr/>
+          </a:p>
+        </p:txBody>
+      </p:sp>
+    </p:spTree>
+  </p:cSld>
+  <p:clrMapOvr>
+    <a:masterClrMapping/>
+  </p:clrMapOvr>
+</p:notes>
+</file>
+
 <file path=ppt/slideLayouts/slideLayout1.xml><?xml version="1.0" encoding="utf-8"?>
-<p:sldLayout xmlns:a="http://schemas.openxmlformats.org/drawingml/2006/main" xmlns:r="http://schemas.openxmlformats.org/officeDocument/2006/relationships" xmlns:p="http://schemas.openxmlformats.org/presentationml/2006/main" type="title" preserve="1">
+<p:sldLayout xmlns:a="http://schemas.openxmlformats.org/drawingml/2006/main" xmlns:r="http://schemas.openxmlformats.org/officeDocument/2006/relationships" xmlns:p="http://schemas.openxmlformats.org/presentationml/2006/main" xmlns:m="http://schemas.openxmlformats.org/officeDocument/2006/math" xmlns:w="http://schemas.openxmlformats.org/wordprocessingml/2006/main" matchingName="" preserve="1" showMasterPhAnim="0" showMasterSp="1" type="title" userDrawn="1">
   <p:cSld name="Title Slide">
     <p:spTree>
       <p:nvGrpSpPr>
@@ -125,7 +1298,7 @@
         <p:cNvGrpSpPr/>
         <p:nvPr/>
       </p:nvGrpSpPr>
-      <p:grpSpPr>
+      <p:grpSpPr bwMode="auto">
         <a:xfrm>
           <a:off x="0" y="0"/>
           <a:ext cx="0" cy="0"/>
@@ -135,7 +1308,7 @@
       </p:grpSpPr>
       <p:sp>
         <p:nvSpPr>
-          <p:cNvPr id="2" name="Title 1"/>
+          <p:cNvPr id="1964336347" name="Title 1"/>
           <p:cNvSpPr>
             <a:spLocks noGrp="1"/>
           </p:cNvSpPr>
@@ -143,7 +1316,7 @@
             <p:ph type="ctrTitle"/>
           </p:nvPr>
         </p:nvSpPr>
-        <p:spPr>
+        <p:spPr bwMode="auto">
           <a:xfrm>
             <a:off x="685800" y="2130425"/>
             <a:ext cx="7772400" cy="1470025"/>
@@ -153,8 +1326,11 @@
           <a:bodyPr/>
           <a:lstStyle/>
           <a:p>
-            <a:r>
-              <a:rPr lang="en-US" smtClean="0"/>
+            <a:pPr>
+              <a:defRPr/>
+            </a:pPr>
+            <a:r>
+              <a:rPr lang="en-US"/>
               <a:t>Click to edit Master title style</a:t>
             </a:r>
             <a:endParaRPr lang="en-US"/>
@@ -163,7 +1339,7 @@
       </p:sp>
       <p:sp>
         <p:nvSpPr>
-          <p:cNvPr id="3" name="Subtitle 2"/>
+          <p:cNvPr id="1331877013" name="Subtitle 2"/>
           <p:cNvSpPr>
             <a:spLocks noGrp="1"/>
           </p:cNvSpPr>
@@ -171,10 +1347,10 @@
             <p:ph type="subTitle" idx="1"/>
           </p:nvPr>
         </p:nvSpPr>
-        <p:spPr>
+        <p:spPr bwMode="auto">
           <a:xfrm>
             <a:off x="1371600" y="3886200"/>
-            <a:ext cx="6400800" cy="1752600"/>
+            <a:ext cx="6400800" cy="1752599"/>
           </a:xfrm>
         </p:spPr>
         <p:txBody>
@@ -272,8 +1448,11 @@
             </a:lvl9pPr>
           </a:lstStyle>
           <a:p>
-            <a:r>
-              <a:rPr lang="en-US" smtClean="0"/>
+            <a:pPr>
+              <a:defRPr/>
+            </a:pPr>
+            <a:r>
+              <a:rPr lang="en-US"/>
               <a:t>Click to edit Master subtitle style</a:t>
             </a:r>
             <a:endParaRPr lang="en-US"/>
@@ -282,7 +1461,7 @@
       </p:sp>
       <p:sp>
         <p:nvSpPr>
-          <p:cNvPr id="4" name="Date Placeholder 3"/>
+          <p:cNvPr id="537723713" name="Date Placeholder 3"/>
           <p:cNvSpPr>
             <a:spLocks noGrp="1"/>
           </p:cNvSpPr>
@@ -290,13 +1469,16 @@
             <p:ph type="dt" sz="half" idx="10"/>
           </p:nvPr>
         </p:nvSpPr>
-        <p:spPr/>
+        <p:spPr bwMode="auto"/>
         <p:txBody>
           <a:bodyPr/>
           <a:lstStyle/>
           <a:p>
+            <a:pPr>
+              <a:defRPr/>
+            </a:pPr>
             <a:fld id="{5BCAD085-E8A6-8845-BD4E-CB4CCA059FC4}" type="datetimeFigureOut">
-              <a:rPr lang="en-US" smtClean="0"/>
+              <a:rPr lang="en-US"/>
               <a:t>1/27/13</a:t>
             </a:fld>
             <a:endParaRPr lang="en-US"/>
@@ -305,7 +1487,7 @@
       </p:sp>
       <p:sp>
         <p:nvSpPr>
-          <p:cNvPr id="5" name="Footer Placeholder 4"/>
+          <p:cNvPr id="1658124793" name="Footer Placeholder 4"/>
           <p:cNvSpPr>
             <a:spLocks noGrp="1"/>
           </p:cNvSpPr>
@@ -313,18 +1495,21 @@
             <p:ph type="ftr" sz="quarter" idx="11"/>
           </p:nvPr>
         </p:nvSpPr>
-        <p:spPr/>
+        <p:spPr bwMode="auto"/>
         <p:txBody>
           <a:bodyPr/>
           <a:lstStyle/>
           <a:p>
+            <a:pPr>
+              <a:defRPr/>
+            </a:pPr>
             <a:endParaRPr lang="en-US"/>
           </a:p>
         </p:txBody>
       </p:sp>
       <p:sp>
         <p:nvSpPr>
-          <p:cNvPr id="6" name="Slide Number Placeholder 5"/>
+          <p:cNvPr id="1740291043" name="Slide Number Placeholder 5"/>
           <p:cNvSpPr>
             <a:spLocks noGrp="1"/>
           </p:cNvSpPr>
@@ -332,13 +1517,16 @@
             <p:ph type="sldNum" sz="quarter" idx="12"/>
           </p:nvPr>
         </p:nvSpPr>
-        <p:spPr/>
+        <p:spPr bwMode="auto"/>
         <p:txBody>
           <a:bodyPr/>
           <a:lstStyle/>
           <a:p>
+            <a:pPr>
+              <a:defRPr/>
+            </a:pPr>
             <a:fld id="{C1FF6DA9-008F-8B48-92A6-B652298478BF}" type="slidenum">
-              <a:rPr lang="en-US" smtClean="0"/>
+              <a:rPr lang="en-US"/>
               <a:t>‹#›</a:t>
             </a:fld>
             <a:endParaRPr lang="en-US"/>
@@ -346,11 +1534,6 @@
         </p:txBody>
       </p:sp>
     </p:spTree>
-    <p:extLst>
-      <p:ext uri="{BB962C8B-B14F-4D97-AF65-F5344CB8AC3E}">
-        <p14:creationId xmlns:p14="http://schemas.microsoft.com/office/powerpoint/2010/main" val="3168075583"/>
-      </p:ext>
-    </p:extLst>
   </p:cSld>
   <p:clrMapOvr>
     <a:masterClrMapping/>
@@ -359,7 +1542,7 @@
 </file>
 
 <file path=ppt/slideLayouts/slideLayout10.xml><?xml version="1.0" encoding="utf-8"?>
-<p:sldLayout xmlns:a="http://schemas.openxmlformats.org/drawingml/2006/main" xmlns:r="http://schemas.openxmlformats.org/officeDocument/2006/relationships" xmlns:p="http://schemas.openxmlformats.org/presentationml/2006/main" type="vertTx" preserve="1">
+<p:sldLayout xmlns:a="http://schemas.openxmlformats.org/drawingml/2006/main" xmlns:r="http://schemas.openxmlformats.org/officeDocument/2006/relationships" xmlns:p="http://schemas.openxmlformats.org/presentationml/2006/main" xmlns:m="http://schemas.openxmlformats.org/officeDocument/2006/math" xmlns:w="http://schemas.openxmlformats.org/wordprocessingml/2006/main" matchingName="" preserve="1" showMasterPhAnim="0" showMasterSp="1" type="vertTx" userDrawn="1">
   <p:cSld name="Title and Vertical Text">
     <p:spTree>
       <p:nvGrpSpPr>
@@ -367,7 +1550,7 @@
         <p:cNvGrpSpPr/>
         <p:nvPr/>
       </p:nvGrpSpPr>
-      <p:grpSpPr>
+      <p:grpSpPr bwMode="auto">
         <a:xfrm>
           <a:off x="0" y="0"/>
           <a:ext cx="0" cy="0"/>
@@ -377,7 +1560,7 @@
       </p:grpSpPr>
       <p:sp>
         <p:nvSpPr>
-          <p:cNvPr id="2" name="Title 1"/>
+          <p:cNvPr id="1312314890" name="Title 1"/>
           <p:cNvSpPr>
             <a:spLocks noGrp="1"/>
           </p:cNvSpPr>
@@ -385,13 +1568,16 @@
             <p:ph type="title"/>
           </p:nvPr>
         </p:nvSpPr>
-        <p:spPr/>
+        <p:spPr bwMode="auto"/>
         <p:txBody>
           <a:bodyPr/>
           <a:lstStyle/>
           <a:p>
-            <a:r>
-              <a:rPr lang="en-US" smtClean="0"/>
+            <a:pPr>
+              <a:defRPr/>
+            </a:pPr>
+            <a:r>
+              <a:rPr lang="en-US"/>
               <a:t>Click to edit Master title style</a:t>
             </a:r>
             <a:endParaRPr lang="en-US"/>
@@ -400,7 +1586,7 @@
       </p:sp>
       <p:sp>
         <p:nvSpPr>
-          <p:cNvPr id="3" name="Vertical Text Placeholder 2"/>
+          <p:cNvPr id="1346271714" name="Vertical Text Placeholder 2"/>
           <p:cNvSpPr>
             <a:spLocks noGrp="1"/>
           </p:cNvSpPr>
@@ -408,42 +1594,56 @@
             <p:ph type="body" orient="vert" idx="1"/>
           </p:nvPr>
         </p:nvSpPr>
-        <p:spPr/>
+        <p:spPr bwMode="auto"/>
         <p:txBody>
           <a:bodyPr vert="eaVert"/>
           <a:lstStyle/>
           <a:p>
-            <a:pPr lvl="0"/>
-            <a:r>
-              <a:rPr lang="en-US" smtClean="0"/>
+            <a:pPr lvl="0">
+              <a:defRPr/>
+            </a:pPr>
+            <a:r>
+              <a:rPr lang="en-US"/>
               <a:t>Click to edit Master text styles</a:t>
             </a:r>
-          </a:p>
-          <a:p>
-            <a:pPr lvl="1"/>
-            <a:r>
-              <a:rPr lang="en-US" smtClean="0"/>
+            <a:endParaRPr/>
+          </a:p>
+          <a:p>
+            <a:pPr lvl="1">
+              <a:defRPr/>
+            </a:pPr>
+            <a:r>
+              <a:rPr lang="en-US"/>
               <a:t>Second level</a:t>
             </a:r>
-          </a:p>
-          <a:p>
-            <a:pPr lvl="2"/>
-            <a:r>
-              <a:rPr lang="en-US" smtClean="0"/>
+            <a:endParaRPr/>
+          </a:p>
+          <a:p>
+            <a:pPr lvl="2">
+              <a:defRPr/>
+            </a:pPr>
+            <a:r>
+              <a:rPr lang="en-US"/>
               <a:t>Third level</a:t>
             </a:r>
-          </a:p>
-          <a:p>
-            <a:pPr lvl="3"/>
-            <a:r>
-              <a:rPr lang="en-US" smtClean="0"/>
+            <a:endParaRPr/>
+          </a:p>
+          <a:p>
+            <a:pPr lvl="3">
+              <a:defRPr/>
+            </a:pPr>
+            <a:r>
+              <a:rPr lang="en-US"/>
               <a:t>Fourth level</a:t>
             </a:r>
-          </a:p>
-          <a:p>
-            <a:pPr lvl="4"/>
-            <a:r>
-              <a:rPr lang="en-US" smtClean="0"/>
+            <a:endParaRPr/>
+          </a:p>
+          <a:p>
+            <a:pPr lvl="4">
+              <a:defRPr/>
+            </a:pPr>
+            <a:r>
+              <a:rPr lang="en-US"/>
               <a:t>Fifth level</a:t>
             </a:r>
             <a:endParaRPr lang="en-US"/>
@@ -452,7 +1652,7 @@
       </p:sp>
       <p:sp>
         <p:nvSpPr>
-          <p:cNvPr id="4" name="Date Placeholder 3"/>
+          <p:cNvPr id="1572929168" name="Date Placeholder 3"/>
           <p:cNvSpPr>
             <a:spLocks noGrp="1"/>
           </p:cNvSpPr>
@@ -460,13 +1660,16 @@
             <p:ph type="dt" sz="half" idx="10"/>
           </p:nvPr>
         </p:nvSpPr>
-        <p:spPr/>
+        <p:spPr bwMode="auto"/>
         <p:txBody>
           <a:bodyPr/>
           <a:lstStyle/>
           <a:p>
+            <a:pPr>
+              <a:defRPr/>
+            </a:pPr>
             <a:fld id="{5BCAD085-E8A6-8845-BD4E-CB4CCA059FC4}" type="datetimeFigureOut">
-              <a:rPr lang="en-US" smtClean="0"/>
+              <a:rPr lang="en-US"/>
               <a:t>1/27/13</a:t>
             </a:fld>
             <a:endParaRPr lang="en-US"/>
@@ -475,7 +1678,7 @@
       </p:sp>
       <p:sp>
         <p:nvSpPr>
-          <p:cNvPr id="5" name="Footer Placeholder 4"/>
+          <p:cNvPr id="2105114838" name="Footer Placeholder 4"/>
           <p:cNvSpPr>
             <a:spLocks noGrp="1"/>
           </p:cNvSpPr>
@@ -483,18 +1686,21 @@
             <p:ph type="ftr" sz="quarter" idx="11"/>
           </p:nvPr>
         </p:nvSpPr>
-        <p:spPr/>
+        <p:spPr bwMode="auto"/>
         <p:txBody>
           <a:bodyPr/>
           <a:lstStyle/>
           <a:p>
+            <a:pPr>
+              <a:defRPr/>
+            </a:pPr>
             <a:endParaRPr lang="en-US"/>
           </a:p>
         </p:txBody>
       </p:sp>
       <p:sp>
         <p:nvSpPr>
-          <p:cNvPr id="6" name="Slide Number Placeholder 5"/>
+          <p:cNvPr id="771343536" name="Slide Number Placeholder 5"/>
           <p:cNvSpPr>
             <a:spLocks noGrp="1"/>
           </p:cNvSpPr>
@@ -502,13 +1708,16 @@
             <p:ph type="sldNum" sz="quarter" idx="12"/>
           </p:nvPr>
         </p:nvSpPr>
-        <p:spPr/>
+        <p:spPr bwMode="auto"/>
         <p:txBody>
           <a:bodyPr/>
           <a:lstStyle/>
           <a:p>
+            <a:pPr>
+              <a:defRPr/>
+            </a:pPr>
             <a:fld id="{C1FF6DA9-008F-8B48-92A6-B652298478BF}" type="slidenum">
-              <a:rPr lang="en-US" smtClean="0"/>
+              <a:rPr lang="en-US"/>
               <a:t>‹#›</a:t>
             </a:fld>
             <a:endParaRPr lang="en-US"/>
@@ -516,11 +1725,6 @@
         </p:txBody>
       </p:sp>
     </p:spTree>
-    <p:extLst>
-      <p:ext uri="{BB962C8B-B14F-4D97-AF65-F5344CB8AC3E}">
-        <p14:creationId xmlns:p14="http://schemas.microsoft.com/office/powerpoint/2010/main" val="2910927964"/>
-      </p:ext>
-    </p:extLst>
   </p:cSld>
   <p:clrMapOvr>
     <a:masterClrMapping/>
@@ -529,7 +1733,7 @@
 </file>
 
 <file path=ppt/slideLayouts/slideLayout11.xml><?xml version="1.0" encoding="utf-8"?>
-<p:sldLayout xmlns:a="http://schemas.openxmlformats.org/drawingml/2006/main" xmlns:r="http://schemas.openxmlformats.org/officeDocument/2006/relationships" xmlns:p="http://schemas.openxmlformats.org/presentationml/2006/main" type="vertTitleAndTx" preserve="1">
+<p:sldLayout xmlns:a="http://schemas.openxmlformats.org/drawingml/2006/main" xmlns:r="http://schemas.openxmlformats.org/officeDocument/2006/relationships" xmlns:p="http://schemas.openxmlformats.org/presentationml/2006/main" xmlns:m="http://schemas.openxmlformats.org/officeDocument/2006/math" xmlns:w="http://schemas.openxmlformats.org/wordprocessingml/2006/main" matchingName="" preserve="1" showMasterPhAnim="0" showMasterSp="1" type="vertTitleAndTx" userDrawn="1">
   <p:cSld name="Vertical Title and Text">
     <p:spTree>
       <p:nvGrpSpPr>
@@ -537,7 +1741,7 @@
         <p:cNvGrpSpPr/>
         <p:nvPr/>
       </p:nvGrpSpPr>
-      <p:grpSpPr>
+      <p:grpSpPr bwMode="auto">
         <a:xfrm>
           <a:off x="0" y="0"/>
           <a:ext cx="0" cy="0"/>
@@ -547,7 +1751,7 @@
       </p:grpSpPr>
       <p:sp>
         <p:nvSpPr>
-          <p:cNvPr id="2" name="Vertical Title 1"/>
+          <p:cNvPr id="909490694" name="Vertical Title 1"/>
           <p:cNvSpPr>
             <a:spLocks noGrp="1"/>
           </p:cNvSpPr>
@@ -555,7 +1759,7 @@
             <p:ph type="title" orient="vert"/>
           </p:nvPr>
         </p:nvSpPr>
-        <p:spPr>
+        <p:spPr bwMode="auto">
           <a:xfrm>
             <a:off x="6629400" y="274638"/>
             <a:ext cx="2057400" cy="5851525"/>
@@ -565,8 +1769,11 @@
           <a:bodyPr vert="eaVert"/>
           <a:lstStyle/>
           <a:p>
-            <a:r>
-              <a:rPr lang="en-US" smtClean="0"/>
+            <a:pPr>
+              <a:defRPr/>
+            </a:pPr>
+            <a:r>
+              <a:rPr lang="en-US"/>
               <a:t>Click to edit Master title style</a:t>
             </a:r>
             <a:endParaRPr lang="en-US"/>
@@ -575,7 +1782,7 @@
       </p:sp>
       <p:sp>
         <p:nvSpPr>
-          <p:cNvPr id="3" name="Vertical Text Placeholder 2"/>
+          <p:cNvPr id="2068900931" name="Vertical Text Placeholder 2"/>
           <p:cNvSpPr>
             <a:spLocks noGrp="1"/>
           </p:cNvSpPr>
@@ -583,7 +1790,7 @@
             <p:ph type="body" orient="vert" idx="1"/>
           </p:nvPr>
         </p:nvSpPr>
-        <p:spPr>
+        <p:spPr bwMode="auto">
           <a:xfrm>
             <a:off x="457200" y="274638"/>
             <a:ext cx="6019800" cy="5851525"/>
@@ -593,37 +1800,51 @@
           <a:bodyPr vert="eaVert"/>
           <a:lstStyle/>
           <a:p>
-            <a:pPr lvl="0"/>
-            <a:r>
-              <a:rPr lang="en-US" smtClean="0"/>
+            <a:pPr lvl="0">
+              <a:defRPr/>
+            </a:pPr>
+            <a:r>
+              <a:rPr lang="en-US"/>
               <a:t>Click to edit Master text styles</a:t>
             </a:r>
-          </a:p>
-          <a:p>
-            <a:pPr lvl="1"/>
-            <a:r>
-              <a:rPr lang="en-US" smtClean="0"/>
+            <a:endParaRPr/>
+          </a:p>
+          <a:p>
+            <a:pPr lvl="1">
+              <a:defRPr/>
+            </a:pPr>
+            <a:r>
+              <a:rPr lang="en-US"/>
               <a:t>Second level</a:t>
             </a:r>
-          </a:p>
-          <a:p>
-            <a:pPr lvl="2"/>
-            <a:r>
-              <a:rPr lang="en-US" smtClean="0"/>
+            <a:endParaRPr/>
+          </a:p>
+          <a:p>
+            <a:pPr lvl="2">
+              <a:defRPr/>
+            </a:pPr>
+            <a:r>
+              <a:rPr lang="en-US"/>
               <a:t>Third level</a:t>
             </a:r>
-          </a:p>
-          <a:p>
-            <a:pPr lvl="3"/>
-            <a:r>
-              <a:rPr lang="en-US" smtClean="0"/>
+            <a:endParaRPr/>
+          </a:p>
+          <a:p>
+            <a:pPr lvl="3">
+              <a:defRPr/>
+            </a:pPr>
+            <a:r>
+              <a:rPr lang="en-US"/>
               <a:t>Fourth level</a:t>
             </a:r>
-          </a:p>
-          <a:p>
-            <a:pPr lvl="4"/>
-            <a:r>
-              <a:rPr lang="en-US" smtClean="0"/>
+            <a:endParaRPr/>
+          </a:p>
+          <a:p>
+            <a:pPr lvl="4">
+              <a:defRPr/>
+            </a:pPr>
+            <a:r>
+              <a:rPr lang="en-US"/>
               <a:t>Fifth level</a:t>
             </a:r>
             <a:endParaRPr lang="en-US"/>
@@ -632,7 +1853,7 @@
       </p:sp>
       <p:sp>
         <p:nvSpPr>
-          <p:cNvPr id="4" name="Date Placeholder 3"/>
+          <p:cNvPr id="1152799370" name="Date Placeholder 3"/>
           <p:cNvSpPr>
             <a:spLocks noGrp="1"/>
           </p:cNvSpPr>
@@ -640,13 +1861,16 @@
             <p:ph type="dt" sz="half" idx="10"/>
           </p:nvPr>
         </p:nvSpPr>
-        <p:spPr/>
+        <p:spPr bwMode="auto"/>
         <p:txBody>
           <a:bodyPr/>
           <a:lstStyle/>
           <a:p>
+            <a:pPr>
+              <a:defRPr/>
+            </a:pPr>
             <a:fld id="{5BCAD085-E8A6-8845-BD4E-CB4CCA059FC4}" type="datetimeFigureOut">
-              <a:rPr lang="en-US" smtClean="0"/>
+              <a:rPr lang="en-US"/>
               <a:t>1/27/13</a:t>
             </a:fld>
             <a:endParaRPr lang="en-US"/>
@@ -655,7 +1879,7 @@
       </p:sp>
       <p:sp>
         <p:nvSpPr>
-          <p:cNvPr id="5" name="Footer Placeholder 4"/>
+          <p:cNvPr id="1561504303" name="Footer Placeholder 4"/>
           <p:cNvSpPr>
             <a:spLocks noGrp="1"/>
           </p:cNvSpPr>
@@ -663,18 +1887,21 @@
             <p:ph type="ftr" sz="quarter" idx="11"/>
           </p:nvPr>
         </p:nvSpPr>
-        <p:spPr/>
+        <p:spPr bwMode="auto"/>
         <p:txBody>
           <a:bodyPr/>
           <a:lstStyle/>
           <a:p>
+            <a:pPr>
+              <a:defRPr/>
+            </a:pPr>
             <a:endParaRPr lang="en-US"/>
           </a:p>
         </p:txBody>
       </p:sp>
       <p:sp>
         <p:nvSpPr>
-          <p:cNvPr id="6" name="Slide Number Placeholder 5"/>
+          <p:cNvPr id="1941866697" name="Slide Number Placeholder 5"/>
           <p:cNvSpPr>
             <a:spLocks noGrp="1"/>
           </p:cNvSpPr>
@@ -682,13 +1909,16 @@
             <p:ph type="sldNum" sz="quarter" idx="12"/>
           </p:nvPr>
         </p:nvSpPr>
-        <p:spPr/>
+        <p:spPr bwMode="auto"/>
         <p:txBody>
           <a:bodyPr/>
           <a:lstStyle/>
           <a:p>
+            <a:pPr>
+              <a:defRPr/>
+            </a:pPr>
             <a:fld id="{C1FF6DA9-008F-8B48-92A6-B652298478BF}" type="slidenum">
-              <a:rPr lang="en-US" smtClean="0"/>
+              <a:rPr lang="en-US"/>
               <a:t>‹#›</a:t>
             </a:fld>
             <a:endParaRPr lang="en-US"/>
@@ -696,11 +1926,6 @@
         </p:txBody>
       </p:sp>
     </p:spTree>
-    <p:extLst>
-      <p:ext uri="{BB962C8B-B14F-4D97-AF65-F5344CB8AC3E}">
-        <p14:creationId xmlns:p14="http://schemas.microsoft.com/office/powerpoint/2010/main" val="3612223792"/>
-      </p:ext>
-    </p:extLst>
   </p:cSld>
   <p:clrMapOvr>
     <a:masterClrMapping/>
@@ -709,7 +1934,7 @@
 </file>
 
 <file path=ppt/slideLayouts/slideLayout2.xml><?xml version="1.0" encoding="utf-8"?>
-<p:sldLayout xmlns:a="http://schemas.openxmlformats.org/drawingml/2006/main" xmlns:r="http://schemas.openxmlformats.org/officeDocument/2006/relationships" xmlns:p="http://schemas.openxmlformats.org/presentationml/2006/main" type="obj" preserve="1">
+<p:sldLayout xmlns:a="http://schemas.openxmlformats.org/drawingml/2006/main" xmlns:r="http://schemas.openxmlformats.org/officeDocument/2006/relationships" xmlns:p="http://schemas.openxmlformats.org/presentationml/2006/main" xmlns:m="http://schemas.openxmlformats.org/officeDocument/2006/math" xmlns:w="http://schemas.openxmlformats.org/wordprocessingml/2006/main" matchingName="" preserve="1" showMasterPhAnim="0" showMasterSp="1" type="obj" userDrawn="1">
   <p:cSld name="Title and Content">
     <p:spTree>
       <p:nvGrpSpPr>
@@ -717,7 +1942,7 @@
         <p:cNvGrpSpPr/>
         <p:nvPr/>
       </p:nvGrpSpPr>
-      <p:grpSpPr>
+      <p:grpSpPr bwMode="auto">
         <a:xfrm>
           <a:off x="0" y="0"/>
           <a:ext cx="0" cy="0"/>
@@ -727,7 +1952,7 @@
       </p:grpSpPr>
       <p:sp>
         <p:nvSpPr>
-          <p:cNvPr id="2" name="Title 1"/>
+          <p:cNvPr id="108360185" name="Title 1"/>
           <p:cNvSpPr>
             <a:spLocks noGrp="1"/>
           </p:cNvSpPr>
@@ -735,13 +1960,16 @@
             <p:ph type="title"/>
           </p:nvPr>
         </p:nvSpPr>
-        <p:spPr/>
+        <p:spPr bwMode="auto"/>
         <p:txBody>
           <a:bodyPr/>
           <a:lstStyle/>
           <a:p>
-            <a:r>
-              <a:rPr lang="en-US" smtClean="0"/>
+            <a:pPr>
+              <a:defRPr/>
+            </a:pPr>
+            <a:r>
+              <a:rPr lang="en-US"/>
               <a:t>Click to edit Master title style</a:t>
             </a:r>
             <a:endParaRPr lang="en-US"/>
@@ -750,7 +1978,7 @@
       </p:sp>
       <p:sp>
         <p:nvSpPr>
-          <p:cNvPr id="3" name="Content Placeholder 2"/>
+          <p:cNvPr id="484752942" name="Content Placeholder 2"/>
           <p:cNvSpPr>
             <a:spLocks noGrp="1"/>
           </p:cNvSpPr>
@@ -758,42 +1986,56 @@
             <p:ph idx="1"/>
           </p:nvPr>
         </p:nvSpPr>
-        <p:spPr/>
+        <p:spPr bwMode="auto"/>
         <p:txBody>
           <a:bodyPr/>
           <a:lstStyle/>
           <a:p>
-            <a:pPr lvl="0"/>
-            <a:r>
-              <a:rPr lang="en-US" smtClean="0"/>
+            <a:pPr lvl="0">
+              <a:defRPr/>
+            </a:pPr>
+            <a:r>
+              <a:rPr lang="en-US"/>
               <a:t>Click to edit Master text styles</a:t>
             </a:r>
-          </a:p>
-          <a:p>
-            <a:pPr lvl="1"/>
-            <a:r>
-              <a:rPr lang="en-US" smtClean="0"/>
+            <a:endParaRPr/>
+          </a:p>
+          <a:p>
+            <a:pPr lvl="1">
+              <a:defRPr/>
+            </a:pPr>
+            <a:r>
+              <a:rPr lang="en-US"/>
               <a:t>Second level</a:t>
             </a:r>
-          </a:p>
-          <a:p>
-            <a:pPr lvl="2"/>
-            <a:r>
-              <a:rPr lang="en-US" smtClean="0"/>
+            <a:endParaRPr/>
+          </a:p>
+          <a:p>
+            <a:pPr lvl="2">
+              <a:defRPr/>
+            </a:pPr>
+            <a:r>
+              <a:rPr lang="en-US"/>
               <a:t>Third level</a:t>
             </a:r>
-          </a:p>
-          <a:p>
-            <a:pPr lvl="3"/>
-            <a:r>
-              <a:rPr lang="en-US" smtClean="0"/>
+            <a:endParaRPr/>
+          </a:p>
+          <a:p>
+            <a:pPr lvl="3">
+              <a:defRPr/>
+            </a:pPr>
+            <a:r>
+              <a:rPr lang="en-US"/>
               <a:t>Fourth level</a:t>
             </a:r>
-          </a:p>
-          <a:p>
-            <a:pPr lvl="4"/>
-            <a:r>
-              <a:rPr lang="en-US" smtClean="0"/>
+            <a:endParaRPr/>
+          </a:p>
+          <a:p>
+            <a:pPr lvl="4">
+              <a:defRPr/>
+            </a:pPr>
+            <a:r>
+              <a:rPr lang="en-US"/>
               <a:t>Fifth level</a:t>
             </a:r>
             <a:endParaRPr lang="en-US"/>
@@ -802,7 +2044,7 @@
       </p:sp>
       <p:sp>
         <p:nvSpPr>
-          <p:cNvPr id="4" name="Date Placeholder 3"/>
+          <p:cNvPr id="635550971" name="Date Placeholder 3"/>
           <p:cNvSpPr>
             <a:spLocks noGrp="1"/>
           </p:cNvSpPr>
@@ -810,13 +2052,16 @@
             <p:ph type="dt" sz="half" idx="10"/>
           </p:nvPr>
         </p:nvSpPr>
-        <p:spPr/>
+        <p:spPr bwMode="auto"/>
         <p:txBody>
           <a:bodyPr/>
           <a:lstStyle/>
           <a:p>
+            <a:pPr>
+              <a:defRPr/>
+            </a:pPr>
             <a:fld id="{5BCAD085-E8A6-8845-BD4E-CB4CCA059FC4}" type="datetimeFigureOut">
-              <a:rPr lang="en-US" smtClean="0"/>
+              <a:rPr lang="en-US"/>
               <a:t>1/27/13</a:t>
             </a:fld>
             <a:endParaRPr lang="en-US"/>
@@ -825,7 +2070,7 @@
       </p:sp>
       <p:sp>
         <p:nvSpPr>
-          <p:cNvPr id="5" name="Footer Placeholder 4"/>
+          <p:cNvPr id="1505814630" name="Footer Placeholder 4"/>
           <p:cNvSpPr>
             <a:spLocks noGrp="1"/>
           </p:cNvSpPr>
@@ -833,18 +2078,21 @@
             <p:ph type="ftr" sz="quarter" idx="11"/>
           </p:nvPr>
         </p:nvSpPr>
-        <p:spPr/>
+        <p:spPr bwMode="auto"/>
         <p:txBody>
           <a:bodyPr/>
           <a:lstStyle/>
           <a:p>
+            <a:pPr>
+              <a:defRPr/>
+            </a:pPr>
             <a:endParaRPr lang="en-US"/>
           </a:p>
         </p:txBody>
       </p:sp>
       <p:sp>
         <p:nvSpPr>
-          <p:cNvPr id="6" name="Slide Number Placeholder 5"/>
+          <p:cNvPr id="1670151451" name="Slide Number Placeholder 5"/>
           <p:cNvSpPr>
             <a:spLocks noGrp="1"/>
           </p:cNvSpPr>
@@ -852,13 +2100,16 @@
             <p:ph type="sldNum" sz="quarter" idx="12"/>
           </p:nvPr>
         </p:nvSpPr>
-        <p:spPr/>
+        <p:spPr bwMode="auto"/>
         <p:txBody>
           <a:bodyPr/>
           <a:lstStyle/>
           <a:p>
+            <a:pPr>
+              <a:defRPr/>
+            </a:pPr>
             <a:fld id="{C1FF6DA9-008F-8B48-92A6-B652298478BF}" type="slidenum">
-              <a:rPr lang="en-US" smtClean="0"/>
+              <a:rPr lang="en-US"/>
               <a:t>‹#›</a:t>
             </a:fld>
             <a:endParaRPr lang="en-US"/>
@@ -866,11 +2117,6 @@
         </p:txBody>
       </p:sp>
     </p:spTree>
-    <p:extLst>
-      <p:ext uri="{BB962C8B-B14F-4D97-AF65-F5344CB8AC3E}">
-        <p14:creationId xmlns:p14="http://schemas.microsoft.com/office/powerpoint/2010/main" val="2614314258"/>
-      </p:ext>
-    </p:extLst>
   </p:cSld>
   <p:clrMapOvr>
     <a:masterClrMapping/>
@@ -879,7 +2125,7 @@
 </file>
 
 <file path=ppt/slideLayouts/slideLayout3.xml><?xml version="1.0" encoding="utf-8"?>
-<p:sldLayout xmlns:a="http://schemas.openxmlformats.org/drawingml/2006/main" xmlns:r="http://schemas.openxmlformats.org/officeDocument/2006/relationships" xmlns:p="http://schemas.openxmlformats.org/presentationml/2006/main" type="secHead" preserve="1">
+<p:sldLayout xmlns:a="http://schemas.openxmlformats.org/drawingml/2006/main" xmlns:r="http://schemas.openxmlformats.org/officeDocument/2006/relationships" xmlns:p="http://schemas.openxmlformats.org/presentationml/2006/main" xmlns:m="http://schemas.openxmlformats.org/officeDocument/2006/math" xmlns:w="http://schemas.openxmlformats.org/wordprocessingml/2006/main" matchingName="" preserve="1" showMasterPhAnim="0" showMasterSp="1" type="secHead" userDrawn="1">
   <p:cSld name="Section Header">
     <p:spTree>
       <p:nvGrpSpPr>
@@ -887,7 +2133,7 @@
         <p:cNvGrpSpPr/>
         <p:nvPr/>
       </p:nvGrpSpPr>
-      <p:grpSpPr>
+      <p:grpSpPr bwMode="auto">
         <a:xfrm>
           <a:off x="0" y="0"/>
           <a:ext cx="0" cy="0"/>
@@ -897,7 +2143,7 @@
       </p:grpSpPr>
       <p:sp>
         <p:nvSpPr>
-          <p:cNvPr id="2" name="Title 1"/>
+          <p:cNvPr id="675270331" name="Title 1"/>
           <p:cNvSpPr>
             <a:spLocks noGrp="1"/>
           </p:cNvSpPr>
@@ -905,7 +2151,7 @@
             <p:ph type="title"/>
           </p:nvPr>
         </p:nvSpPr>
-        <p:spPr>
+        <p:spPr bwMode="auto">
           <a:xfrm>
             <a:off x="722313" y="4406900"/>
             <a:ext cx="7772400" cy="1362075"/>
@@ -919,8 +2165,11 @@
             </a:lvl1pPr>
           </a:lstStyle>
           <a:p>
-            <a:r>
-              <a:rPr lang="en-US" smtClean="0"/>
+            <a:pPr>
+              <a:defRPr/>
+            </a:pPr>
+            <a:r>
+              <a:rPr lang="en-US"/>
               <a:t>Click to edit Master title style</a:t>
             </a:r>
             <a:endParaRPr lang="en-US"/>
@@ -929,7 +2178,7 @@
       </p:sp>
       <p:sp>
         <p:nvSpPr>
-          <p:cNvPr id="3" name="Text Placeholder 2"/>
+          <p:cNvPr id="676617582" name="Text Placeholder 2"/>
           <p:cNvSpPr>
             <a:spLocks noGrp="1"/>
           </p:cNvSpPr>
@@ -937,7 +2186,7 @@
             <p:ph type="body" idx="1"/>
           </p:nvPr>
         </p:nvSpPr>
-        <p:spPr>
+        <p:spPr bwMode="auto">
           <a:xfrm>
             <a:off x="722313" y="2906713"/>
             <a:ext cx="7772400" cy="1500187"/>
@@ -1038,17 +2287,20 @@
             </a:lvl9pPr>
           </a:lstStyle>
           <a:p>
-            <a:pPr lvl="0"/>
-            <a:r>
-              <a:rPr lang="en-US" smtClean="0"/>
+            <a:pPr lvl="0">
+              <a:defRPr/>
+            </a:pPr>
+            <a:r>
+              <a:rPr lang="en-US"/>
               <a:t>Click to edit Master text styles</a:t>
             </a:r>
-          </a:p>
-        </p:txBody>
-      </p:sp>
-      <p:sp>
-        <p:nvSpPr>
-          <p:cNvPr id="4" name="Date Placeholder 3"/>
+            <a:endParaRPr/>
+          </a:p>
+        </p:txBody>
+      </p:sp>
+      <p:sp>
+        <p:nvSpPr>
+          <p:cNvPr id="1706541502" name="Date Placeholder 3"/>
           <p:cNvSpPr>
             <a:spLocks noGrp="1"/>
           </p:cNvSpPr>
@@ -1056,13 +2308,16 @@
             <p:ph type="dt" sz="half" idx="10"/>
           </p:nvPr>
         </p:nvSpPr>
-        <p:spPr/>
+        <p:spPr bwMode="auto"/>
         <p:txBody>
           <a:bodyPr/>
           <a:lstStyle/>
           <a:p>
+            <a:pPr>
+              <a:defRPr/>
+            </a:pPr>
             <a:fld id="{5BCAD085-E8A6-8845-BD4E-CB4CCA059FC4}" type="datetimeFigureOut">
-              <a:rPr lang="en-US" smtClean="0"/>
+              <a:rPr lang="en-US"/>
               <a:t>1/27/13</a:t>
             </a:fld>
             <a:endParaRPr lang="en-US"/>
@@ -1071,7 +2326,7 @@
       </p:sp>
       <p:sp>
         <p:nvSpPr>
-          <p:cNvPr id="5" name="Footer Placeholder 4"/>
+          <p:cNvPr id="1122342535" name="Footer Placeholder 4"/>
           <p:cNvSpPr>
             <a:spLocks noGrp="1"/>
           </p:cNvSpPr>
@@ -1079,18 +2334,21 @@
             <p:ph type="ftr" sz="quarter" idx="11"/>
           </p:nvPr>
         </p:nvSpPr>
-        <p:spPr/>
+        <p:spPr bwMode="auto"/>
         <p:txBody>
           <a:bodyPr/>
           <a:lstStyle/>
           <a:p>
+            <a:pPr>
+              <a:defRPr/>
+            </a:pPr>
             <a:endParaRPr lang="en-US"/>
           </a:p>
         </p:txBody>
       </p:sp>
       <p:sp>
         <p:nvSpPr>
-          <p:cNvPr id="6" name="Slide Number Placeholder 5"/>
+          <p:cNvPr id="376740652" name="Slide Number Placeholder 5"/>
           <p:cNvSpPr>
             <a:spLocks noGrp="1"/>
           </p:cNvSpPr>
@@ -1098,13 +2356,16 @@
             <p:ph type="sldNum" sz="quarter" idx="12"/>
           </p:nvPr>
         </p:nvSpPr>
-        <p:spPr/>
+        <p:spPr bwMode="auto"/>
         <p:txBody>
           <a:bodyPr/>
           <a:lstStyle/>
           <a:p>
+            <a:pPr>
+              <a:defRPr/>
+            </a:pPr>
             <a:fld id="{C1FF6DA9-008F-8B48-92A6-B652298478BF}" type="slidenum">
-              <a:rPr lang="en-US" smtClean="0"/>
+              <a:rPr lang="en-US"/>
               <a:t>‹#›</a:t>
             </a:fld>
             <a:endParaRPr lang="en-US"/>
@@ -1112,11 +2373,6 @@
         </p:txBody>
       </p:sp>
     </p:spTree>
-    <p:extLst>
-      <p:ext uri="{BB962C8B-B14F-4D97-AF65-F5344CB8AC3E}">
-        <p14:creationId xmlns:p14="http://schemas.microsoft.com/office/powerpoint/2010/main" val="960648375"/>
-      </p:ext>
-    </p:extLst>
   </p:cSld>
   <p:clrMapOvr>
     <a:masterClrMapping/>
@@ -1125,7 +2381,7 @@
 </file>
 
 <file path=ppt/slideLayouts/slideLayout4.xml><?xml version="1.0" encoding="utf-8"?>
-<p:sldLayout xmlns:a="http://schemas.openxmlformats.org/drawingml/2006/main" xmlns:r="http://schemas.openxmlformats.org/officeDocument/2006/relationships" xmlns:p="http://schemas.openxmlformats.org/presentationml/2006/main" type="twoObj" preserve="1">
+<p:sldLayout xmlns:a="http://schemas.openxmlformats.org/drawingml/2006/main" xmlns:r="http://schemas.openxmlformats.org/officeDocument/2006/relationships" xmlns:p="http://schemas.openxmlformats.org/presentationml/2006/main" xmlns:m="http://schemas.openxmlformats.org/officeDocument/2006/math" xmlns:w="http://schemas.openxmlformats.org/wordprocessingml/2006/main" matchingName="" preserve="1" showMasterPhAnim="0" showMasterSp="1" type="twoObj" userDrawn="1">
   <p:cSld name="Two Content">
     <p:spTree>
       <p:nvGrpSpPr>
@@ -1133,7 +2389,7 @@
         <p:cNvGrpSpPr/>
         <p:nvPr/>
       </p:nvGrpSpPr>
-      <p:grpSpPr>
+      <p:grpSpPr bwMode="auto">
         <a:xfrm>
           <a:off x="0" y="0"/>
           <a:ext cx="0" cy="0"/>
@@ -1143,7 +2399,7 @@
       </p:grpSpPr>
       <p:sp>
         <p:nvSpPr>
-          <p:cNvPr id="2" name="Title 1"/>
+          <p:cNvPr id="1765191878" name="Title 1"/>
           <p:cNvSpPr>
             <a:spLocks noGrp="1"/>
           </p:cNvSpPr>
@@ -1151,13 +2407,16 @@
             <p:ph type="title"/>
           </p:nvPr>
         </p:nvSpPr>
-        <p:spPr/>
+        <p:spPr bwMode="auto"/>
         <p:txBody>
           <a:bodyPr/>
           <a:lstStyle/>
           <a:p>
-            <a:r>
-              <a:rPr lang="en-US" smtClean="0"/>
+            <a:pPr>
+              <a:defRPr/>
+            </a:pPr>
+            <a:r>
+              <a:rPr lang="en-US"/>
               <a:t>Click to edit Master title style</a:t>
             </a:r>
             <a:endParaRPr lang="en-US"/>
@@ -1166,7 +2425,7 @@
       </p:sp>
       <p:sp>
         <p:nvSpPr>
-          <p:cNvPr id="3" name="Content Placeholder 2"/>
+          <p:cNvPr id="1891302198" name="Content Placeholder 2"/>
           <p:cNvSpPr>
             <a:spLocks noGrp="1"/>
           </p:cNvSpPr>
@@ -1174,7 +2433,7 @@
             <p:ph sz="half" idx="1"/>
           </p:nvPr>
         </p:nvSpPr>
-        <p:spPr>
+        <p:spPr bwMode="auto">
           <a:xfrm>
             <a:off x="457200" y="1600200"/>
             <a:ext cx="4038600" cy="4525963"/>
@@ -1212,37 +2471,51 @@
             </a:lvl9pPr>
           </a:lstStyle>
           <a:p>
-            <a:pPr lvl="0"/>
-            <a:r>
-              <a:rPr lang="en-US" smtClean="0"/>
+            <a:pPr lvl="0">
+              <a:defRPr/>
+            </a:pPr>
+            <a:r>
+              <a:rPr lang="en-US"/>
               <a:t>Click to edit Master text styles</a:t>
             </a:r>
-          </a:p>
-          <a:p>
-            <a:pPr lvl="1"/>
-            <a:r>
-              <a:rPr lang="en-US" smtClean="0"/>
+            <a:endParaRPr/>
+          </a:p>
+          <a:p>
+            <a:pPr lvl="1">
+              <a:defRPr/>
+            </a:pPr>
+            <a:r>
+              <a:rPr lang="en-US"/>
               <a:t>Second level</a:t>
             </a:r>
-          </a:p>
-          <a:p>
-            <a:pPr lvl="2"/>
-            <a:r>
-              <a:rPr lang="en-US" smtClean="0"/>
+            <a:endParaRPr/>
+          </a:p>
+          <a:p>
+            <a:pPr lvl="2">
+              <a:defRPr/>
+            </a:pPr>
+            <a:r>
+              <a:rPr lang="en-US"/>
               <a:t>Third level</a:t>
             </a:r>
-          </a:p>
-          <a:p>
-            <a:pPr lvl="3"/>
-            <a:r>
-              <a:rPr lang="en-US" smtClean="0"/>
+            <a:endParaRPr/>
+          </a:p>
+          <a:p>
+            <a:pPr lvl="3">
+              <a:defRPr/>
+            </a:pPr>
+            <a:r>
+              <a:rPr lang="en-US"/>
               <a:t>Fourth level</a:t>
             </a:r>
-          </a:p>
-          <a:p>
-            <a:pPr lvl="4"/>
-            <a:r>
-              <a:rPr lang="en-US" smtClean="0"/>
+            <a:endParaRPr/>
+          </a:p>
+          <a:p>
+            <a:pPr lvl="4">
+              <a:defRPr/>
+            </a:pPr>
+            <a:r>
+              <a:rPr lang="en-US"/>
               <a:t>Fifth level</a:t>
             </a:r>
             <a:endParaRPr lang="en-US"/>
@@ -1251,7 +2524,7 @@
       </p:sp>
       <p:sp>
         <p:nvSpPr>
-          <p:cNvPr id="4" name="Content Placeholder 3"/>
+          <p:cNvPr id="1099617350" name="Content Placeholder 3"/>
           <p:cNvSpPr>
             <a:spLocks noGrp="1"/>
           </p:cNvSpPr>
@@ -1259,7 +2532,7 @@
             <p:ph sz="half" idx="2"/>
           </p:nvPr>
         </p:nvSpPr>
-        <p:spPr>
+        <p:spPr bwMode="auto">
           <a:xfrm>
             <a:off x="4648200" y="1600200"/>
             <a:ext cx="4038600" cy="4525963"/>
@@ -1297,37 +2570,51 @@
             </a:lvl9pPr>
           </a:lstStyle>
           <a:p>
-            <a:pPr lvl="0"/>
-            <a:r>
-              <a:rPr lang="en-US" smtClean="0"/>
+            <a:pPr lvl="0">
+              <a:defRPr/>
+            </a:pPr>
+            <a:r>
+              <a:rPr lang="en-US"/>
               <a:t>Click to edit Master text styles</a:t>
             </a:r>
-          </a:p>
-          <a:p>
-            <a:pPr lvl="1"/>
-            <a:r>
-              <a:rPr lang="en-US" smtClean="0"/>
+            <a:endParaRPr/>
+          </a:p>
+          <a:p>
+            <a:pPr lvl="1">
+              <a:defRPr/>
+            </a:pPr>
+            <a:r>
+              <a:rPr lang="en-US"/>
               <a:t>Second level</a:t>
             </a:r>
-          </a:p>
-          <a:p>
-            <a:pPr lvl="2"/>
-            <a:r>
-              <a:rPr lang="en-US" smtClean="0"/>
+            <a:endParaRPr/>
+          </a:p>
+          <a:p>
+            <a:pPr lvl="2">
+              <a:defRPr/>
+            </a:pPr>
+            <a:r>
+              <a:rPr lang="en-US"/>
               <a:t>Third level</a:t>
             </a:r>
-          </a:p>
-          <a:p>
-            <a:pPr lvl="3"/>
-            <a:r>
-              <a:rPr lang="en-US" smtClean="0"/>
+            <a:endParaRPr/>
+          </a:p>
+          <a:p>
+            <a:pPr lvl="3">
+              <a:defRPr/>
+            </a:pPr>
+            <a:r>
+              <a:rPr lang="en-US"/>
               <a:t>Fourth level</a:t>
             </a:r>
-          </a:p>
-          <a:p>
-            <a:pPr lvl="4"/>
-            <a:r>
-              <a:rPr lang="en-US" smtClean="0"/>
+            <a:endParaRPr/>
+          </a:p>
+          <a:p>
+            <a:pPr lvl="4">
+              <a:defRPr/>
+            </a:pPr>
+            <a:r>
+              <a:rPr lang="en-US"/>
               <a:t>Fifth level</a:t>
             </a:r>
             <a:endParaRPr lang="en-US"/>
@@ -1336,7 +2623,7 @@
       </p:sp>
       <p:sp>
         <p:nvSpPr>
-          <p:cNvPr id="5" name="Date Placeholder 4"/>
+          <p:cNvPr id="112052163" name="Date Placeholder 4"/>
           <p:cNvSpPr>
             <a:spLocks noGrp="1"/>
           </p:cNvSpPr>
@@ -1344,13 +2631,16 @@
             <p:ph type="dt" sz="half" idx="10"/>
           </p:nvPr>
         </p:nvSpPr>
-        <p:spPr/>
+        <p:spPr bwMode="auto"/>
         <p:txBody>
           <a:bodyPr/>
           <a:lstStyle/>
           <a:p>
+            <a:pPr>
+              <a:defRPr/>
+            </a:pPr>
             <a:fld id="{5BCAD085-E8A6-8845-BD4E-CB4CCA059FC4}" type="datetimeFigureOut">
-              <a:rPr lang="en-US" smtClean="0"/>
+              <a:rPr lang="en-US"/>
               <a:t>1/27/13</a:t>
             </a:fld>
             <a:endParaRPr lang="en-US"/>
@@ -1359,7 +2649,7 @@
       </p:sp>
       <p:sp>
         <p:nvSpPr>
-          <p:cNvPr id="6" name="Footer Placeholder 5"/>
+          <p:cNvPr id="282754589" name="Footer Placeholder 5"/>
           <p:cNvSpPr>
             <a:spLocks noGrp="1"/>
           </p:cNvSpPr>
@@ -1367,18 +2657,21 @@
             <p:ph type="ftr" sz="quarter" idx="11"/>
           </p:nvPr>
         </p:nvSpPr>
-        <p:spPr/>
+        <p:spPr bwMode="auto"/>
         <p:txBody>
           <a:bodyPr/>
           <a:lstStyle/>
           <a:p>
+            <a:pPr>
+              <a:defRPr/>
+            </a:pPr>
             <a:endParaRPr lang="en-US"/>
           </a:p>
         </p:txBody>
       </p:sp>
       <p:sp>
         <p:nvSpPr>
-          <p:cNvPr id="7" name="Slide Number Placeholder 6"/>
+          <p:cNvPr id="1912133613" name="Slide Number Placeholder 6"/>
           <p:cNvSpPr>
             <a:spLocks noGrp="1"/>
           </p:cNvSpPr>
@@ -1386,13 +2679,16 @@
             <p:ph type="sldNum" sz="quarter" idx="12"/>
           </p:nvPr>
         </p:nvSpPr>
-        <p:spPr/>
+        <p:spPr bwMode="auto"/>
         <p:txBody>
           <a:bodyPr/>
           <a:lstStyle/>
           <a:p>
+            <a:pPr>
+              <a:defRPr/>
+            </a:pPr>
             <a:fld id="{C1FF6DA9-008F-8B48-92A6-B652298478BF}" type="slidenum">
-              <a:rPr lang="en-US" smtClean="0"/>
+              <a:rPr lang="en-US"/>
               <a:t>‹#›</a:t>
             </a:fld>
             <a:endParaRPr lang="en-US"/>
@@ -1400,11 +2696,6 @@
         </p:txBody>
       </p:sp>
     </p:spTree>
-    <p:extLst>
-      <p:ext uri="{BB962C8B-B14F-4D97-AF65-F5344CB8AC3E}">
-        <p14:creationId xmlns:p14="http://schemas.microsoft.com/office/powerpoint/2010/main" val="2782244947"/>
-      </p:ext>
-    </p:extLst>
   </p:cSld>
   <p:clrMapOvr>
     <a:masterClrMapping/>
@@ -1413,7 +2704,7 @@
 </file>
 
 <file path=ppt/slideLayouts/slideLayout5.xml><?xml version="1.0" encoding="utf-8"?>
-<p:sldLayout xmlns:a="http://schemas.openxmlformats.org/drawingml/2006/main" xmlns:r="http://schemas.openxmlformats.org/officeDocument/2006/relationships" xmlns:p="http://schemas.openxmlformats.org/presentationml/2006/main" type="twoTxTwoObj" preserve="1">
+<p:sldLayout xmlns:a="http://schemas.openxmlformats.org/drawingml/2006/main" xmlns:r="http://schemas.openxmlformats.org/officeDocument/2006/relationships" xmlns:p="http://schemas.openxmlformats.org/presentationml/2006/main" xmlns:m="http://schemas.openxmlformats.org/officeDocument/2006/math" xmlns:w="http://schemas.openxmlformats.org/wordprocessingml/2006/main" matchingName="" preserve="1" showMasterPhAnim="0" showMasterSp="1" type="twoTxTwoObj" userDrawn="1">
   <p:cSld name="Comparison">
     <p:spTree>
       <p:nvGrpSpPr>
@@ -1421,7 +2712,7 @@
         <p:cNvGrpSpPr/>
         <p:nvPr/>
       </p:nvGrpSpPr>
-      <p:grpSpPr>
+      <p:grpSpPr bwMode="auto">
         <a:xfrm>
           <a:off x="0" y="0"/>
           <a:ext cx="0" cy="0"/>
@@ -1431,7 +2722,7 @@
       </p:grpSpPr>
       <p:sp>
         <p:nvSpPr>
-          <p:cNvPr id="2" name="Title 1"/>
+          <p:cNvPr id="1449772034" name="Title 1"/>
           <p:cNvSpPr>
             <a:spLocks noGrp="1"/>
           </p:cNvSpPr>
@@ -1439,7 +2730,7 @@
             <p:ph type="title"/>
           </p:nvPr>
         </p:nvSpPr>
-        <p:spPr/>
+        <p:spPr bwMode="auto"/>
         <p:txBody>
           <a:bodyPr/>
           <a:lstStyle>
@@ -1448,8 +2739,11 @@
             </a:lvl1pPr>
           </a:lstStyle>
           <a:p>
-            <a:r>
-              <a:rPr lang="en-US" smtClean="0"/>
+            <a:pPr>
+              <a:defRPr/>
+            </a:pPr>
+            <a:r>
+              <a:rPr lang="en-US"/>
               <a:t>Click to edit Master title style</a:t>
             </a:r>
             <a:endParaRPr lang="en-US"/>
@@ -1458,7 +2752,7 @@
       </p:sp>
       <p:sp>
         <p:nvSpPr>
-          <p:cNvPr id="3" name="Text Placeholder 2"/>
+          <p:cNvPr id="1705288352" name="Text Placeholder 2"/>
           <p:cNvSpPr>
             <a:spLocks noGrp="1"/>
           </p:cNvSpPr>
@@ -1466,7 +2760,7 @@
             <p:ph type="body" idx="1"/>
           </p:nvPr>
         </p:nvSpPr>
-        <p:spPr>
+        <p:spPr bwMode="auto">
           <a:xfrm>
             <a:off x="457200" y="1535113"/>
             <a:ext cx="4040188" cy="639762"/>
@@ -1513,17 +2807,20 @@
             </a:lvl9pPr>
           </a:lstStyle>
           <a:p>
-            <a:pPr lvl="0"/>
-            <a:r>
-              <a:rPr lang="en-US" smtClean="0"/>
+            <a:pPr lvl="0">
+              <a:defRPr/>
+            </a:pPr>
+            <a:r>
+              <a:rPr lang="en-US"/>
               <a:t>Click to edit Master text styles</a:t>
             </a:r>
-          </a:p>
-        </p:txBody>
-      </p:sp>
-      <p:sp>
-        <p:nvSpPr>
-          <p:cNvPr id="4" name="Content Placeholder 3"/>
+            <a:endParaRPr/>
+          </a:p>
+        </p:txBody>
+      </p:sp>
+      <p:sp>
+        <p:nvSpPr>
+          <p:cNvPr id="1597970649" name="Content Placeholder 3"/>
           <p:cNvSpPr>
             <a:spLocks noGrp="1"/>
           </p:cNvSpPr>
@@ -1531,7 +2828,7 @@
             <p:ph sz="half" idx="2"/>
           </p:nvPr>
         </p:nvSpPr>
-        <p:spPr>
+        <p:spPr bwMode="auto">
           <a:xfrm>
             <a:off x="457200" y="2174875"/>
             <a:ext cx="4040188" cy="3951288"/>
@@ -1569,37 +2866,51 @@
             </a:lvl9pPr>
           </a:lstStyle>
           <a:p>
-            <a:pPr lvl="0"/>
-            <a:r>
-              <a:rPr lang="en-US" smtClean="0"/>
+            <a:pPr lvl="0">
+              <a:defRPr/>
+            </a:pPr>
+            <a:r>
+              <a:rPr lang="en-US"/>
               <a:t>Click to edit Master text styles</a:t>
             </a:r>
-          </a:p>
-          <a:p>
-            <a:pPr lvl="1"/>
-            <a:r>
-              <a:rPr lang="en-US" smtClean="0"/>
+            <a:endParaRPr/>
+          </a:p>
+          <a:p>
+            <a:pPr lvl="1">
+              <a:defRPr/>
+            </a:pPr>
+            <a:r>
+              <a:rPr lang="en-US"/>
               <a:t>Second level</a:t>
             </a:r>
-          </a:p>
-          <a:p>
-            <a:pPr lvl="2"/>
-            <a:r>
-              <a:rPr lang="en-US" smtClean="0"/>
+            <a:endParaRPr/>
+          </a:p>
+          <a:p>
+            <a:pPr lvl="2">
+              <a:defRPr/>
+            </a:pPr>
+            <a:r>
+              <a:rPr lang="en-US"/>
               <a:t>Third level</a:t>
             </a:r>
-          </a:p>
-          <a:p>
-            <a:pPr lvl="3"/>
-            <a:r>
-              <a:rPr lang="en-US" smtClean="0"/>
+            <a:endParaRPr/>
+          </a:p>
+          <a:p>
+            <a:pPr lvl="3">
+              <a:defRPr/>
+            </a:pPr>
+            <a:r>
+              <a:rPr lang="en-US"/>
               <a:t>Fourth level</a:t>
             </a:r>
-          </a:p>
-          <a:p>
-            <a:pPr lvl="4"/>
-            <a:r>
-              <a:rPr lang="en-US" smtClean="0"/>
+            <a:endParaRPr/>
+          </a:p>
+          <a:p>
+            <a:pPr lvl="4">
+              <a:defRPr/>
+            </a:pPr>
+            <a:r>
+              <a:rPr lang="en-US"/>
               <a:t>Fifth level</a:t>
             </a:r>
             <a:endParaRPr lang="en-US"/>
@@ -1608,7 +2919,7 @@
       </p:sp>
       <p:sp>
         <p:nvSpPr>
-          <p:cNvPr id="5" name="Text Placeholder 4"/>
+          <p:cNvPr id="1917518804" name="Text Placeholder 4"/>
           <p:cNvSpPr>
             <a:spLocks noGrp="1"/>
           </p:cNvSpPr>
@@ -1616,7 +2927,7 @@
             <p:ph type="body" sz="quarter" idx="3"/>
           </p:nvPr>
         </p:nvSpPr>
-        <p:spPr>
+        <p:spPr bwMode="auto">
           <a:xfrm>
             <a:off x="4645025" y="1535113"/>
             <a:ext cx="4041775" cy="639762"/>
@@ -1663,17 +2974,20 @@
             </a:lvl9pPr>
           </a:lstStyle>
           <a:p>
-            <a:pPr lvl="0"/>
-            <a:r>
-              <a:rPr lang="en-US" smtClean="0"/>
+            <a:pPr lvl="0">
+              <a:defRPr/>
+            </a:pPr>
+            <a:r>
+              <a:rPr lang="en-US"/>
               <a:t>Click to edit Master text styles</a:t>
             </a:r>
-          </a:p>
-        </p:txBody>
-      </p:sp>
-      <p:sp>
-        <p:nvSpPr>
-          <p:cNvPr id="6" name="Content Placeholder 5"/>
+            <a:endParaRPr/>
+          </a:p>
+        </p:txBody>
+      </p:sp>
+      <p:sp>
+        <p:nvSpPr>
+          <p:cNvPr id="698079773" name="Content Placeholder 5"/>
           <p:cNvSpPr>
             <a:spLocks noGrp="1"/>
           </p:cNvSpPr>
@@ -1681,7 +2995,7 @@
             <p:ph sz="quarter" idx="4"/>
           </p:nvPr>
         </p:nvSpPr>
-        <p:spPr>
+        <p:spPr bwMode="auto">
           <a:xfrm>
             <a:off x="4645025" y="2174875"/>
             <a:ext cx="4041775" cy="3951288"/>
@@ -1719,37 +3033,51 @@
             </a:lvl9pPr>
           </a:lstStyle>
           <a:p>
-            <a:pPr lvl="0"/>
-            <a:r>
-              <a:rPr lang="en-US" smtClean="0"/>
+            <a:pPr lvl="0">
+              <a:defRPr/>
+            </a:pPr>
+            <a:r>
+              <a:rPr lang="en-US"/>
               <a:t>Click to edit Master text styles</a:t>
             </a:r>
-          </a:p>
-          <a:p>
-            <a:pPr lvl="1"/>
-            <a:r>
-              <a:rPr lang="en-US" smtClean="0"/>
+            <a:endParaRPr/>
+          </a:p>
+          <a:p>
+            <a:pPr lvl="1">
+              <a:defRPr/>
+            </a:pPr>
+            <a:r>
+              <a:rPr lang="en-US"/>
               <a:t>Second level</a:t>
             </a:r>
-          </a:p>
-          <a:p>
-            <a:pPr lvl="2"/>
-            <a:r>
-              <a:rPr lang="en-US" smtClean="0"/>
+            <a:endParaRPr/>
+          </a:p>
+          <a:p>
+            <a:pPr lvl="2">
+              <a:defRPr/>
+            </a:pPr>
+            <a:r>
+              <a:rPr lang="en-US"/>
               <a:t>Third level</a:t>
             </a:r>
-          </a:p>
-          <a:p>
-            <a:pPr lvl="3"/>
-            <a:r>
-              <a:rPr lang="en-US" smtClean="0"/>
+            <a:endParaRPr/>
+          </a:p>
+          <a:p>
+            <a:pPr lvl="3">
+              <a:defRPr/>
+            </a:pPr>
+            <a:r>
+              <a:rPr lang="en-US"/>
               <a:t>Fourth level</a:t>
             </a:r>
-          </a:p>
-          <a:p>
-            <a:pPr lvl="4"/>
-            <a:r>
-              <a:rPr lang="en-US" smtClean="0"/>
+            <a:endParaRPr/>
+          </a:p>
+          <a:p>
+            <a:pPr lvl="4">
+              <a:defRPr/>
+            </a:pPr>
+            <a:r>
+              <a:rPr lang="en-US"/>
               <a:t>Fifth level</a:t>
             </a:r>
             <a:endParaRPr lang="en-US"/>
@@ -1758,7 +3086,7 @@
       </p:sp>
       <p:sp>
         <p:nvSpPr>
-          <p:cNvPr id="7" name="Date Placeholder 6"/>
+          <p:cNvPr id="584493494" name="Date Placeholder 6"/>
           <p:cNvSpPr>
             <a:spLocks noGrp="1"/>
           </p:cNvSpPr>
@@ -1766,13 +3094,16 @@
             <p:ph type="dt" sz="half" idx="10"/>
           </p:nvPr>
         </p:nvSpPr>
-        <p:spPr/>
+        <p:spPr bwMode="auto"/>
         <p:txBody>
           <a:bodyPr/>
           <a:lstStyle/>
           <a:p>
+            <a:pPr>
+              <a:defRPr/>
+            </a:pPr>
             <a:fld id="{5BCAD085-E8A6-8845-BD4E-CB4CCA059FC4}" type="datetimeFigureOut">
-              <a:rPr lang="en-US" smtClean="0"/>
+              <a:rPr lang="en-US"/>
               <a:t>1/27/13</a:t>
             </a:fld>
             <a:endParaRPr lang="en-US"/>
@@ -1781,7 +3112,7 @@
       </p:sp>
       <p:sp>
         <p:nvSpPr>
-          <p:cNvPr id="8" name="Footer Placeholder 7"/>
+          <p:cNvPr id="593956342" name="Footer Placeholder 7"/>
           <p:cNvSpPr>
             <a:spLocks noGrp="1"/>
           </p:cNvSpPr>
@@ -1789,18 +3120,21 @@
             <p:ph type="ftr" sz="quarter" idx="11"/>
           </p:nvPr>
         </p:nvSpPr>
-        <p:spPr/>
+        <p:spPr bwMode="auto"/>
         <p:txBody>
           <a:bodyPr/>
           <a:lstStyle/>
           <a:p>
+            <a:pPr>
+              <a:defRPr/>
+            </a:pPr>
             <a:endParaRPr lang="en-US"/>
           </a:p>
         </p:txBody>
       </p:sp>
       <p:sp>
         <p:nvSpPr>
-          <p:cNvPr id="9" name="Slide Number Placeholder 8"/>
+          <p:cNvPr id="695519387" name="Slide Number Placeholder 8"/>
           <p:cNvSpPr>
             <a:spLocks noGrp="1"/>
           </p:cNvSpPr>
@@ -1808,13 +3142,16 @@
             <p:ph type="sldNum" sz="quarter" idx="12"/>
           </p:nvPr>
         </p:nvSpPr>
-        <p:spPr/>
+        <p:spPr bwMode="auto"/>
         <p:txBody>
           <a:bodyPr/>
           <a:lstStyle/>
           <a:p>
+            <a:pPr>
+              <a:defRPr/>
+            </a:pPr>
             <a:fld id="{C1FF6DA9-008F-8B48-92A6-B652298478BF}" type="slidenum">
-              <a:rPr lang="en-US" smtClean="0"/>
+              <a:rPr lang="en-US"/>
               <a:t>‹#›</a:t>
             </a:fld>
             <a:endParaRPr lang="en-US"/>
@@ -1822,11 +3159,6 @@
         </p:txBody>
       </p:sp>
     </p:spTree>
-    <p:extLst>
-      <p:ext uri="{BB962C8B-B14F-4D97-AF65-F5344CB8AC3E}">
-        <p14:creationId xmlns:p14="http://schemas.microsoft.com/office/powerpoint/2010/main" val="990158736"/>
-      </p:ext>
-    </p:extLst>
   </p:cSld>
   <p:clrMapOvr>
     <a:masterClrMapping/>
@@ -1835,7 +3167,7 @@
 </file>
 
 <file path=ppt/slideLayouts/slideLayout6.xml><?xml version="1.0" encoding="utf-8"?>
-<p:sldLayout xmlns:a="http://schemas.openxmlformats.org/drawingml/2006/main" xmlns:r="http://schemas.openxmlformats.org/officeDocument/2006/relationships" xmlns:p="http://schemas.openxmlformats.org/presentationml/2006/main" type="titleOnly" preserve="1">
+<p:sldLayout xmlns:a="http://schemas.openxmlformats.org/drawingml/2006/main" xmlns:r="http://schemas.openxmlformats.org/officeDocument/2006/relationships" xmlns:p="http://schemas.openxmlformats.org/presentationml/2006/main" xmlns:m="http://schemas.openxmlformats.org/officeDocument/2006/math" xmlns:w="http://schemas.openxmlformats.org/wordprocessingml/2006/main" matchingName="" preserve="1" showMasterPhAnim="0" showMasterSp="1" type="titleOnly" userDrawn="1">
   <p:cSld name="Title Only">
     <p:spTree>
       <p:nvGrpSpPr>
@@ -1843,7 +3175,7 @@
         <p:cNvGrpSpPr/>
         <p:nvPr/>
       </p:nvGrpSpPr>
-      <p:grpSpPr>
+      <p:grpSpPr bwMode="auto">
         <a:xfrm>
           <a:off x="0" y="0"/>
           <a:ext cx="0" cy="0"/>
@@ -1853,7 +3185,7 @@
       </p:grpSpPr>
       <p:sp>
         <p:nvSpPr>
-          <p:cNvPr id="2" name="Title 1"/>
+          <p:cNvPr id="683107807" name="Title 1"/>
           <p:cNvSpPr>
             <a:spLocks noGrp="1"/>
           </p:cNvSpPr>
@@ -1861,13 +3193,16 @@
             <p:ph type="title"/>
           </p:nvPr>
         </p:nvSpPr>
-        <p:spPr/>
+        <p:spPr bwMode="auto"/>
         <p:txBody>
           <a:bodyPr/>
           <a:lstStyle/>
           <a:p>
-            <a:r>
-              <a:rPr lang="en-US" smtClean="0"/>
+            <a:pPr>
+              <a:defRPr/>
+            </a:pPr>
+            <a:r>
+              <a:rPr lang="en-US"/>
               <a:t>Click to edit Master title style</a:t>
             </a:r>
             <a:endParaRPr lang="en-US"/>
@@ -1876,7 +3211,7 @@
       </p:sp>
       <p:sp>
         <p:nvSpPr>
-          <p:cNvPr id="3" name="Date Placeholder 2"/>
+          <p:cNvPr id="1840258552" name="Date Placeholder 2"/>
           <p:cNvSpPr>
             <a:spLocks noGrp="1"/>
           </p:cNvSpPr>
@@ -1884,13 +3219,16 @@
             <p:ph type="dt" sz="half" idx="10"/>
           </p:nvPr>
         </p:nvSpPr>
-        <p:spPr/>
+        <p:spPr bwMode="auto"/>
         <p:txBody>
           <a:bodyPr/>
           <a:lstStyle/>
           <a:p>
+            <a:pPr>
+              <a:defRPr/>
+            </a:pPr>
             <a:fld id="{5BCAD085-E8A6-8845-BD4E-CB4CCA059FC4}" type="datetimeFigureOut">
-              <a:rPr lang="en-US" smtClean="0"/>
+              <a:rPr lang="en-US"/>
               <a:t>1/27/13</a:t>
             </a:fld>
             <a:endParaRPr lang="en-US"/>
@@ -1899,7 +3237,7 @@
       </p:sp>
       <p:sp>
         <p:nvSpPr>
-          <p:cNvPr id="4" name="Footer Placeholder 3"/>
+          <p:cNvPr id="1297064449" name="Footer Placeholder 3"/>
           <p:cNvSpPr>
             <a:spLocks noGrp="1"/>
           </p:cNvSpPr>
@@ -1907,18 +3245,21 @@
             <p:ph type="ftr" sz="quarter" idx="11"/>
           </p:nvPr>
         </p:nvSpPr>
-        <p:spPr/>
+        <p:spPr bwMode="auto"/>
         <p:txBody>
           <a:bodyPr/>
           <a:lstStyle/>
           <a:p>
+            <a:pPr>
+              <a:defRPr/>
+            </a:pPr>
             <a:endParaRPr lang="en-US"/>
           </a:p>
         </p:txBody>
       </p:sp>
       <p:sp>
         <p:nvSpPr>
-          <p:cNvPr id="5" name="Slide Number Placeholder 4"/>
+          <p:cNvPr id="597695572" name="Slide Number Placeholder 4"/>
           <p:cNvSpPr>
             <a:spLocks noGrp="1"/>
           </p:cNvSpPr>
@@ -1926,13 +3267,16 @@
             <p:ph type="sldNum" sz="quarter" idx="12"/>
           </p:nvPr>
         </p:nvSpPr>
-        <p:spPr/>
+        <p:spPr bwMode="auto"/>
         <p:txBody>
           <a:bodyPr/>
           <a:lstStyle/>
           <a:p>
+            <a:pPr>
+              <a:defRPr/>
+            </a:pPr>
             <a:fld id="{C1FF6DA9-008F-8B48-92A6-B652298478BF}" type="slidenum">
-              <a:rPr lang="en-US" smtClean="0"/>
+              <a:rPr lang="en-US"/>
               <a:t>‹#›</a:t>
             </a:fld>
             <a:endParaRPr lang="en-US"/>
@@ -1940,11 +3284,6 @@
         </p:txBody>
       </p:sp>
     </p:spTree>
-    <p:extLst>
-      <p:ext uri="{BB962C8B-B14F-4D97-AF65-F5344CB8AC3E}">
-        <p14:creationId xmlns:p14="http://schemas.microsoft.com/office/powerpoint/2010/main" val="727027711"/>
-      </p:ext>
-    </p:extLst>
   </p:cSld>
   <p:clrMapOvr>
     <a:masterClrMapping/>
@@ -1953,7 +3292,7 @@
 </file>
 
 <file path=ppt/slideLayouts/slideLayout7.xml><?xml version="1.0" encoding="utf-8"?>
-<p:sldLayout xmlns:a="http://schemas.openxmlformats.org/drawingml/2006/main" xmlns:r="http://schemas.openxmlformats.org/officeDocument/2006/relationships" xmlns:p="http://schemas.openxmlformats.org/presentationml/2006/main" type="blank" preserve="1">
+<p:sldLayout xmlns:a="http://schemas.openxmlformats.org/drawingml/2006/main" xmlns:r="http://schemas.openxmlformats.org/officeDocument/2006/relationships" xmlns:p="http://schemas.openxmlformats.org/presentationml/2006/main" xmlns:m="http://schemas.openxmlformats.org/officeDocument/2006/math" xmlns:w="http://schemas.openxmlformats.org/wordprocessingml/2006/main" matchingName="" preserve="1" showMasterPhAnim="0" showMasterSp="1" type="blank" userDrawn="1">
   <p:cSld name="Blank">
     <p:spTree>
       <p:nvGrpSpPr>
@@ -1961,7 +3300,7 @@
         <p:cNvGrpSpPr/>
         <p:nvPr/>
       </p:nvGrpSpPr>
-      <p:grpSpPr>
+      <p:grpSpPr bwMode="auto">
         <a:xfrm>
           <a:off x="0" y="0"/>
           <a:ext cx="0" cy="0"/>
@@ -1971,7 +3310,7 @@
       </p:grpSpPr>
       <p:sp>
         <p:nvSpPr>
-          <p:cNvPr id="2" name="Date Placeholder 1"/>
+          <p:cNvPr id="814377982" name="Date Placeholder 1"/>
           <p:cNvSpPr>
             <a:spLocks noGrp="1"/>
           </p:cNvSpPr>
@@ -1979,13 +3318,16 @@
             <p:ph type="dt" sz="half" idx="10"/>
           </p:nvPr>
         </p:nvSpPr>
-        <p:spPr/>
+        <p:spPr bwMode="auto"/>
         <p:txBody>
           <a:bodyPr/>
           <a:lstStyle/>
           <a:p>
+            <a:pPr>
+              <a:defRPr/>
+            </a:pPr>
             <a:fld id="{5BCAD085-E8A6-8845-BD4E-CB4CCA059FC4}" type="datetimeFigureOut">
-              <a:rPr lang="en-US" smtClean="0"/>
+              <a:rPr lang="en-US"/>
               <a:t>1/27/13</a:t>
             </a:fld>
             <a:endParaRPr lang="en-US"/>
@@ -1994,7 +3336,7 @@
       </p:sp>
       <p:sp>
         <p:nvSpPr>
-          <p:cNvPr id="3" name="Footer Placeholder 2"/>
+          <p:cNvPr id="1149151096" name="Footer Placeholder 2"/>
           <p:cNvSpPr>
             <a:spLocks noGrp="1"/>
           </p:cNvSpPr>
@@ -2002,18 +3344,21 @@
             <p:ph type="ftr" sz="quarter" idx="11"/>
           </p:nvPr>
         </p:nvSpPr>
-        <p:spPr/>
+        <p:spPr bwMode="auto"/>
         <p:txBody>
           <a:bodyPr/>
           <a:lstStyle/>
           <a:p>
+            <a:pPr>
+              <a:defRPr/>
+            </a:pPr>
             <a:endParaRPr lang="en-US"/>
           </a:p>
         </p:txBody>
       </p:sp>
       <p:sp>
         <p:nvSpPr>
-          <p:cNvPr id="4" name="Slide Number Placeholder 3"/>
+          <p:cNvPr id="246589053" name="Slide Number Placeholder 3"/>
           <p:cNvSpPr>
             <a:spLocks noGrp="1"/>
           </p:cNvSpPr>
@@ -2021,13 +3366,16 @@
             <p:ph type="sldNum" sz="quarter" idx="12"/>
           </p:nvPr>
         </p:nvSpPr>
-        <p:spPr/>
+        <p:spPr bwMode="auto"/>
         <p:txBody>
           <a:bodyPr/>
           <a:lstStyle/>
           <a:p>
+            <a:pPr>
+              <a:defRPr/>
+            </a:pPr>
             <a:fld id="{C1FF6DA9-008F-8B48-92A6-B652298478BF}" type="slidenum">
-              <a:rPr lang="en-US" smtClean="0"/>
+              <a:rPr lang="en-US"/>
               <a:t>‹#›</a:t>
             </a:fld>
             <a:endParaRPr lang="en-US"/>
@@ -2035,11 +3383,6 @@
         </p:txBody>
       </p:sp>
     </p:spTree>
-    <p:extLst>
-      <p:ext uri="{BB962C8B-B14F-4D97-AF65-F5344CB8AC3E}">
-        <p14:creationId xmlns:p14="http://schemas.microsoft.com/office/powerpoint/2010/main" val="1212999818"/>
-      </p:ext>
-    </p:extLst>
   </p:cSld>
   <p:clrMapOvr>
     <a:masterClrMapping/>
@@ -2048,7 +3391,7 @@
 </file>
 
 <file path=ppt/slideLayouts/slideLayout8.xml><?xml version="1.0" encoding="utf-8"?>
-<p:sldLayout xmlns:a="http://schemas.openxmlformats.org/drawingml/2006/main" xmlns:r="http://schemas.openxmlformats.org/officeDocument/2006/relationships" xmlns:p="http://schemas.openxmlformats.org/presentationml/2006/main" type="objTx" preserve="1">
+<p:sldLayout xmlns:a="http://schemas.openxmlformats.org/drawingml/2006/main" xmlns:r="http://schemas.openxmlformats.org/officeDocument/2006/relationships" xmlns:p="http://schemas.openxmlformats.org/presentationml/2006/main" xmlns:m="http://schemas.openxmlformats.org/officeDocument/2006/math" xmlns:w="http://schemas.openxmlformats.org/wordprocessingml/2006/main" matchingName="" preserve="1" showMasterPhAnim="0" showMasterSp="1" type="objTx" userDrawn="1">
   <p:cSld name="Content with Caption">
     <p:spTree>
       <p:nvGrpSpPr>
@@ -2056,7 +3399,7 @@
         <p:cNvGrpSpPr/>
         <p:nvPr/>
       </p:nvGrpSpPr>
-      <p:grpSpPr>
+      <p:grpSpPr bwMode="auto">
         <a:xfrm>
           <a:off x="0" y="0"/>
           <a:ext cx="0" cy="0"/>
@@ -2066,7 +3409,7 @@
       </p:grpSpPr>
       <p:sp>
         <p:nvSpPr>
-          <p:cNvPr id="2" name="Title 1"/>
+          <p:cNvPr id="96508523" name="Title 1"/>
           <p:cNvSpPr>
             <a:spLocks noGrp="1"/>
           </p:cNvSpPr>
@@ -2074,7 +3417,7 @@
             <p:ph type="title"/>
           </p:nvPr>
         </p:nvSpPr>
-        <p:spPr>
+        <p:spPr bwMode="auto">
           <a:xfrm>
             <a:off x="457200" y="273050"/>
             <a:ext cx="3008313" cy="1162050"/>
@@ -2088,8 +3431,11 @@
             </a:lvl1pPr>
           </a:lstStyle>
           <a:p>
-            <a:r>
-              <a:rPr lang="en-US" smtClean="0"/>
+            <a:pPr>
+              <a:defRPr/>
+            </a:pPr>
+            <a:r>
+              <a:rPr lang="en-US"/>
               <a:t>Click to edit Master title style</a:t>
             </a:r>
             <a:endParaRPr lang="en-US"/>
@@ -2098,7 +3444,7 @@
       </p:sp>
       <p:sp>
         <p:nvSpPr>
-          <p:cNvPr id="3" name="Content Placeholder 2"/>
+          <p:cNvPr id="1202427547" name="Content Placeholder 2"/>
           <p:cNvSpPr>
             <a:spLocks noGrp="1"/>
           </p:cNvSpPr>
@@ -2106,7 +3452,7 @@
             <p:ph idx="1"/>
           </p:nvPr>
         </p:nvSpPr>
-        <p:spPr>
+        <p:spPr bwMode="auto">
           <a:xfrm>
             <a:off x="3575050" y="273050"/>
             <a:ext cx="5111750" cy="5853113"/>
@@ -2144,37 +3490,51 @@
             </a:lvl9pPr>
           </a:lstStyle>
           <a:p>
-            <a:pPr lvl="0"/>
-            <a:r>
-              <a:rPr lang="en-US" smtClean="0"/>
+            <a:pPr lvl="0">
+              <a:defRPr/>
+            </a:pPr>
+            <a:r>
+              <a:rPr lang="en-US"/>
               <a:t>Click to edit Master text styles</a:t>
             </a:r>
-          </a:p>
-          <a:p>
-            <a:pPr lvl="1"/>
-            <a:r>
-              <a:rPr lang="en-US" smtClean="0"/>
+            <a:endParaRPr/>
+          </a:p>
+          <a:p>
+            <a:pPr lvl="1">
+              <a:defRPr/>
+            </a:pPr>
+            <a:r>
+              <a:rPr lang="en-US"/>
               <a:t>Second level</a:t>
             </a:r>
-          </a:p>
-          <a:p>
-            <a:pPr lvl="2"/>
-            <a:r>
-              <a:rPr lang="en-US" smtClean="0"/>
+            <a:endParaRPr/>
+          </a:p>
+          <a:p>
+            <a:pPr lvl="2">
+              <a:defRPr/>
+            </a:pPr>
+            <a:r>
+              <a:rPr lang="en-US"/>
               <a:t>Third level</a:t>
             </a:r>
-          </a:p>
-          <a:p>
-            <a:pPr lvl="3"/>
-            <a:r>
-              <a:rPr lang="en-US" smtClean="0"/>
+            <a:endParaRPr/>
+          </a:p>
+          <a:p>
+            <a:pPr lvl="3">
+              <a:defRPr/>
+            </a:pPr>
+            <a:r>
+              <a:rPr lang="en-US"/>
               <a:t>Fourth level</a:t>
             </a:r>
-          </a:p>
-          <a:p>
-            <a:pPr lvl="4"/>
-            <a:r>
-              <a:rPr lang="en-US" smtClean="0"/>
+            <a:endParaRPr/>
+          </a:p>
+          <a:p>
+            <a:pPr lvl="4">
+              <a:defRPr/>
+            </a:pPr>
+            <a:r>
+              <a:rPr lang="en-US"/>
               <a:t>Fifth level</a:t>
             </a:r>
             <a:endParaRPr lang="en-US"/>
@@ -2183,7 +3543,7 @@
       </p:sp>
       <p:sp>
         <p:nvSpPr>
-          <p:cNvPr id="4" name="Text Placeholder 3"/>
+          <p:cNvPr id="1937215030" name="Text Placeholder 3"/>
           <p:cNvSpPr>
             <a:spLocks noGrp="1"/>
           </p:cNvSpPr>
@@ -2191,7 +3551,7 @@
             <p:ph type="body" sz="half" idx="2"/>
           </p:nvPr>
         </p:nvSpPr>
-        <p:spPr>
+        <p:spPr bwMode="auto">
           <a:xfrm>
             <a:off x="457200" y="1435100"/>
             <a:ext cx="3008313" cy="4691063"/>
@@ -2238,17 +3598,20 @@
             </a:lvl9pPr>
           </a:lstStyle>
           <a:p>
-            <a:pPr lvl="0"/>
-            <a:r>
-              <a:rPr lang="en-US" smtClean="0"/>
+            <a:pPr lvl="0">
+              <a:defRPr/>
+            </a:pPr>
+            <a:r>
+              <a:rPr lang="en-US"/>
               <a:t>Click to edit Master text styles</a:t>
             </a:r>
-          </a:p>
-        </p:txBody>
-      </p:sp>
-      <p:sp>
-        <p:nvSpPr>
-          <p:cNvPr id="5" name="Date Placeholder 4"/>
+            <a:endParaRPr/>
+          </a:p>
+        </p:txBody>
+      </p:sp>
+      <p:sp>
+        <p:nvSpPr>
+          <p:cNvPr id="826908632" name="Date Placeholder 4"/>
           <p:cNvSpPr>
             <a:spLocks noGrp="1"/>
           </p:cNvSpPr>
@@ -2256,13 +3619,16 @@
             <p:ph type="dt" sz="half" idx="10"/>
           </p:nvPr>
         </p:nvSpPr>
-        <p:spPr/>
+        <p:spPr bwMode="auto"/>
         <p:txBody>
           <a:bodyPr/>
           <a:lstStyle/>
           <a:p>
+            <a:pPr>
+              <a:defRPr/>
+            </a:pPr>
             <a:fld id="{5BCAD085-E8A6-8845-BD4E-CB4CCA059FC4}" type="datetimeFigureOut">
-              <a:rPr lang="en-US" smtClean="0"/>
+              <a:rPr lang="en-US"/>
               <a:t>1/27/13</a:t>
             </a:fld>
             <a:endParaRPr lang="en-US"/>
@@ -2271,7 +3637,7 @@
       </p:sp>
       <p:sp>
         <p:nvSpPr>
-          <p:cNvPr id="6" name="Footer Placeholder 5"/>
+          <p:cNvPr id="2015205903" name="Footer Placeholder 5"/>
           <p:cNvSpPr>
             <a:spLocks noGrp="1"/>
           </p:cNvSpPr>
@@ -2279,18 +3645,21 @@
             <p:ph type="ftr" sz="quarter" idx="11"/>
           </p:nvPr>
         </p:nvSpPr>
-        <p:spPr/>
+        <p:spPr bwMode="auto"/>
         <p:txBody>
           <a:bodyPr/>
           <a:lstStyle/>
           <a:p>
+            <a:pPr>
+              <a:defRPr/>
+            </a:pPr>
             <a:endParaRPr lang="en-US"/>
           </a:p>
         </p:txBody>
       </p:sp>
       <p:sp>
         <p:nvSpPr>
-          <p:cNvPr id="7" name="Slide Number Placeholder 6"/>
+          <p:cNvPr id="1334408065" name="Slide Number Placeholder 6"/>
           <p:cNvSpPr>
             <a:spLocks noGrp="1"/>
           </p:cNvSpPr>
@@ -2298,13 +3667,16 @@
             <p:ph type="sldNum" sz="quarter" idx="12"/>
           </p:nvPr>
         </p:nvSpPr>
-        <p:spPr/>
+        <p:spPr bwMode="auto"/>
         <p:txBody>
           <a:bodyPr/>
           <a:lstStyle/>
           <a:p>
+            <a:pPr>
+              <a:defRPr/>
+            </a:pPr>
             <a:fld id="{C1FF6DA9-008F-8B48-92A6-B652298478BF}" type="slidenum">
-              <a:rPr lang="en-US" smtClean="0"/>
+              <a:rPr lang="en-US"/>
               <a:t>‹#›</a:t>
             </a:fld>
             <a:endParaRPr lang="en-US"/>
@@ -2312,11 +3684,6 @@
         </p:txBody>
       </p:sp>
     </p:spTree>
-    <p:extLst>
-      <p:ext uri="{BB962C8B-B14F-4D97-AF65-F5344CB8AC3E}">
-        <p14:creationId xmlns:p14="http://schemas.microsoft.com/office/powerpoint/2010/main" val="1840726560"/>
-      </p:ext>
-    </p:extLst>
   </p:cSld>
   <p:clrMapOvr>
     <a:masterClrMapping/>
@@ -2325,7 +3692,7 @@
 </file>
 
 <file path=ppt/slideLayouts/slideLayout9.xml><?xml version="1.0" encoding="utf-8"?>
-<p:sldLayout xmlns:a="http://schemas.openxmlformats.org/drawingml/2006/main" xmlns:r="http://schemas.openxmlformats.org/officeDocument/2006/relationships" xmlns:p="http://schemas.openxmlformats.org/presentationml/2006/main" type="picTx" preserve="1">
+<p:sldLayout xmlns:a="http://schemas.openxmlformats.org/drawingml/2006/main" xmlns:r="http://schemas.openxmlformats.org/officeDocument/2006/relationships" xmlns:p="http://schemas.openxmlformats.org/presentationml/2006/main" xmlns:m="http://schemas.openxmlformats.org/officeDocument/2006/math" xmlns:w="http://schemas.openxmlformats.org/wordprocessingml/2006/main" matchingName="" preserve="1" showMasterPhAnim="0" showMasterSp="1" type="picTx" userDrawn="1">
   <p:cSld name="Picture with Caption">
     <p:spTree>
       <p:nvGrpSpPr>
@@ -2333,7 +3700,7 @@
         <p:cNvGrpSpPr/>
         <p:nvPr/>
       </p:nvGrpSpPr>
-      <p:grpSpPr>
+      <p:grpSpPr bwMode="auto">
         <a:xfrm>
           <a:off x="0" y="0"/>
           <a:ext cx="0" cy="0"/>
@@ -2343,7 +3710,7 @@
       </p:grpSpPr>
       <p:sp>
         <p:nvSpPr>
-          <p:cNvPr id="2" name="Title 1"/>
+          <p:cNvPr id="937931939" name="Title 1"/>
           <p:cNvSpPr>
             <a:spLocks noGrp="1"/>
           </p:cNvSpPr>
@@ -2351,7 +3718,7 @@
             <p:ph type="title"/>
           </p:nvPr>
         </p:nvSpPr>
-        <p:spPr>
+        <p:spPr bwMode="auto">
           <a:xfrm>
             <a:off x="1792288" y="4800600"/>
             <a:ext cx="5486400" cy="566738"/>
@@ -2365,8 +3732,11 @@
             </a:lvl1pPr>
           </a:lstStyle>
           <a:p>
-            <a:r>
-              <a:rPr lang="en-US" smtClean="0"/>
+            <a:pPr>
+              <a:defRPr/>
+            </a:pPr>
+            <a:r>
+              <a:rPr lang="en-US"/>
               <a:t>Click to edit Master title style</a:t>
             </a:r>
             <a:endParaRPr lang="en-US"/>
@@ -2375,7 +3745,7 @@
       </p:sp>
       <p:sp>
         <p:nvSpPr>
-          <p:cNvPr id="3" name="Picture Placeholder 2"/>
+          <p:cNvPr id="1703644388" name="Picture Placeholder 2"/>
           <p:cNvSpPr>
             <a:spLocks noGrp="1"/>
           </p:cNvSpPr>
@@ -2383,7 +3753,7 @@
             <p:ph type="pic" idx="1"/>
           </p:nvPr>
         </p:nvSpPr>
-        <p:spPr>
+        <p:spPr bwMode="auto">
           <a:xfrm>
             <a:off x="1792288" y="612775"/>
             <a:ext cx="5486400" cy="4114800"/>
@@ -2430,13 +3800,16 @@
             </a:lvl9pPr>
           </a:lstStyle>
           <a:p>
+            <a:pPr>
+              <a:defRPr/>
+            </a:pPr>
             <a:endParaRPr lang="en-US"/>
           </a:p>
         </p:txBody>
       </p:sp>
       <p:sp>
         <p:nvSpPr>
-          <p:cNvPr id="4" name="Text Placeholder 3"/>
+          <p:cNvPr id="970749181" name="Text Placeholder 3"/>
           <p:cNvSpPr>
             <a:spLocks noGrp="1"/>
           </p:cNvSpPr>
@@ -2444,7 +3817,7 @@
             <p:ph type="body" sz="half" idx="2"/>
           </p:nvPr>
         </p:nvSpPr>
-        <p:spPr>
+        <p:spPr bwMode="auto">
           <a:xfrm>
             <a:off x="1792288" y="5367338"/>
             <a:ext cx="5486400" cy="804862"/>
@@ -2491,17 +3864,20 @@
             </a:lvl9pPr>
           </a:lstStyle>
           <a:p>
-            <a:pPr lvl="0"/>
-            <a:r>
-              <a:rPr lang="en-US" smtClean="0"/>
+            <a:pPr lvl="0">
+              <a:defRPr/>
+            </a:pPr>
+            <a:r>
+              <a:rPr lang="en-US"/>
               <a:t>Click to edit Master text styles</a:t>
             </a:r>
-          </a:p>
-        </p:txBody>
-      </p:sp>
-      <p:sp>
-        <p:nvSpPr>
-          <p:cNvPr id="5" name="Date Placeholder 4"/>
+            <a:endParaRPr/>
+          </a:p>
+        </p:txBody>
+      </p:sp>
+      <p:sp>
+        <p:nvSpPr>
+          <p:cNvPr id="489306431" name="Date Placeholder 4"/>
           <p:cNvSpPr>
             <a:spLocks noGrp="1"/>
           </p:cNvSpPr>
@@ -2509,13 +3885,16 @@
             <p:ph type="dt" sz="half" idx="10"/>
           </p:nvPr>
         </p:nvSpPr>
-        <p:spPr/>
+        <p:spPr bwMode="auto"/>
         <p:txBody>
           <a:bodyPr/>
           <a:lstStyle/>
           <a:p>
+            <a:pPr>
+              <a:defRPr/>
+            </a:pPr>
             <a:fld id="{5BCAD085-E8A6-8845-BD4E-CB4CCA059FC4}" type="datetimeFigureOut">
-              <a:rPr lang="en-US" smtClean="0"/>
+              <a:rPr lang="en-US"/>
               <a:t>1/27/13</a:t>
             </a:fld>
             <a:endParaRPr lang="en-US"/>
@@ -2524,7 +3903,7 @@
       </p:sp>
       <p:sp>
         <p:nvSpPr>
-          <p:cNvPr id="6" name="Footer Placeholder 5"/>
+          <p:cNvPr id="1459081050" name="Footer Placeholder 5"/>
           <p:cNvSpPr>
             <a:spLocks noGrp="1"/>
           </p:cNvSpPr>
@@ -2532,18 +3911,21 @@
             <p:ph type="ftr" sz="quarter" idx="11"/>
           </p:nvPr>
         </p:nvSpPr>
-        <p:spPr/>
+        <p:spPr bwMode="auto"/>
         <p:txBody>
           <a:bodyPr/>
           <a:lstStyle/>
           <a:p>
+            <a:pPr>
+              <a:defRPr/>
+            </a:pPr>
             <a:endParaRPr lang="en-US"/>
           </a:p>
         </p:txBody>
       </p:sp>
       <p:sp>
         <p:nvSpPr>
-          <p:cNvPr id="7" name="Slide Number Placeholder 6"/>
+          <p:cNvPr id="322019215" name="Slide Number Placeholder 6"/>
           <p:cNvSpPr>
             <a:spLocks noGrp="1"/>
           </p:cNvSpPr>
@@ -2551,13 +3933,16 @@
             <p:ph type="sldNum" sz="quarter" idx="12"/>
           </p:nvPr>
         </p:nvSpPr>
-        <p:spPr/>
+        <p:spPr bwMode="auto"/>
         <p:txBody>
           <a:bodyPr/>
           <a:lstStyle/>
           <a:p>
+            <a:pPr>
+              <a:defRPr/>
+            </a:pPr>
             <a:fld id="{C1FF6DA9-008F-8B48-92A6-B652298478BF}" type="slidenum">
-              <a:rPr lang="en-US" smtClean="0"/>
+              <a:rPr lang="en-US"/>
               <a:t>‹#›</a:t>
             </a:fld>
             <a:endParaRPr lang="en-US"/>
@@ -2565,11 +3950,6 @@
         </p:txBody>
       </p:sp>
     </p:spTree>
-    <p:extLst>
-      <p:ext uri="{BB962C8B-B14F-4D97-AF65-F5344CB8AC3E}">
-        <p14:creationId xmlns:p14="http://schemas.microsoft.com/office/powerpoint/2010/main" val="3889236939"/>
-      </p:ext>
-    </p:extLst>
   </p:cSld>
   <p:clrMapOvr>
     <a:masterClrMapping/>
@@ -2578,8 +3958,8 @@
 </file>
 
 <file path=ppt/slideMasters/slideMaster1.xml><?xml version="1.0" encoding="utf-8"?>
-<p:sldMaster xmlns:a="http://schemas.openxmlformats.org/drawingml/2006/main" xmlns:r="http://schemas.openxmlformats.org/officeDocument/2006/relationships" xmlns:p="http://schemas.openxmlformats.org/presentationml/2006/main">
-  <p:cSld>
+<p:sldMaster xmlns:a="http://schemas.openxmlformats.org/drawingml/2006/main" xmlns:r="http://schemas.openxmlformats.org/officeDocument/2006/relationships" xmlns:p="http://schemas.openxmlformats.org/presentationml/2006/main" xmlns:m="http://schemas.openxmlformats.org/officeDocument/2006/math" xmlns:w="http://schemas.openxmlformats.org/wordprocessingml/2006/main" preserve="0">
+  <p:cSld name="">
     <p:bg>
       <p:bgRef idx="1001">
         <a:schemeClr val="bg1"/>
@@ -2591,7 +3971,7 @@
         <p:cNvGrpSpPr/>
         <p:nvPr/>
       </p:nvGrpSpPr>
-      <p:grpSpPr>
+      <p:grpSpPr bwMode="auto">
         <a:xfrm>
           <a:off x="0" y="0"/>
           <a:ext cx="0" cy="0"/>
@@ -2601,7 +3981,7 @@
       </p:grpSpPr>
       <p:sp>
         <p:nvSpPr>
-          <p:cNvPr id="2" name="Title Placeholder 1"/>
+          <p:cNvPr id="1720456722" name="Title Placeholder 1"/>
           <p:cNvSpPr>
             <a:spLocks noGrp="1"/>
           </p:cNvSpPr>
@@ -2609,7 +3989,7 @@
             <p:ph type="title"/>
           </p:nvPr>
         </p:nvSpPr>
-        <p:spPr>
+        <p:spPr bwMode="auto">
           <a:xfrm>
             <a:off x="457200" y="274638"/>
             <a:ext cx="8229600" cy="1143000"/>
@@ -2624,8 +4004,11 @@
           </a:bodyPr>
           <a:lstStyle/>
           <a:p>
-            <a:r>
-              <a:rPr lang="en-US" smtClean="0"/>
+            <a:pPr>
+              <a:defRPr/>
+            </a:pPr>
+            <a:r>
+              <a:rPr lang="en-US"/>
               <a:t>Click to edit Master title style</a:t>
             </a:r>
             <a:endParaRPr lang="en-US"/>
@@ -2634,7 +4017,7 @@
       </p:sp>
       <p:sp>
         <p:nvSpPr>
-          <p:cNvPr id="3" name="Text Placeholder 2"/>
+          <p:cNvPr id="1924274931" name="Text Placeholder 2"/>
           <p:cNvSpPr>
             <a:spLocks noGrp="1"/>
           </p:cNvSpPr>
@@ -2642,7 +4025,7 @@
             <p:ph type="body" idx="1"/>
           </p:nvPr>
         </p:nvSpPr>
-        <p:spPr>
+        <p:spPr bwMode="auto">
           <a:xfrm>
             <a:off x="457200" y="1600200"/>
             <a:ext cx="8229600" cy="4525963"/>
@@ -2657,37 +4040,51 @@
           </a:bodyPr>
           <a:lstStyle/>
           <a:p>
-            <a:pPr lvl="0"/>
-            <a:r>
-              <a:rPr lang="en-US" smtClean="0"/>
+            <a:pPr lvl="0">
+              <a:defRPr/>
+            </a:pPr>
+            <a:r>
+              <a:rPr lang="en-US"/>
               <a:t>Click to edit Master text styles</a:t>
             </a:r>
-          </a:p>
-          <a:p>
-            <a:pPr lvl="1"/>
-            <a:r>
-              <a:rPr lang="en-US" smtClean="0"/>
+            <a:endParaRPr/>
+          </a:p>
+          <a:p>
+            <a:pPr lvl="1">
+              <a:defRPr/>
+            </a:pPr>
+            <a:r>
+              <a:rPr lang="en-US"/>
               <a:t>Second level</a:t>
             </a:r>
-          </a:p>
-          <a:p>
-            <a:pPr lvl="2"/>
-            <a:r>
-              <a:rPr lang="en-US" smtClean="0"/>
+            <a:endParaRPr/>
+          </a:p>
+          <a:p>
+            <a:pPr lvl="2">
+              <a:defRPr/>
+            </a:pPr>
+            <a:r>
+              <a:rPr lang="en-US"/>
               <a:t>Third level</a:t>
             </a:r>
-          </a:p>
-          <a:p>
-            <a:pPr lvl="3"/>
-            <a:r>
-              <a:rPr lang="en-US" smtClean="0"/>
+            <a:endParaRPr/>
+          </a:p>
+          <a:p>
+            <a:pPr lvl="3">
+              <a:defRPr/>
+            </a:pPr>
+            <a:r>
+              <a:rPr lang="en-US"/>
               <a:t>Fourth level</a:t>
             </a:r>
-          </a:p>
-          <a:p>
-            <a:pPr lvl="4"/>
-            <a:r>
-              <a:rPr lang="en-US" smtClean="0"/>
+            <a:endParaRPr/>
+          </a:p>
+          <a:p>
+            <a:pPr lvl="4">
+              <a:defRPr/>
+            </a:pPr>
+            <a:r>
+              <a:rPr lang="en-US"/>
               <a:t>Fifth level</a:t>
             </a:r>
             <a:endParaRPr lang="en-US"/>
@@ -2696,7 +4093,7 @@
       </p:sp>
       <p:sp>
         <p:nvSpPr>
-          <p:cNvPr id="4" name="Date Placeholder 3"/>
+          <p:cNvPr id="1515898307" name="Date Placeholder 3"/>
           <p:cNvSpPr>
             <a:spLocks noGrp="1"/>
           </p:cNvSpPr>
@@ -2704,7 +4101,7 @@
             <p:ph type="dt" sz="half" idx="2"/>
           </p:nvPr>
         </p:nvSpPr>
-        <p:spPr>
+        <p:spPr bwMode="auto">
           <a:xfrm>
             <a:off x="457200" y="6356350"/>
             <a:ext cx="2133600" cy="365125"/>
@@ -2727,8 +4124,11 @@
             </a:lvl1pPr>
           </a:lstStyle>
           <a:p>
+            <a:pPr>
+              <a:defRPr/>
+            </a:pPr>
             <a:fld id="{5BCAD085-E8A6-8845-BD4E-CB4CCA059FC4}" type="datetimeFigureOut">
-              <a:rPr lang="en-US" smtClean="0"/>
+              <a:rPr lang="en-US"/>
               <a:t>1/27/13</a:t>
             </a:fld>
             <a:endParaRPr lang="en-US"/>
@@ -2737,7 +4137,7 @@
       </p:sp>
       <p:sp>
         <p:nvSpPr>
-          <p:cNvPr id="5" name="Footer Placeholder 4"/>
+          <p:cNvPr id="1422654402" name="Footer Placeholder 4"/>
           <p:cNvSpPr>
             <a:spLocks noGrp="1"/>
           </p:cNvSpPr>
@@ -2745,7 +4145,7 @@
             <p:ph type="ftr" sz="quarter" idx="3"/>
           </p:nvPr>
         </p:nvSpPr>
-        <p:spPr>
+        <p:spPr bwMode="auto">
           <a:xfrm>
             <a:off x="3124200" y="6356350"/>
             <a:ext cx="2895600" cy="365125"/>
@@ -2768,13 +4168,16 @@
             </a:lvl1pPr>
           </a:lstStyle>
           <a:p>
+            <a:pPr>
+              <a:defRPr/>
+            </a:pPr>
             <a:endParaRPr lang="en-US"/>
           </a:p>
         </p:txBody>
       </p:sp>
       <p:sp>
         <p:nvSpPr>
-          <p:cNvPr id="6" name="Slide Number Placeholder 5"/>
+          <p:cNvPr id="1481241108" name="Slide Number Placeholder 5"/>
           <p:cNvSpPr>
             <a:spLocks noGrp="1"/>
           </p:cNvSpPr>
@@ -2782,7 +4185,7 @@
             <p:ph type="sldNum" sz="quarter" idx="4"/>
           </p:nvPr>
         </p:nvSpPr>
-        <p:spPr>
+        <p:spPr bwMode="auto">
           <a:xfrm>
             <a:off x="6553200" y="6356350"/>
             <a:ext cx="2133600" cy="365125"/>
@@ -2805,8 +4208,11 @@
             </a:lvl1pPr>
           </a:lstStyle>
           <a:p>
+            <a:pPr>
+              <a:defRPr/>
+            </a:pPr>
             <a:fld id="{C1FF6DA9-008F-8B48-92A6-B652298478BF}" type="slidenum">
-              <a:rPr lang="en-US" smtClean="0"/>
+              <a:rPr lang="en-US"/>
               <a:t>‹#›</a:t>
             </a:fld>
             <a:endParaRPr lang="en-US"/>
@@ -2814,11 +4220,6 @@
         </p:txBody>
       </p:sp>
     </p:spTree>
-    <p:extLst>
-      <p:ext uri="{BB962C8B-B14F-4D97-AF65-F5344CB8AC3E}">
-        <p14:creationId xmlns:p14="http://schemas.microsoft.com/office/powerpoint/2010/main" val="2209977519"/>
-      </p:ext>
-    </p:extLst>
   </p:cSld>
   <p:clrMap bg1="lt1" tx1="dk1" bg2="lt2" tx2="dk2" accent1="accent1" accent2="accent2" accent3="accent3" accent4="accent4" accent5="accent5" accent6="accent6" hlink="hlink" folHlink="folHlink"/>
   <p:sldLayoutIdLst>
@@ -2836,12 +4237,12 @@
   </p:sldLayoutIdLst>
   <p:txStyles>
     <p:titleStyle>
-      <a:lvl1pPr algn="ctr" defTabSz="457200" rtl="0" eaLnBrk="1" latinLnBrk="0" hangingPunct="1">
+      <a:lvl1pPr algn="ctr" defTabSz="457200" rtl="0">
         <a:spcBef>
-          <a:spcPct val="0"/>
+          <a:spcPts val="0"/>
         </a:spcBef>
         <a:buNone/>
-        <a:defRPr sz="4400" kern="1200">
+        <a:defRPr sz="4400">
           <a:solidFill>
             <a:schemeClr val="tx1"/>
           </a:solidFill>
@@ -2852,13 +4253,13 @@
       </a:lvl1pPr>
     </p:titleStyle>
     <p:bodyStyle>
-      <a:lvl1pPr marL="342900" indent="-342900" algn="l" defTabSz="457200" rtl="0" eaLnBrk="1" latinLnBrk="0" hangingPunct="1">
+      <a:lvl1pPr marL="342900" indent="-342900" algn="l" defTabSz="457200" rtl="0">
         <a:spcBef>
-          <a:spcPct val="20000"/>
+          <a:spcPts val="0"/>
         </a:spcBef>
         <a:buFont typeface="Arial"/>
         <a:buChar char="•"/>
-        <a:defRPr sz="3200" kern="1200">
+        <a:defRPr sz="3200">
           <a:solidFill>
             <a:schemeClr val="tx1"/>
           </a:solidFill>
@@ -2867,13 +4268,13 @@
           <a:cs typeface="+mn-cs"/>
         </a:defRPr>
       </a:lvl1pPr>
-      <a:lvl2pPr marL="742950" indent="-285750" algn="l" defTabSz="457200" rtl="0" eaLnBrk="1" latinLnBrk="0" hangingPunct="1">
+      <a:lvl2pPr marL="742950" indent="-285750" algn="l" defTabSz="457200" rtl="0">
         <a:spcBef>
-          <a:spcPct val="20000"/>
+          <a:spcPts val="0"/>
         </a:spcBef>
         <a:buFont typeface="Arial"/>
         <a:buChar char="–"/>
-        <a:defRPr sz="2800" kern="1200">
+        <a:defRPr sz="2800">
           <a:solidFill>
             <a:schemeClr val="tx1"/>
           </a:solidFill>
@@ -2882,13 +4283,13 @@
           <a:cs typeface="+mn-cs"/>
         </a:defRPr>
       </a:lvl2pPr>
-      <a:lvl3pPr marL="1143000" indent="-228600" algn="l" defTabSz="457200" rtl="0" eaLnBrk="1" latinLnBrk="0" hangingPunct="1">
+      <a:lvl3pPr marL="1143000" indent="-228600" algn="l" defTabSz="457200" rtl="0">
         <a:spcBef>
-          <a:spcPct val="20000"/>
+          <a:spcPts val="0"/>
         </a:spcBef>
         <a:buFont typeface="Arial"/>
         <a:buChar char="•"/>
-        <a:defRPr sz="2400" kern="1200">
+        <a:defRPr sz="2400">
           <a:solidFill>
             <a:schemeClr val="tx1"/>
           </a:solidFill>
@@ -2897,13 +4298,13 @@
           <a:cs typeface="+mn-cs"/>
         </a:defRPr>
       </a:lvl3pPr>
-      <a:lvl4pPr marL="1600200" indent="-228600" algn="l" defTabSz="457200" rtl="0" eaLnBrk="1" latinLnBrk="0" hangingPunct="1">
+      <a:lvl4pPr marL="1600200" indent="-228600" algn="l" defTabSz="457200" rtl="0">
         <a:spcBef>
-          <a:spcPct val="20000"/>
+          <a:spcPts val="0"/>
         </a:spcBef>
         <a:buFont typeface="Arial"/>
         <a:buChar char="–"/>
-        <a:defRPr sz="2000" kern="1200">
+        <a:defRPr sz="2000">
           <a:solidFill>
             <a:schemeClr val="tx1"/>
           </a:solidFill>
@@ -2912,13 +4313,13 @@
           <a:cs typeface="+mn-cs"/>
         </a:defRPr>
       </a:lvl4pPr>
-      <a:lvl5pPr marL="2057400" indent="-228600" algn="l" defTabSz="457200" rtl="0" eaLnBrk="1" latinLnBrk="0" hangingPunct="1">
+      <a:lvl5pPr marL="2057400" indent="-228600" algn="l" defTabSz="457200" rtl="0">
         <a:spcBef>
-          <a:spcPct val="20000"/>
+          <a:spcPts val="0"/>
         </a:spcBef>
         <a:buFont typeface="Arial"/>
         <a:buChar char="»"/>
-        <a:defRPr sz="2000" kern="1200">
+        <a:defRPr sz="2000">
           <a:solidFill>
             <a:schemeClr val="tx1"/>
           </a:solidFill>
@@ -2927,13 +4328,13 @@
           <a:cs typeface="+mn-cs"/>
         </a:defRPr>
       </a:lvl5pPr>
-      <a:lvl6pPr marL="2514600" indent="-228600" algn="l" defTabSz="457200" rtl="0" eaLnBrk="1" latinLnBrk="0" hangingPunct="1">
+      <a:lvl6pPr marL="2514600" indent="-228600" algn="l" defTabSz="457200" rtl="0">
         <a:spcBef>
-          <a:spcPct val="20000"/>
+          <a:spcPts val="0"/>
         </a:spcBef>
         <a:buFont typeface="Arial"/>
         <a:buChar char="•"/>
-        <a:defRPr sz="2000" kern="1200">
+        <a:defRPr sz="2000">
           <a:solidFill>
             <a:schemeClr val="tx1"/>
           </a:solidFill>
@@ -2942,13 +4343,13 @@
           <a:cs typeface="+mn-cs"/>
         </a:defRPr>
       </a:lvl6pPr>
-      <a:lvl7pPr marL="2971800" indent="-228600" algn="l" defTabSz="457200" rtl="0" eaLnBrk="1" latinLnBrk="0" hangingPunct="1">
+      <a:lvl7pPr marL="2971800" indent="-228600" algn="l" defTabSz="457200" rtl="0">
         <a:spcBef>
-          <a:spcPct val="20000"/>
+          <a:spcPts val="0"/>
         </a:spcBef>
         <a:buFont typeface="Arial"/>
         <a:buChar char="•"/>
-        <a:defRPr sz="2000" kern="1200">
+        <a:defRPr sz="2000">
           <a:solidFill>
             <a:schemeClr val="tx1"/>
           </a:solidFill>
@@ -2957,13 +4358,13 @@
           <a:cs typeface="+mn-cs"/>
         </a:defRPr>
       </a:lvl7pPr>
-      <a:lvl8pPr marL="3429000" indent="-228600" algn="l" defTabSz="457200" rtl="0" eaLnBrk="1" latinLnBrk="0" hangingPunct="1">
+      <a:lvl8pPr marL="3429000" indent="-228600" algn="l" defTabSz="457200" rtl="0">
         <a:spcBef>
-          <a:spcPct val="20000"/>
+          <a:spcPts val="0"/>
         </a:spcBef>
         <a:buFont typeface="Arial"/>
         <a:buChar char="•"/>
-        <a:defRPr sz="2000" kern="1200">
+        <a:defRPr sz="2000">
           <a:solidFill>
             <a:schemeClr val="tx1"/>
           </a:solidFill>
@@ -2972,13 +4373,13 @@
           <a:cs typeface="+mn-cs"/>
         </a:defRPr>
       </a:lvl8pPr>
-      <a:lvl9pPr marL="3886200" indent="-228600" algn="l" defTabSz="457200" rtl="0" eaLnBrk="1" latinLnBrk="0" hangingPunct="1">
+      <a:lvl9pPr marL="3886200" indent="-228600" algn="l" defTabSz="457200" rtl="0">
         <a:spcBef>
-          <a:spcPct val="20000"/>
+          <a:spcPts val="0"/>
         </a:spcBef>
         <a:buFont typeface="Arial"/>
         <a:buChar char="•"/>
-        <a:defRPr sz="2000" kern="1200">
+        <a:defRPr sz="2000">
           <a:solidFill>
             <a:schemeClr val="tx1"/>
           </a:solidFill>
@@ -2992,8 +4393,8 @@
       <a:defPPr>
         <a:defRPr lang="en-US"/>
       </a:defPPr>
-      <a:lvl1pPr marL="0" algn="l" defTabSz="457200" rtl="0" eaLnBrk="1" latinLnBrk="0" hangingPunct="1">
-        <a:defRPr sz="1800" kern="1200">
+      <a:lvl1pPr marL="0" algn="l" defTabSz="457200" rtl="0">
+        <a:defRPr sz="1800">
           <a:solidFill>
             <a:schemeClr val="tx1"/>
           </a:solidFill>
@@ -3002,8 +4403,8 @@
           <a:cs typeface="+mn-cs"/>
         </a:defRPr>
       </a:lvl1pPr>
-      <a:lvl2pPr marL="457200" algn="l" defTabSz="457200" rtl="0" eaLnBrk="1" latinLnBrk="0" hangingPunct="1">
-        <a:defRPr sz="1800" kern="1200">
+      <a:lvl2pPr marL="457200" algn="l" defTabSz="457200" rtl="0">
+        <a:defRPr sz="1800">
           <a:solidFill>
             <a:schemeClr val="tx1"/>
           </a:solidFill>
@@ -3012,8 +4413,8 @@
           <a:cs typeface="+mn-cs"/>
         </a:defRPr>
       </a:lvl2pPr>
-      <a:lvl3pPr marL="914400" algn="l" defTabSz="457200" rtl="0" eaLnBrk="1" latinLnBrk="0" hangingPunct="1">
-        <a:defRPr sz="1800" kern="1200">
+      <a:lvl3pPr marL="914400" algn="l" defTabSz="457200" rtl="0">
+        <a:defRPr sz="1800">
           <a:solidFill>
             <a:schemeClr val="tx1"/>
           </a:solidFill>
@@ -3022,8 +4423,8 @@
           <a:cs typeface="+mn-cs"/>
         </a:defRPr>
       </a:lvl3pPr>
-      <a:lvl4pPr marL="1371600" algn="l" defTabSz="457200" rtl="0" eaLnBrk="1" latinLnBrk="0" hangingPunct="1">
-        <a:defRPr sz="1800" kern="1200">
+      <a:lvl4pPr marL="1371600" algn="l" defTabSz="457200" rtl="0">
+        <a:defRPr sz="1800">
           <a:solidFill>
             <a:schemeClr val="tx1"/>
           </a:solidFill>
@@ -3032,8 +4433,8 @@
           <a:cs typeface="+mn-cs"/>
         </a:defRPr>
       </a:lvl4pPr>
-      <a:lvl5pPr marL="1828800" algn="l" defTabSz="457200" rtl="0" eaLnBrk="1" latinLnBrk="0" hangingPunct="1">
-        <a:defRPr sz="1800" kern="1200">
+      <a:lvl5pPr marL="1828800" algn="l" defTabSz="457200" rtl="0">
+        <a:defRPr sz="1800">
           <a:solidFill>
             <a:schemeClr val="tx1"/>
           </a:solidFill>
@@ -3042,8 +4443,8 @@
           <a:cs typeface="+mn-cs"/>
         </a:defRPr>
       </a:lvl5pPr>
-      <a:lvl6pPr marL="2286000" algn="l" defTabSz="457200" rtl="0" eaLnBrk="1" latinLnBrk="0" hangingPunct="1">
-        <a:defRPr sz="1800" kern="1200">
+      <a:lvl6pPr marL="2286000" algn="l" defTabSz="457200" rtl="0">
+        <a:defRPr sz="1800">
           <a:solidFill>
             <a:schemeClr val="tx1"/>
           </a:solidFill>
@@ -3052,8 +4453,8 @@
           <a:cs typeface="+mn-cs"/>
         </a:defRPr>
       </a:lvl6pPr>
-      <a:lvl7pPr marL="2743200" algn="l" defTabSz="457200" rtl="0" eaLnBrk="1" latinLnBrk="0" hangingPunct="1">
-        <a:defRPr sz="1800" kern="1200">
+      <a:lvl7pPr marL="2743200" algn="l" defTabSz="457200" rtl="0">
+        <a:defRPr sz="1800">
           <a:solidFill>
             <a:schemeClr val="tx1"/>
           </a:solidFill>
@@ -3062,8 +4463,8 @@
           <a:cs typeface="+mn-cs"/>
         </a:defRPr>
       </a:lvl7pPr>
-      <a:lvl8pPr marL="3200400" algn="l" defTabSz="457200" rtl="0" eaLnBrk="1" latinLnBrk="0" hangingPunct="1">
-        <a:defRPr sz="1800" kern="1200">
+      <a:lvl8pPr marL="3200400" algn="l" defTabSz="457200" rtl="0">
+        <a:defRPr sz="1800">
           <a:solidFill>
             <a:schemeClr val="tx1"/>
           </a:solidFill>
@@ -3072,8 +4473,8 @@
           <a:cs typeface="+mn-cs"/>
         </a:defRPr>
       </a:lvl8pPr>
-      <a:lvl9pPr marL="3657600" algn="l" defTabSz="457200" rtl="0" eaLnBrk="1" latinLnBrk="0" hangingPunct="1">
-        <a:defRPr sz="1800" kern="1200">
+      <a:lvl9pPr marL="3657600" algn="l" defTabSz="457200" rtl="0">
+        <a:defRPr sz="1800">
           <a:solidFill>
             <a:schemeClr val="tx1"/>
           </a:solidFill>
@@ -3088,30 +4489,35 @@
 </file>
 
 <file path=ppt/slides/slide1.xml><?xml version="1.0" encoding="utf-8"?>
-<p:sld xmlns:a="http://schemas.openxmlformats.org/drawingml/2006/main" xmlns:p="http://schemas.openxmlformats.org/presentationml/2006/main" xmlns:r="http://schemas.openxmlformats.org/officeDocument/2006/relationships">
-  <p:cSld>
+<p:sld xmlns:a="http://schemas.openxmlformats.org/drawingml/2006/main" xmlns:r="http://schemas.openxmlformats.org/officeDocument/2006/relationships" xmlns:p="http://schemas.openxmlformats.org/presentationml/2006/main" xmlns:m="http://schemas.openxmlformats.org/officeDocument/2006/math" xmlns:w="http://schemas.openxmlformats.org/wordprocessingml/2006/main" xmlns:mc="http://schemas.openxmlformats.org/markup-compatibility/2006" showMasterPhAnim="0" showMasterSp="1" show="1">
+  <p:cSld name="">
     <p:spTree>
       <p:nvGrpSpPr>
         <p:cNvPr id="1" name=""/>
         <p:cNvGrpSpPr/>
         <p:nvPr/>
       </p:nvGrpSpPr>
-      <p:grpSpPr/>
+      <p:grpSpPr bwMode="auto">
+        <a:xfrm>
+          <a:off x="0" y="0"/>
+          <a:ext cx="0" cy="0"/>
+          <a:chOff x="0" y="0"/>
+          <a:chExt cx="0" cy="0"/>
+        </a:xfrm>
+      </p:grpSpPr>
       <p:pic>
         <p:nvPicPr>
-          <p:cNvPr id="2" name="Picture 1" descr="image2.jpeg"/>
+          <p:cNvPr id="1789915488" name="Picture 1" descr="image2.jpeg"/>
           <p:cNvPicPr>
             <a:picLocks noChangeAspect="1"/>
           </p:cNvPicPr>
           <p:nvPr/>
         </p:nvPicPr>
-        <p:blipFill>
-          <a:blip r:embed="rId2"/>
-          <a:stretch>
-            <a:fillRect/>
-          </a:stretch>
+        <p:blipFill rotWithShape="1">
+          <a:blip r:embed="rId3"/>
+          <a:stretch/>
         </p:blipFill>
-        <p:spPr>
+        <p:spPr bwMode="auto">
           <a:xfrm>
             <a:off x="0" y="0"/>
             <a:ext cx="9144000" cy="5143500"/>
@@ -3123,13 +4529,13 @@
       </p:pic>
       <p:sp>
         <p:nvSpPr>
-          <p:cNvPr id="3" name="TextBox 2"/>
+          <p:cNvPr id="1049526368" name="TextBox 2"/>
           <p:cNvSpPr txBox="1"/>
           <p:nvPr/>
         </p:nvSpPr>
-        <p:spPr>
-          <a:xfrm>
-            <a:off x="1051560" y="1508760"/>
+        <p:spPr bwMode="auto">
+          <a:xfrm>
+            <a:off x="1051560" y="1508759"/>
             <a:ext cx="7315200" cy="548640"/>
           </a:xfrm>
           <a:prstGeom prst="rect">
@@ -3152,18 +4558,20 @@
               </a:defRPr>
             </a:pPr>
             <a:r>
+              <a:rPr/>
               <a:t>Индивидуальный проект</a:t>
             </a:r>
-          </a:p>
-        </p:txBody>
-      </p:sp>
-      <p:sp>
-        <p:nvSpPr>
-          <p:cNvPr id="4" name="TextBox 3"/>
+            <a:endParaRPr/>
+          </a:p>
+        </p:txBody>
+      </p:sp>
+      <p:sp>
+        <p:nvSpPr>
+          <p:cNvPr id="441159901" name="TextBox 3"/>
           <p:cNvSpPr txBox="1"/>
           <p:nvPr/>
         </p:nvSpPr>
-        <p:spPr>
+        <p:spPr bwMode="auto">
           <a:xfrm>
             <a:off x="1051560" y="2084831"/>
             <a:ext cx="7589520" cy="594360"/>
@@ -3188,18 +4596,20 @@
               </a:defRPr>
             </a:pPr>
             <a:r>
+              <a:rPr/>
               <a:t>Poem Memorizer</a:t>
             </a:r>
-          </a:p>
-        </p:txBody>
-      </p:sp>
-      <p:sp>
-        <p:nvSpPr>
-          <p:cNvPr id="5" name="TextBox 4"/>
+            <a:endParaRPr/>
+          </a:p>
+        </p:txBody>
+      </p:sp>
+      <p:sp>
+        <p:nvSpPr>
+          <p:cNvPr id="766036468" name="TextBox 4"/>
           <p:cNvSpPr txBox="1"/>
           <p:nvPr/>
         </p:nvSpPr>
-        <p:spPr>
+        <p:spPr bwMode="auto">
           <a:xfrm>
             <a:off x="1060704" y="2788920"/>
             <a:ext cx="6400800" cy="365760"/>
@@ -3224,18 +4634,20 @@
               </a:defRPr>
             </a:pPr>
             <a:r>
+              <a:rPr/>
               <a:t>Android-приложение для заучивания стихотворений</a:t>
             </a:r>
-          </a:p>
-        </p:txBody>
-      </p:sp>
-      <p:sp>
-        <p:nvSpPr>
-          <p:cNvPr id="6" name="TextBox 5"/>
+            <a:endParaRPr/>
+          </a:p>
+        </p:txBody>
+      </p:sp>
+      <p:sp>
+        <p:nvSpPr>
+          <p:cNvPr id="619891569" name="TextBox 5"/>
           <p:cNvSpPr txBox="1"/>
           <p:nvPr/>
         </p:nvSpPr>
-        <p:spPr>
+        <p:spPr bwMode="auto">
           <a:xfrm>
             <a:off x="1828800" y="3273552"/>
             <a:ext cx="1097280" cy="1188720"/>
@@ -3259,8 +4671,10 @@
               </a:defRPr>
             </a:pPr>
             <a:r>
+              <a:rPr/>
               <a:t>Город:</a:t>
             </a:r>
+            <a:endParaRPr/>
           </a:p>
           <a:p>
             <a:pPr algn="r">
@@ -3271,8 +4685,10 @@
               </a:defRPr>
             </a:pPr>
             <a:r>
+              <a:rPr/>
               <a:t>Площадка:</a:t>
             </a:r>
+            <a:endParaRPr/>
           </a:p>
           <a:p>
             <a:pPr algn="r">
@@ -3283,8 +4699,10 @@
               </a:defRPr>
             </a:pPr>
             <a:r>
+              <a:rPr/>
               <a:t>Учащийся:</a:t>
             </a:r>
+            <a:endParaRPr/>
           </a:p>
           <a:p>
             <a:pPr algn="r">
@@ -3295,8 +4713,10 @@
               </a:defRPr>
             </a:pPr>
             <a:r>
+              <a:rPr/>
               <a:t>Преподаватель:</a:t>
             </a:r>
+            <a:endParaRPr/>
           </a:p>
           <a:p>
             <a:pPr algn="r">
@@ -3307,21 +4727,23 @@
               </a:defRPr>
             </a:pPr>
             <a:r>
+              <a:rPr/>
               <a:t>Дата:</a:t>
             </a:r>
-          </a:p>
-        </p:txBody>
-      </p:sp>
-      <p:sp>
-        <p:nvSpPr>
-          <p:cNvPr id="7" name="TextBox 6"/>
+            <a:endParaRPr/>
+          </a:p>
+        </p:txBody>
+      </p:sp>
+      <p:sp>
+        <p:nvSpPr>
+          <p:cNvPr id="953291977" name="TextBox 6"/>
           <p:cNvSpPr txBox="1"/>
           <p:nvPr/>
         </p:nvSpPr>
-        <p:spPr>
+        <p:spPr bwMode="auto">
           <a:xfrm>
             <a:off x="3063240" y="3273552"/>
-            <a:ext cx="3474720" cy="1188720"/>
+            <a:ext cx="2795972" cy="1082399"/>
           </a:xfrm>
           <a:prstGeom prst="rect">
             <a:avLst/>
@@ -3342,8 +4764,10 @@
               </a:defRPr>
             </a:pPr>
             <a:r>
-              <a:t>________________</a:t>
-            </a:r>
+              <a:rPr lang="ru-RU"/>
+              <a:t>Новосибирск</a:t>
+            </a:r>
+            <a:endParaRPr/>
           </a:p>
           <a:p>
             <a:pPr>
@@ -3354,8 +4778,10 @@
               </a:defRPr>
             </a:pPr>
             <a:r>
-              <a:t>________________</a:t>
-            </a:r>
+              <a:rPr lang="ru-RU"/>
+              <a:t>ИЛНГТУ</a:t>
+            </a:r>
+            <a:endParaRPr/>
           </a:p>
           <a:p>
             <a:pPr>
@@ -3366,8 +4792,10 @@
               </a:defRPr>
             </a:pPr>
             <a:r>
-              <a:t>________________</a:t>
-            </a:r>
+              <a:rPr lang="ru-RU"/>
+              <a:t>Шумейко Александр, Червов Андрей</a:t>
+            </a:r>
+            <a:endParaRPr/>
           </a:p>
           <a:p>
             <a:pPr>
@@ -3378,8 +4806,10 @@
               </a:defRPr>
             </a:pPr>
             <a:r>
-              <a:t>________________</a:t>
-            </a:r>
+              <a:rPr lang="ru-RU"/>
+              <a:t>Муль Павел Фридрихович</a:t>
+            </a:r>
+            <a:endParaRPr/>
           </a:p>
           <a:p>
             <a:pPr>
@@ -3390,18 +4820,20 @@
               </a:defRPr>
             </a:pPr>
             <a:r>
+              <a:rPr/>
               <a:t>2026 г.</a:t>
             </a:r>
-          </a:p>
-        </p:txBody>
-      </p:sp>
-      <p:sp>
-        <p:nvSpPr>
-          <p:cNvPr id="8" name="TextBox 7"/>
+            <a:endParaRPr/>
+          </a:p>
+        </p:txBody>
+      </p:sp>
+      <p:sp>
+        <p:nvSpPr>
+          <p:cNvPr id="697887116" name="TextBox 7"/>
           <p:cNvSpPr txBox="1"/>
           <p:nvPr/>
         </p:nvSpPr>
-        <p:spPr>
+        <p:spPr bwMode="auto">
           <a:xfrm>
             <a:off x="8119872" y="4764024"/>
             <a:ext cx="640080" cy="228600"/>
@@ -3412,7 +4844,7 @@
           <a:noFill/>
         </p:spPr>
         <p:txBody>
-          <a:bodyPr wrap="none" lIns="0" rIns="0" tIns="0" bIns="0">
+          <a:bodyPr wrap="none" lIns="0" tIns="0" rIns="0" bIns="0">
             <a:spAutoFit/>
           </a:bodyPr>
           <a:lstStyle/>
@@ -3426,8 +4858,10 @@
               </a:defRPr>
             </a:pPr>
             <a:r>
+              <a:rPr/>
               <a:t>1/10</a:t>
             </a:r>
+            <a:endParaRPr/>
           </a:p>
         </p:txBody>
       </p:sp>
@@ -3436,34 +4870,47 @@
   <p:clrMapOvr>
     <a:masterClrMapping/>
   </p:clrMapOvr>
+  <mc:AlternateContent xmlns:mc="http://schemas.openxmlformats.org/markup-compatibility/2006">
+    <mc:Choice xmlns:p159="http://schemas.microsoft.com/office/powerpoint/2015/09/main" xmlns:p14="http://schemas.microsoft.com/office/powerpoint/2010/main" Requires="p159">
+      <p:transition p14:dur="2000" advClick="1"/>
+    </mc:Choice>
+    <mc:Fallback>
+      <p:transition advClick="1"/>
+    </mc:Fallback>
+  </mc:AlternateContent>
 </p:sld>
 </file>
 
 <file path=ppt/slides/slide10.xml><?xml version="1.0" encoding="utf-8"?>
-<p:sld xmlns:a="http://schemas.openxmlformats.org/drawingml/2006/main" xmlns:p="http://schemas.openxmlformats.org/presentationml/2006/main" xmlns:r="http://schemas.openxmlformats.org/officeDocument/2006/relationships">
-  <p:cSld>
+<p:sld xmlns:a="http://schemas.openxmlformats.org/drawingml/2006/main" xmlns:r="http://schemas.openxmlformats.org/officeDocument/2006/relationships" xmlns:p="http://schemas.openxmlformats.org/presentationml/2006/main" xmlns:m="http://schemas.openxmlformats.org/officeDocument/2006/math" xmlns:w="http://schemas.openxmlformats.org/wordprocessingml/2006/main" xmlns:mc="http://schemas.openxmlformats.org/markup-compatibility/2006" showMasterPhAnim="0" showMasterSp="1" show="1">
+  <p:cSld name="">
     <p:spTree>
       <p:nvGrpSpPr>
         <p:cNvPr id="1" name=""/>
         <p:cNvGrpSpPr/>
         <p:nvPr/>
       </p:nvGrpSpPr>
-      <p:grpSpPr/>
+      <p:grpSpPr bwMode="auto">
+        <a:xfrm>
+          <a:off x="0" y="0"/>
+          <a:ext cx="0" cy="0"/>
+          <a:chOff x="0" y="0"/>
+          <a:chExt cx="0" cy="0"/>
+        </a:xfrm>
+      </p:grpSpPr>
       <p:pic>
         <p:nvPicPr>
-          <p:cNvPr id="2" name="Picture 1" descr="image1.jpeg"/>
+          <p:cNvPr id="1645798024" name="Picture 1" descr="image1.jpeg"/>
           <p:cNvPicPr>
             <a:picLocks noChangeAspect="1"/>
           </p:cNvPicPr>
           <p:nvPr/>
         </p:nvPicPr>
-        <p:blipFill>
-          <a:blip r:embed="rId2"/>
-          <a:stretch>
-            <a:fillRect/>
-          </a:stretch>
+        <p:blipFill rotWithShape="1">
+          <a:blip r:embed="rId3"/>
+          <a:stretch/>
         </p:blipFill>
-        <p:spPr>
+        <p:spPr bwMode="auto">
           <a:xfrm>
             <a:off x="0" y="0"/>
             <a:ext cx="9144000" cy="5143500"/>
@@ -3475,11 +4922,11 @@
       </p:pic>
       <p:sp>
         <p:nvSpPr>
-          <p:cNvPr id="3" name="TextBox 2"/>
+          <p:cNvPr id="1179262495" name="TextBox 2"/>
           <p:cNvSpPr txBox="1"/>
           <p:nvPr/>
         </p:nvSpPr>
-        <p:spPr>
+        <p:spPr bwMode="auto">
           <a:xfrm>
             <a:off x="640080" y="219456"/>
             <a:ext cx="7955279" cy="411480"/>
@@ -3490,7 +4937,7 @@
           <a:noFill/>
         </p:spPr>
         <p:txBody>
-          <a:bodyPr wrap="none" lIns="0" rIns="0" tIns="0" bIns="0">
+          <a:bodyPr wrap="none" lIns="0" tIns="0" rIns="0" bIns="0">
             <a:spAutoFit/>
           </a:bodyPr>
           <a:lstStyle/>
@@ -3504,18 +4951,20 @@
               </a:defRPr>
             </a:pPr>
             <a:r>
+              <a:rPr/>
               <a:t>Итог проекта</a:t>
             </a:r>
-          </a:p>
-        </p:txBody>
-      </p:sp>
-      <p:sp>
-        <p:nvSpPr>
-          <p:cNvPr id="4" name="TextBox 3"/>
+            <a:endParaRPr/>
+          </a:p>
+        </p:txBody>
+      </p:sp>
+      <p:sp>
+        <p:nvSpPr>
+          <p:cNvPr id="247482529" name="TextBox 3"/>
           <p:cNvSpPr txBox="1"/>
           <p:nvPr/>
         </p:nvSpPr>
-        <p:spPr>
+        <p:spPr bwMode="auto">
           <a:xfrm>
             <a:off x="658368" y="1188720"/>
             <a:ext cx="4937760" cy="3474720"/>
@@ -3543,8 +4992,10 @@
               </a:defRPr>
             </a:pPr>
             <a:r>
+              <a:rPr/>
               <a:t>Создано приложение для поэтапного заучивания стихотворений.</a:t>
             </a:r>
+            <a:endParaRPr/>
           </a:p>
           <a:p>
             <a:pPr>
@@ -3559,8 +5010,10 @@
               </a:defRPr>
             </a:pPr>
             <a:r>
+              <a:rPr/>
               <a:t>Реализованы поиск, загрузка текста, скрытие слов, проверка и подсчёт баллов.</a:t>
             </a:r>
+            <a:endParaRPr/>
           </a:p>
           <a:p>
             <a:pPr>
@@ -3575,24 +5028,28 @@
               </a:defRPr>
             </a:pPr>
             <a:r>
+              <a:rPr/>
               <a:t>Проект можно развивать: история прогресса, избранные стихи, улучшенная очистка сайтов, облачное сохранение.</a:t>
             </a:r>
-          </a:p>
-        </p:txBody>
-      </p:sp>
-      <p:sp>
-        <p:nvSpPr>
-          <p:cNvPr id="5" name="Rounded Rectangle 4"/>
+            <a:endParaRPr/>
+          </a:p>
+        </p:txBody>
+      </p:sp>
+      <p:sp>
+        <p:nvSpPr>
+          <p:cNvPr id="770011288" name="Rounded Rectangle 4"/>
           <p:cNvSpPr/>
           <p:nvPr/>
         </p:nvSpPr>
-        <p:spPr>
+        <p:spPr bwMode="auto">
           <a:xfrm>
             <a:off x="5486400" y="1234440"/>
             <a:ext cx="3063240" cy="3154680"/>
           </a:xfrm>
           <a:prstGeom prst="roundRect">
-            <a:avLst/>
+            <a:avLst>
+              <a:gd name="adj" fmla="val 16667"/>
+            </a:avLst>
           </a:prstGeom>
           <a:solidFill>
             <a:srgbClr val="152437"/>
@@ -3621,17 +5078,20 @@
           <a:bodyPr rtlCol="0" anchor="ctr"/>
           <a:lstStyle/>
           <a:p>
-            <a:pPr algn="ctr"/>
-          </a:p>
-        </p:txBody>
-      </p:sp>
-      <p:sp>
-        <p:nvSpPr>
-          <p:cNvPr id="6" name="Rectangle 5"/>
+            <a:pPr algn="ctr">
+              <a:defRPr/>
+            </a:pPr>
+            <a:endParaRPr/>
+          </a:p>
+        </p:txBody>
+      </p:sp>
+      <p:sp>
+        <p:nvSpPr>
+          <p:cNvPr id="124646693" name="Rectangle 5"/>
           <p:cNvSpPr/>
           <p:nvPr/>
         </p:nvSpPr>
-        <p:spPr>
+        <p:spPr bwMode="auto">
           <a:xfrm>
             <a:off x="5486400" y="1234440"/>
             <a:ext cx="3063240" cy="384048"/>
@@ -3664,17 +5124,20 @@
           <a:bodyPr rtlCol="0" anchor="ctr"/>
           <a:lstStyle/>
           <a:p>
-            <a:pPr algn="ctr"/>
-          </a:p>
-        </p:txBody>
-      </p:sp>
-      <p:sp>
-        <p:nvSpPr>
-          <p:cNvPr id="7" name="Oval 6"/>
+            <a:pPr algn="ctr">
+              <a:defRPr/>
+            </a:pPr>
+            <a:endParaRPr/>
+          </a:p>
+        </p:txBody>
+      </p:sp>
+      <p:sp>
+        <p:nvSpPr>
+          <p:cNvPr id="820004975" name="Oval 6"/>
           <p:cNvSpPr/>
           <p:nvPr/>
         </p:nvSpPr>
-        <p:spPr>
+        <p:spPr bwMode="auto">
           <a:xfrm>
             <a:off x="5605272" y="1380744"/>
             <a:ext cx="73152" cy="73152"/>
@@ -3707,17 +5170,20 @@
           <a:bodyPr rtlCol="0" anchor="ctr"/>
           <a:lstStyle/>
           <a:p>
-            <a:pPr algn="ctr"/>
-          </a:p>
-        </p:txBody>
-      </p:sp>
-      <p:sp>
-        <p:nvSpPr>
-          <p:cNvPr id="8" name="Oval 7"/>
+            <a:pPr algn="ctr">
+              <a:defRPr/>
+            </a:pPr>
+            <a:endParaRPr/>
+          </a:p>
+        </p:txBody>
+      </p:sp>
+      <p:sp>
+        <p:nvSpPr>
+          <p:cNvPr id="1711674155" name="Oval 7"/>
           <p:cNvSpPr/>
           <p:nvPr/>
         </p:nvSpPr>
-        <p:spPr>
+        <p:spPr bwMode="auto">
           <a:xfrm>
             <a:off x="5769864" y="1380744"/>
             <a:ext cx="73152" cy="73152"/>
@@ -3750,17 +5216,20 @@
           <a:bodyPr rtlCol="0" anchor="ctr"/>
           <a:lstStyle/>
           <a:p>
-            <a:pPr algn="ctr"/>
-          </a:p>
-        </p:txBody>
-      </p:sp>
-      <p:sp>
-        <p:nvSpPr>
-          <p:cNvPr id="9" name="Oval 8"/>
+            <a:pPr algn="ctr">
+              <a:defRPr/>
+            </a:pPr>
+            <a:endParaRPr/>
+          </a:p>
+        </p:txBody>
+      </p:sp>
+      <p:sp>
+        <p:nvSpPr>
+          <p:cNvPr id="366522436" name="Oval 8"/>
           <p:cNvSpPr/>
           <p:nvPr/>
         </p:nvSpPr>
-        <p:spPr>
+        <p:spPr bwMode="auto">
           <a:xfrm>
             <a:off x="5934456" y="1380744"/>
             <a:ext cx="73152" cy="73152"/>
@@ -3793,17 +5262,20 @@
           <a:bodyPr rtlCol="0" anchor="ctr"/>
           <a:lstStyle/>
           <a:p>
-            <a:pPr algn="ctr"/>
-          </a:p>
-        </p:txBody>
-      </p:sp>
-      <p:sp>
-        <p:nvSpPr>
-          <p:cNvPr id="10" name="TextBox 9"/>
+            <a:pPr algn="ctr">
+              <a:defRPr/>
+            </a:pPr>
+            <a:endParaRPr/>
+          </a:p>
+        </p:txBody>
+      </p:sp>
+      <p:sp>
+        <p:nvSpPr>
+          <p:cNvPr id="1953155158" name="TextBox 9"/>
           <p:cNvSpPr txBox="1"/>
           <p:nvPr/>
         </p:nvSpPr>
-        <p:spPr>
+        <p:spPr bwMode="auto">
           <a:xfrm>
             <a:off x="6144768" y="1325880"/>
             <a:ext cx="2240280" cy="164592"/>
@@ -3814,7 +5286,7 @@
           <a:noFill/>
         </p:spPr>
         <p:txBody>
-          <a:bodyPr wrap="none" lIns="0" rIns="0" tIns="0" bIns="0">
+          <a:bodyPr wrap="none" lIns="0" tIns="0" rIns="0" bIns="0">
             <a:spAutoFit/>
           </a:bodyPr>
           <a:lstStyle/>
@@ -3828,18 +5300,20 @@
               </a:defRPr>
             </a:pPr>
             <a:r>
+              <a:rPr/>
               <a:t>готовый проект</a:t>
             </a:r>
-          </a:p>
-        </p:txBody>
-      </p:sp>
-      <p:sp>
-        <p:nvSpPr>
-          <p:cNvPr id="11" name="TextBox 10"/>
+            <a:endParaRPr/>
+          </a:p>
+        </p:txBody>
+      </p:sp>
+      <p:sp>
+        <p:nvSpPr>
+          <p:cNvPr id="1775693481" name="TextBox 10"/>
           <p:cNvSpPr txBox="1"/>
           <p:nvPr/>
         </p:nvSpPr>
-        <p:spPr>
+        <p:spPr bwMode="auto">
           <a:xfrm>
             <a:off x="5650992" y="1737360"/>
             <a:ext cx="2770632" cy="2560320"/>
@@ -3864,38 +5338,55 @@
               </a:defRPr>
             </a:pPr>
             <a:r>
+              <a:rPr/>
               <a:t>Результат:</a:t>
             </a:r>
-            <a:br/>
-            <a:r>
+            <a:br>
+              <a:rPr/>
+            </a:br>
+            <a:r>
+              <a:rPr/>
               <a:t>✓ Android-приложение</a:t>
             </a:r>
-            <a:br/>
-            <a:r>
+            <a:br>
+              <a:rPr/>
+            </a:br>
+            <a:r>
+              <a:rPr/>
               <a:t>✓ Java + XML</a:t>
             </a:r>
-            <a:br/>
-            <a:r>
+            <a:br>
+              <a:rPr/>
+            </a:br>
+            <a:r>
+              <a:rPr/>
               <a:t>✓ WebView-поиск</a:t>
             </a:r>
-            <a:br/>
-            <a:r>
+            <a:br>
+              <a:rPr/>
+            </a:br>
+            <a:r>
+              <a:rPr/>
               <a:t>✓ Таймер и проверка</a:t>
             </a:r>
-            <a:br/>
-            <a:r>
+            <a:br>
+              <a:rPr/>
+            </a:br>
+            <a:r>
+              <a:rPr/>
               <a:t>✓ Работа с длинными стихами</a:t>
             </a:r>
-          </a:p>
-        </p:txBody>
-      </p:sp>
-      <p:sp>
-        <p:nvSpPr>
-          <p:cNvPr id="12" name="TextBox 11"/>
+            <a:endParaRPr/>
+          </a:p>
+        </p:txBody>
+      </p:sp>
+      <p:sp>
+        <p:nvSpPr>
+          <p:cNvPr id="108729493" name="TextBox 11"/>
           <p:cNvSpPr txBox="1"/>
           <p:nvPr/>
         </p:nvSpPr>
-        <p:spPr>
+        <p:spPr bwMode="auto">
           <a:xfrm>
             <a:off x="8119872" y="4764024"/>
             <a:ext cx="640080" cy="228600"/>
@@ -3906,7 +5397,7 @@
           <a:noFill/>
         </p:spPr>
         <p:txBody>
-          <a:bodyPr wrap="none" lIns="0" rIns="0" tIns="0" bIns="0">
+          <a:bodyPr wrap="none" lIns="0" tIns="0" rIns="0" bIns="0">
             <a:spAutoFit/>
           </a:bodyPr>
           <a:lstStyle/>
@@ -3920,8 +5411,10 @@
               </a:defRPr>
             </a:pPr>
             <a:r>
+              <a:rPr/>
               <a:t>10/10</a:t>
             </a:r>
+            <a:endParaRPr/>
           </a:p>
         </p:txBody>
       </p:sp>
@@ -3930,34 +5423,47 @@
   <p:clrMapOvr>
     <a:masterClrMapping/>
   </p:clrMapOvr>
+  <mc:AlternateContent xmlns:mc="http://schemas.openxmlformats.org/markup-compatibility/2006">
+    <mc:Choice xmlns:p159="http://schemas.microsoft.com/office/powerpoint/2015/09/main" xmlns:p14="http://schemas.microsoft.com/office/powerpoint/2010/main" Requires="p159">
+      <p:transition p14:dur="2000" advClick="1"/>
+    </mc:Choice>
+    <mc:Fallback>
+      <p:transition advClick="1"/>
+    </mc:Fallback>
+  </mc:AlternateContent>
 </p:sld>
 </file>
 
 <file path=ppt/slides/slide2.xml><?xml version="1.0" encoding="utf-8"?>
-<p:sld xmlns:a="http://schemas.openxmlformats.org/drawingml/2006/main" xmlns:p="http://schemas.openxmlformats.org/presentationml/2006/main" xmlns:r="http://schemas.openxmlformats.org/officeDocument/2006/relationships">
-  <p:cSld>
+<p:sld xmlns:a="http://schemas.openxmlformats.org/drawingml/2006/main" xmlns:r="http://schemas.openxmlformats.org/officeDocument/2006/relationships" xmlns:p="http://schemas.openxmlformats.org/presentationml/2006/main" xmlns:m="http://schemas.openxmlformats.org/officeDocument/2006/math" xmlns:w="http://schemas.openxmlformats.org/wordprocessingml/2006/main" xmlns:mc="http://schemas.openxmlformats.org/markup-compatibility/2006" showMasterPhAnim="0" showMasterSp="1" show="1">
+  <p:cSld name="">
     <p:spTree>
       <p:nvGrpSpPr>
         <p:cNvPr id="1" name=""/>
         <p:cNvGrpSpPr/>
         <p:nvPr/>
       </p:nvGrpSpPr>
-      <p:grpSpPr/>
+      <p:grpSpPr bwMode="auto">
+        <a:xfrm>
+          <a:off x="0" y="0"/>
+          <a:ext cx="0" cy="0"/>
+          <a:chOff x="0" y="0"/>
+          <a:chExt cx="0" cy="0"/>
+        </a:xfrm>
+      </p:grpSpPr>
       <p:pic>
         <p:nvPicPr>
-          <p:cNvPr id="2" name="Picture 1" descr="image1.jpeg"/>
+          <p:cNvPr id="725630278" name="Picture 1" descr="image1.jpeg"/>
           <p:cNvPicPr>
             <a:picLocks noChangeAspect="1"/>
           </p:cNvPicPr>
           <p:nvPr/>
         </p:nvPicPr>
-        <p:blipFill>
-          <a:blip r:embed="rId2"/>
-          <a:stretch>
-            <a:fillRect/>
-          </a:stretch>
+        <p:blipFill rotWithShape="1">
+          <a:blip r:embed="rId3"/>
+          <a:stretch/>
         </p:blipFill>
-        <p:spPr>
+        <p:spPr bwMode="auto">
           <a:xfrm>
             <a:off x="0" y="0"/>
             <a:ext cx="9144000" cy="5143500"/>
@@ -3969,11 +5475,11 @@
       </p:pic>
       <p:sp>
         <p:nvSpPr>
-          <p:cNvPr id="3" name="TextBox 2"/>
+          <p:cNvPr id="302253568" name="TextBox 2"/>
           <p:cNvSpPr txBox="1"/>
           <p:nvPr/>
         </p:nvSpPr>
-        <p:spPr>
+        <p:spPr bwMode="auto">
           <a:xfrm>
             <a:off x="640080" y="219456"/>
             <a:ext cx="7955279" cy="411480"/>
@@ -3984,7 +5490,7 @@
           <a:noFill/>
         </p:spPr>
         <p:txBody>
-          <a:bodyPr wrap="none" lIns="0" rIns="0" tIns="0" bIns="0">
+          <a:bodyPr wrap="none" lIns="0" tIns="0" rIns="0" bIns="0">
             <a:spAutoFit/>
           </a:bodyPr>
           <a:lstStyle/>
@@ -3998,18 +5504,20 @@
               </a:defRPr>
             </a:pPr>
             <a:r>
+              <a:rPr/>
               <a:t>Актуальность проекта</a:t>
             </a:r>
-          </a:p>
-        </p:txBody>
-      </p:sp>
-      <p:sp>
-        <p:nvSpPr>
-          <p:cNvPr id="4" name="TextBox 3"/>
+            <a:endParaRPr/>
+          </a:p>
+        </p:txBody>
+      </p:sp>
+      <p:sp>
+        <p:nvSpPr>
+          <p:cNvPr id="1662243160" name="TextBox 3"/>
           <p:cNvSpPr txBox="1"/>
           <p:nvPr/>
         </p:nvSpPr>
-        <p:spPr>
+        <p:spPr bwMode="auto">
           <a:xfrm>
             <a:off x="658368" y="1207008"/>
             <a:ext cx="4663440" cy="3474720"/>
@@ -4037,8 +5545,10 @@
               </a:defRPr>
             </a:pPr>
             <a:r>
+              <a:rPr/>
               <a:t>Многим школьникам сложно запоминать длинные стихотворения.</a:t>
             </a:r>
+            <a:endParaRPr/>
           </a:p>
           <a:p>
             <a:pPr>
@@ -4053,8 +5563,10 @@
               </a:defRPr>
             </a:pPr>
             <a:r>
+              <a:rPr/>
               <a:t>Обычное перечитывание не показывает, какие слова уже выучены.</a:t>
             </a:r>
+            <a:endParaRPr/>
           </a:p>
           <a:p>
             <a:pPr>
@@ -4069,24 +5581,28 @@
               </a:defRPr>
             </a:pPr>
             <a:r>
+              <a:rPr/>
               <a:t>Приложение превращает заучивание в поэтапную тренировку с проверкой.</a:t>
             </a:r>
-          </a:p>
-        </p:txBody>
-      </p:sp>
-      <p:sp>
-        <p:nvSpPr>
-          <p:cNvPr id="5" name="Rounded Rectangle 4"/>
+            <a:endParaRPr/>
+          </a:p>
+        </p:txBody>
+      </p:sp>
+      <p:sp>
+        <p:nvSpPr>
+          <p:cNvPr id="99925044" name="Rounded Rectangle 4"/>
           <p:cNvSpPr/>
           <p:nvPr/>
         </p:nvSpPr>
-        <p:spPr>
+        <p:spPr bwMode="auto">
           <a:xfrm>
             <a:off x="5486400" y="1234440"/>
             <a:ext cx="2971800" cy="3246120"/>
           </a:xfrm>
           <a:prstGeom prst="roundRect">
-            <a:avLst/>
+            <a:avLst>
+              <a:gd name="adj" fmla="val 16667"/>
+            </a:avLst>
           </a:prstGeom>
           <a:solidFill>
             <a:srgbClr val="152437"/>
@@ -4115,17 +5631,20 @@
           <a:bodyPr rtlCol="0" anchor="ctr"/>
           <a:lstStyle/>
           <a:p>
-            <a:pPr algn="ctr"/>
-          </a:p>
-        </p:txBody>
-      </p:sp>
-      <p:sp>
-        <p:nvSpPr>
-          <p:cNvPr id="6" name="Rectangle 5"/>
+            <a:pPr algn="ctr">
+              <a:defRPr/>
+            </a:pPr>
+            <a:endParaRPr/>
+          </a:p>
+        </p:txBody>
+      </p:sp>
+      <p:sp>
+        <p:nvSpPr>
+          <p:cNvPr id="1763447578" name="Rectangle 5"/>
           <p:cNvSpPr/>
           <p:nvPr/>
         </p:nvSpPr>
-        <p:spPr>
+        <p:spPr bwMode="auto">
           <a:xfrm>
             <a:off x="5486400" y="1234440"/>
             <a:ext cx="2971800" cy="384048"/>
@@ -4158,17 +5677,20 @@
           <a:bodyPr rtlCol="0" anchor="ctr"/>
           <a:lstStyle/>
           <a:p>
-            <a:pPr algn="ctr"/>
-          </a:p>
-        </p:txBody>
-      </p:sp>
-      <p:sp>
-        <p:nvSpPr>
-          <p:cNvPr id="7" name="Oval 6"/>
+            <a:pPr algn="ctr">
+              <a:defRPr/>
+            </a:pPr>
+            <a:endParaRPr/>
+          </a:p>
+        </p:txBody>
+      </p:sp>
+      <p:sp>
+        <p:nvSpPr>
+          <p:cNvPr id="1288665986" name="Oval 6"/>
           <p:cNvSpPr/>
           <p:nvPr/>
         </p:nvSpPr>
-        <p:spPr>
+        <p:spPr bwMode="auto">
           <a:xfrm>
             <a:off x="5605272" y="1380744"/>
             <a:ext cx="73152" cy="73152"/>
@@ -4201,17 +5723,20 @@
           <a:bodyPr rtlCol="0" anchor="ctr"/>
           <a:lstStyle/>
           <a:p>
-            <a:pPr algn="ctr"/>
-          </a:p>
-        </p:txBody>
-      </p:sp>
-      <p:sp>
-        <p:nvSpPr>
-          <p:cNvPr id="8" name="Oval 7"/>
+            <a:pPr algn="ctr">
+              <a:defRPr/>
+            </a:pPr>
+            <a:endParaRPr/>
+          </a:p>
+        </p:txBody>
+      </p:sp>
+      <p:sp>
+        <p:nvSpPr>
+          <p:cNvPr id="1541258077" name="Oval 7"/>
           <p:cNvSpPr/>
           <p:nvPr/>
         </p:nvSpPr>
-        <p:spPr>
+        <p:spPr bwMode="auto">
           <a:xfrm>
             <a:off x="5769864" y="1380744"/>
             <a:ext cx="73152" cy="73152"/>
@@ -4244,17 +5769,20 @@
           <a:bodyPr rtlCol="0" anchor="ctr"/>
           <a:lstStyle/>
           <a:p>
-            <a:pPr algn="ctr"/>
-          </a:p>
-        </p:txBody>
-      </p:sp>
-      <p:sp>
-        <p:nvSpPr>
-          <p:cNvPr id="9" name="Oval 8"/>
+            <a:pPr algn="ctr">
+              <a:defRPr/>
+            </a:pPr>
+            <a:endParaRPr/>
+          </a:p>
+        </p:txBody>
+      </p:sp>
+      <p:sp>
+        <p:nvSpPr>
+          <p:cNvPr id="1801243043" name="Oval 8"/>
           <p:cNvSpPr/>
           <p:nvPr/>
         </p:nvSpPr>
-        <p:spPr>
+        <p:spPr bwMode="auto">
           <a:xfrm>
             <a:off x="5934456" y="1380744"/>
             <a:ext cx="73152" cy="73152"/>
@@ -4287,17 +5815,20 @@
           <a:bodyPr rtlCol="0" anchor="ctr"/>
           <a:lstStyle/>
           <a:p>
-            <a:pPr algn="ctr"/>
-          </a:p>
-        </p:txBody>
-      </p:sp>
-      <p:sp>
-        <p:nvSpPr>
-          <p:cNvPr id="10" name="TextBox 9"/>
+            <a:pPr algn="ctr">
+              <a:defRPr/>
+            </a:pPr>
+            <a:endParaRPr/>
+          </a:p>
+        </p:txBody>
+      </p:sp>
+      <p:sp>
+        <p:nvSpPr>
+          <p:cNvPr id="172765123" name="TextBox 9"/>
           <p:cNvSpPr txBox="1"/>
           <p:nvPr/>
         </p:nvSpPr>
-        <p:spPr>
+        <p:spPr bwMode="auto">
           <a:xfrm>
             <a:off x="6144768" y="1325880"/>
             <a:ext cx="2148840" cy="164592"/>
@@ -4308,7 +5839,7 @@
           <a:noFill/>
         </p:spPr>
         <p:txBody>
-          <a:bodyPr wrap="none" lIns="0" rIns="0" tIns="0" bIns="0">
+          <a:bodyPr wrap="none" lIns="0" tIns="0" rIns="0" bIns="0">
             <a:spAutoFit/>
           </a:bodyPr>
           <a:lstStyle/>
@@ -4322,18 +5853,20 @@
               </a:defRPr>
             </a:pPr>
             <a:r>
+              <a:rPr/>
               <a:t>идея алгоритма</a:t>
             </a:r>
-          </a:p>
-        </p:txBody>
-      </p:sp>
-      <p:sp>
-        <p:nvSpPr>
-          <p:cNvPr id="11" name="TextBox 10"/>
+            <a:endParaRPr/>
+          </a:p>
+        </p:txBody>
+      </p:sp>
+      <p:sp>
+        <p:nvSpPr>
+          <p:cNvPr id="1200523930" name="TextBox 10"/>
           <p:cNvSpPr txBox="1"/>
           <p:nvPr/>
         </p:nvSpPr>
-        <p:spPr>
+        <p:spPr bwMode="auto">
           <a:xfrm>
             <a:off x="5650992" y="1737360"/>
             <a:ext cx="2679192" cy="2651760"/>
@@ -4358,30 +5891,41 @@
               </a:defRPr>
             </a:pPr>
             <a:r>
+              <a:rPr/>
               <a:t>Проблема → нет контроля памяти</a:t>
             </a:r>
-            <a:br/>
-            <a:r>
+            <a:br>
+              <a:rPr/>
+            </a:br>
+            <a:r>
+              <a:rPr/>
               <a:t>Решение → скрывать слова</a:t>
             </a:r>
-            <a:br/>
-            <a:r>
+            <a:br>
+              <a:rPr/>
+            </a:br>
+            <a:r>
+              <a:rPr/>
               <a:t>Проверка → сравнить ответ</a:t>
             </a:r>
-            <a:br/>
-            <a:r>
+            <a:br>
+              <a:rPr/>
+            </a:br>
+            <a:r>
+              <a:rPr/>
               <a:t>Итог → балл и прогресс</a:t>
             </a:r>
-          </a:p>
-        </p:txBody>
-      </p:sp>
-      <p:sp>
-        <p:nvSpPr>
-          <p:cNvPr id="12" name="TextBox 11"/>
+            <a:endParaRPr/>
+          </a:p>
+        </p:txBody>
+      </p:sp>
+      <p:sp>
+        <p:nvSpPr>
+          <p:cNvPr id="1294252806" name="TextBox 11"/>
           <p:cNvSpPr txBox="1"/>
           <p:nvPr/>
         </p:nvSpPr>
-        <p:spPr>
+        <p:spPr bwMode="auto">
           <a:xfrm>
             <a:off x="8119872" y="4764024"/>
             <a:ext cx="640080" cy="228600"/>
@@ -4392,7 +5936,7 @@
           <a:noFill/>
         </p:spPr>
         <p:txBody>
-          <a:bodyPr wrap="none" lIns="0" rIns="0" tIns="0" bIns="0">
+          <a:bodyPr wrap="none" lIns="0" tIns="0" rIns="0" bIns="0">
             <a:spAutoFit/>
           </a:bodyPr>
           <a:lstStyle/>
@@ -4406,8 +5950,10 @@
               </a:defRPr>
             </a:pPr>
             <a:r>
+              <a:rPr/>
               <a:t>2/10</a:t>
             </a:r>
+            <a:endParaRPr/>
           </a:p>
         </p:txBody>
       </p:sp>
@@ -4416,34 +5962,47 @@
   <p:clrMapOvr>
     <a:masterClrMapping/>
   </p:clrMapOvr>
+  <mc:AlternateContent xmlns:mc="http://schemas.openxmlformats.org/markup-compatibility/2006">
+    <mc:Choice xmlns:p159="http://schemas.microsoft.com/office/powerpoint/2015/09/main" xmlns:p14="http://schemas.microsoft.com/office/powerpoint/2010/main" Requires="p159">
+      <p:transition p14:dur="2000" advClick="1"/>
+    </mc:Choice>
+    <mc:Fallback>
+      <p:transition advClick="1"/>
+    </mc:Fallback>
+  </mc:AlternateContent>
 </p:sld>
 </file>
 
 <file path=ppt/slides/slide3.xml><?xml version="1.0" encoding="utf-8"?>
-<p:sld xmlns:a="http://schemas.openxmlformats.org/drawingml/2006/main" xmlns:p="http://schemas.openxmlformats.org/presentationml/2006/main" xmlns:r="http://schemas.openxmlformats.org/officeDocument/2006/relationships">
-  <p:cSld>
+<p:sld xmlns:a="http://schemas.openxmlformats.org/drawingml/2006/main" xmlns:r="http://schemas.openxmlformats.org/officeDocument/2006/relationships" xmlns:p="http://schemas.openxmlformats.org/presentationml/2006/main" xmlns:m="http://schemas.openxmlformats.org/officeDocument/2006/math" xmlns:w="http://schemas.openxmlformats.org/wordprocessingml/2006/main" xmlns:mc="http://schemas.openxmlformats.org/markup-compatibility/2006" showMasterPhAnim="0" showMasterSp="1" show="1">
+  <p:cSld name="">
     <p:spTree>
       <p:nvGrpSpPr>
         <p:cNvPr id="1" name=""/>
         <p:cNvGrpSpPr/>
         <p:nvPr/>
       </p:nvGrpSpPr>
-      <p:grpSpPr/>
+      <p:grpSpPr bwMode="auto">
+        <a:xfrm>
+          <a:off x="0" y="0"/>
+          <a:ext cx="0" cy="0"/>
+          <a:chOff x="0" y="0"/>
+          <a:chExt cx="0" cy="0"/>
+        </a:xfrm>
+      </p:grpSpPr>
       <p:pic>
         <p:nvPicPr>
-          <p:cNvPr id="2" name="Picture 1" descr="image1.jpeg"/>
+          <p:cNvPr id="647385223" name="Picture 1" descr="image1.jpeg"/>
           <p:cNvPicPr>
             <a:picLocks noChangeAspect="1"/>
           </p:cNvPicPr>
           <p:nvPr/>
         </p:nvPicPr>
-        <p:blipFill>
-          <a:blip r:embed="rId2"/>
-          <a:stretch>
-            <a:fillRect/>
-          </a:stretch>
+        <p:blipFill rotWithShape="1">
+          <a:blip r:embed="rId3"/>
+          <a:stretch/>
         </p:blipFill>
-        <p:spPr>
+        <p:spPr bwMode="auto">
           <a:xfrm>
             <a:off x="0" y="0"/>
             <a:ext cx="9144000" cy="5143500"/>
@@ -4455,11 +6014,11 @@
       </p:pic>
       <p:sp>
         <p:nvSpPr>
-          <p:cNvPr id="3" name="TextBox 2"/>
+          <p:cNvPr id="1029936004" name="TextBox 2"/>
           <p:cNvSpPr txBox="1"/>
           <p:nvPr/>
         </p:nvSpPr>
-        <p:spPr>
+        <p:spPr bwMode="auto">
           <a:xfrm>
             <a:off x="640080" y="219456"/>
             <a:ext cx="7955279" cy="411480"/>
@@ -4470,7 +6029,7 @@
           <a:noFill/>
         </p:spPr>
         <p:txBody>
-          <a:bodyPr wrap="none" lIns="0" rIns="0" tIns="0" bIns="0">
+          <a:bodyPr wrap="none" lIns="0" tIns="0" rIns="0" bIns="0">
             <a:spAutoFit/>
           </a:bodyPr>
           <a:lstStyle/>
@@ -4484,18 +6043,20 @@
               </a:defRPr>
             </a:pPr>
             <a:r>
+              <a:rPr/>
               <a:t>Цель и задачи проекта</a:t>
             </a:r>
-          </a:p>
-        </p:txBody>
-      </p:sp>
-      <p:sp>
-        <p:nvSpPr>
-          <p:cNvPr id="4" name="TextBox 3"/>
+            <a:endParaRPr/>
+          </a:p>
+        </p:txBody>
+      </p:sp>
+      <p:sp>
+        <p:nvSpPr>
+          <p:cNvPr id="1201682555" name="TextBox 3"/>
           <p:cNvSpPr txBox="1"/>
           <p:nvPr/>
         </p:nvSpPr>
-        <p:spPr>
+        <p:spPr bwMode="auto">
           <a:xfrm>
             <a:off x="658368" y="1133856"/>
             <a:ext cx="5029200" cy="3474720"/>
@@ -4523,8 +6084,10 @@
               </a:defRPr>
             </a:pPr>
             <a:r>
+              <a:rPr/>
               <a:t>Цель: создать Android-приложение, которое помогает учить стихи по памяти.</a:t>
             </a:r>
+            <a:endParaRPr/>
           </a:p>
           <a:p>
             <a:pPr>
@@ -4539,8 +6102,10 @@
               </a:defRPr>
             </a:pPr>
             <a:r>
+              <a:rPr/>
               <a:t>Задачи: загрузка текста, скрытие слов, проверка ошибок, подсчёт баллов.</a:t>
             </a:r>
+            <a:endParaRPr/>
           </a:p>
           <a:p>
             <a:pPr>
@@ -4555,24 +6120,28 @@
               </a:defRPr>
             </a:pPr>
             <a:r>
+              <a:rPr/>
               <a:t>Дополнительно: встроенный поиск, сохранение прогресса и работа с длинным текстом.</a:t>
             </a:r>
-          </a:p>
-        </p:txBody>
-      </p:sp>
-      <p:sp>
-        <p:nvSpPr>
-          <p:cNvPr id="5" name="Rounded Rectangle 4"/>
+            <a:endParaRPr/>
+          </a:p>
+        </p:txBody>
+      </p:sp>
+      <p:sp>
+        <p:nvSpPr>
+          <p:cNvPr id="797090554" name="Rounded Rectangle 4"/>
           <p:cNvSpPr/>
           <p:nvPr/>
         </p:nvSpPr>
-        <p:spPr>
+        <p:spPr bwMode="auto">
           <a:xfrm>
             <a:off x="5852160" y="1325880"/>
             <a:ext cx="1097280" cy="310896"/>
           </a:xfrm>
           <a:prstGeom prst="roundRect">
-            <a:avLst/>
+            <a:avLst>
+              <a:gd name="adj" fmla="val 16667"/>
+            </a:avLst>
           </a:prstGeom>
           <a:solidFill>
             <a:srgbClr val="EBF4FC"/>
@@ -4601,17 +6170,20 @@
           <a:bodyPr rtlCol="0" anchor="ctr"/>
           <a:lstStyle/>
           <a:p>
-            <a:pPr algn="ctr"/>
-          </a:p>
-        </p:txBody>
-      </p:sp>
-      <p:sp>
-        <p:nvSpPr>
-          <p:cNvPr id="6" name="TextBox 5"/>
+            <a:pPr algn="ctr">
+              <a:defRPr/>
+            </a:pPr>
+            <a:endParaRPr/>
+          </a:p>
+        </p:txBody>
+      </p:sp>
+      <p:sp>
+        <p:nvSpPr>
+          <p:cNvPr id="1586771778" name="TextBox 5"/>
           <p:cNvSpPr txBox="1"/>
           <p:nvPr/>
         </p:nvSpPr>
-        <p:spPr>
+        <p:spPr bwMode="auto">
           <a:xfrm>
             <a:off x="5961888" y="1380744"/>
             <a:ext cx="877824" cy="164592"/>
@@ -4622,7 +6194,7 @@
           <a:noFill/>
         </p:spPr>
         <p:txBody>
-          <a:bodyPr wrap="none" lIns="0" rIns="0" tIns="0" bIns="0">
+          <a:bodyPr wrap="none" lIns="0" tIns="0" rIns="0" bIns="0">
             <a:spAutoFit/>
           </a:bodyPr>
           <a:lstStyle/>
@@ -4636,24 +6208,28 @@
               </a:defRPr>
             </a:pPr>
             <a:r>
+              <a:rPr/>
               <a:t>Java</a:t>
             </a:r>
-          </a:p>
-        </p:txBody>
-      </p:sp>
-      <p:sp>
-        <p:nvSpPr>
-          <p:cNvPr id="7" name="Rounded Rectangle 6"/>
+            <a:endParaRPr/>
+          </a:p>
+        </p:txBody>
+      </p:sp>
+      <p:sp>
+        <p:nvSpPr>
+          <p:cNvPr id="20805163" name="Rounded Rectangle 6"/>
           <p:cNvSpPr/>
           <p:nvPr/>
         </p:nvSpPr>
-        <p:spPr>
+        <p:spPr bwMode="auto">
           <a:xfrm>
             <a:off x="7086600" y="1325880"/>
             <a:ext cx="1325880" cy="310896"/>
           </a:xfrm>
           <a:prstGeom prst="roundRect">
-            <a:avLst/>
+            <a:avLst>
+              <a:gd name="adj" fmla="val 16667"/>
+            </a:avLst>
           </a:prstGeom>
           <a:solidFill>
             <a:srgbClr val="EBF4FC"/>
@@ -4682,17 +6258,20 @@
           <a:bodyPr rtlCol="0" anchor="ctr"/>
           <a:lstStyle/>
           <a:p>
-            <a:pPr algn="ctr"/>
-          </a:p>
-        </p:txBody>
-      </p:sp>
-      <p:sp>
-        <p:nvSpPr>
-          <p:cNvPr id="8" name="TextBox 7"/>
+            <a:pPr algn="ctr">
+              <a:defRPr/>
+            </a:pPr>
+            <a:endParaRPr/>
+          </a:p>
+        </p:txBody>
+      </p:sp>
+      <p:sp>
+        <p:nvSpPr>
+          <p:cNvPr id="1556913140" name="TextBox 7"/>
           <p:cNvSpPr txBox="1"/>
           <p:nvPr/>
         </p:nvSpPr>
-        <p:spPr>
+        <p:spPr bwMode="auto">
           <a:xfrm>
             <a:off x="7196328" y="1380744"/>
             <a:ext cx="1106424" cy="164592"/>
@@ -4703,7 +6282,7 @@
           <a:noFill/>
         </p:spPr>
         <p:txBody>
-          <a:bodyPr wrap="none" lIns="0" rIns="0" tIns="0" bIns="0">
+          <a:bodyPr wrap="none" lIns="0" tIns="0" rIns="0" bIns="0">
             <a:spAutoFit/>
           </a:bodyPr>
           <a:lstStyle/>
@@ -4717,24 +6296,28 @@
               </a:defRPr>
             </a:pPr>
             <a:r>
+              <a:rPr/>
               <a:t>Android SDK</a:t>
             </a:r>
-          </a:p>
-        </p:txBody>
-      </p:sp>
-      <p:sp>
-        <p:nvSpPr>
-          <p:cNvPr id="9" name="Rounded Rectangle 8"/>
+            <a:endParaRPr/>
+          </a:p>
+        </p:txBody>
+      </p:sp>
+      <p:sp>
+        <p:nvSpPr>
+          <p:cNvPr id="854237478" name="Rounded Rectangle 8"/>
           <p:cNvSpPr/>
           <p:nvPr/>
         </p:nvSpPr>
-        <p:spPr>
+        <p:spPr bwMode="auto">
           <a:xfrm>
             <a:off x="5852160" y="1828800"/>
             <a:ext cx="1234440" cy="310896"/>
           </a:xfrm>
           <a:prstGeom prst="roundRect">
-            <a:avLst/>
+            <a:avLst>
+              <a:gd name="adj" fmla="val 16667"/>
+            </a:avLst>
           </a:prstGeom>
           <a:solidFill>
             <a:srgbClr val="EBF4FC"/>
@@ -4763,17 +6346,20 @@
           <a:bodyPr rtlCol="0" anchor="ctr"/>
           <a:lstStyle/>
           <a:p>
-            <a:pPr algn="ctr"/>
-          </a:p>
-        </p:txBody>
-      </p:sp>
-      <p:sp>
-        <p:nvSpPr>
-          <p:cNvPr id="10" name="TextBox 9"/>
+            <a:pPr algn="ctr">
+              <a:defRPr/>
+            </a:pPr>
+            <a:endParaRPr/>
+          </a:p>
+        </p:txBody>
+      </p:sp>
+      <p:sp>
+        <p:nvSpPr>
+          <p:cNvPr id="490949397" name="TextBox 9"/>
           <p:cNvSpPr txBox="1"/>
           <p:nvPr/>
         </p:nvSpPr>
-        <p:spPr>
+        <p:spPr bwMode="auto">
           <a:xfrm>
             <a:off x="5961888" y="1883664"/>
             <a:ext cx="1014984" cy="164592"/>
@@ -4784,7 +6370,7 @@
           <a:noFill/>
         </p:spPr>
         <p:txBody>
-          <a:bodyPr wrap="none" lIns="0" rIns="0" tIns="0" bIns="0">
+          <a:bodyPr wrap="none" lIns="0" tIns="0" rIns="0" bIns="0">
             <a:spAutoFit/>
           </a:bodyPr>
           <a:lstStyle/>
@@ -4798,24 +6384,28 @@
               </a:defRPr>
             </a:pPr>
             <a:r>
+              <a:rPr/>
               <a:t>WebView</a:t>
             </a:r>
-          </a:p>
-        </p:txBody>
-      </p:sp>
-      <p:sp>
-        <p:nvSpPr>
-          <p:cNvPr id="11" name="Rounded Rectangle 10"/>
+            <a:endParaRPr/>
+          </a:p>
+        </p:txBody>
+      </p:sp>
+      <p:sp>
+        <p:nvSpPr>
+          <p:cNvPr id="1049369054" name="Rounded Rectangle 10"/>
           <p:cNvSpPr/>
           <p:nvPr/>
         </p:nvSpPr>
-        <p:spPr>
+        <p:spPr bwMode="auto">
           <a:xfrm>
             <a:off x="7223760" y="1828800"/>
             <a:ext cx="1188720" cy="310896"/>
           </a:xfrm>
           <a:prstGeom prst="roundRect">
-            <a:avLst/>
+            <a:avLst>
+              <a:gd name="adj" fmla="val 16667"/>
+            </a:avLst>
           </a:prstGeom>
           <a:solidFill>
             <a:srgbClr val="EBF4FC"/>
@@ -4844,17 +6434,20 @@
           <a:bodyPr rtlCol="0" anchor="ctr"/>
           <a:lstStyle/>
           <a:p>
-            <a:pPr algn="ctr"/>
-          </a:p>
-        </p:txBody>
-      </p:sp>
-      <p:sp>
-        <p:nvSpPr>
-          <p:cNvPr id="12" name="TextBox 11"/>
+            <a:pPr algn="ctr">
+              <a:defRPr/>
+            </a:pPr>
+            <a:endParaRPr/>
+          </a:p>
+        </p:txBody>
+      </p:sp>
+      <p:sp>
+        <p:nvSpPr>
+          <p:cNvPr id="414562676" name="TextBox 11"/>
           <p:cNvSpPr txBox="1"/>
           <p:nvPr/>
         </p:nvSpPr>
-        <p:spPr>
+        <p:spPr bwMode="auto">
           <a:xfrm>
             <a:off x="7333488" y="1883664"/>
             <a:ext cx="969264" cy="164592"/>
@@ -4865,7 +6458,7 @@
           <a:noFill/>
         </p:spPr>
         <p:txBody>
-          <a:bodyPr wrap="none" lIns="0" rIns="0" tIns="0" bIns="0">
+          <a:bodyPr wrap="none" lIns="0" tIns="0" rIns="0" bIns="0">
             <a:spAutoFit/>
           </a:bodyPr>
           <a:lstStyle/>
@@ -4879,24 +6472,28 @@
               </a:defRPr>
             </a:pPr>
             <a:r>
+              <a:rPr/>
               <a:t>XML layout</a:t>
             </a:r>
-          </a:p>
-        </p:txBody>
-      </p:sp>
-      <p:sp>
-        <p:nvSpPr>
-          <p:cNvPr id="13" name="Rounded Rectangle 12"/>
+            <a:endParaRPr/>
+          </a:p>
+        </p:txBody>
+      </p:sp>
+      <p:sp>
+        <p:nvSpPr>
+          <p:cNvPr id="148275290" name="Rounded Rectangle 12"/>
           <p:cNvSpPr/>
           <p:nvPr/>
         </p:nvSpPr>
-        <p:spPr>
+        <p:spPr bwMode="auto">
           <a:xfrm>
             <a:off x="5852160" y="2331720"/>
             <a:ext cx="1143000" cy="310896"/>
           </a:xfrm>
           <a:prstGeom prst="roundRect">
-            <a:avLst/>
+            <a:avLst>
+              <a:gd name="adj" fmla="val 16667"/>
+            </a:avLst>
           </a:prstGeom>
           <a:solidFill>
             <a:srgbClr val="EBF4FC"/>
@@ -4925,17 +6522,20 @@
           <a:bodyPr rtlCol="0" anchor="ctr"/>
           <a:lstStyle/>
           <a:p>
-            <a:pPr algn="ctr"/>
-          </a:p>
-        </p:txBody>
-      </p:sp>
-      <p:sp>
-        <p:nvSpPr>
-          <p:cNvPr id="14" name="TextBox 13"/>
+            <a:pPr algn="ctr">
+              <a:defRPr/>
+            </a:pPr>
+            <a:endParaRPr/>
+          </a:p>
+        </p:txBody>
+      </p:sp>
+      <p:sp>
+        <p:nvSpPr>
+          <p:cNvPr id="343975792" name="TextBox 13"/>
           <p:cNvSpPr txBox="1"/>
           <p:nvPr/>
         </p:nvSpPr>
-        <p:spPr>
+        <p:spPr bwMode="auto">
           <a:xfrm>
             <a:off x="5961888" y="2386584"/>
             <a:ext cx="923544" cy="164592"/>
@@ -4946,7 +6546,7 @@
           <a:noFill/>
         </p:spPr>
         <p:txBody>
-          <a:bodyPr wrap="none" lIns="0" rIns="0" tIns="0" bIns="0">
+          <a:bodyPr wrap="none" lIns="0" tIns="0" rIns="0" bIns="0">
             <a:spAutoFit/>
           </a:bodyPr>
           <a:lstStyle/>
@@ -4960,24 +6560,28 @@
               </a:defRPr>
             </a:pPr>
             <a:r>
+              <a:rPr/>
               <a:t>Handler</a:t>
             </a:r>
-          </a:p>
-        </p:txBody>
-      </p:sp>
-      <p:sp>
-        <p:nvSpPr>
-          <p:cNvPr id="15" name="Rounded Rectangle 14"/>
+            <a:endParaRPr/>
+          </a:p>
+        </p:txBody>
+      </p:sp>
+      <p:sp>
+        <p:nvSpPr>
+          <p:cNvPr id="2059542527" name="Rounded Rectangle 14"/>
           <p:cNvSpPr/>
           <p:nvPr/>
         </p:nvSpPr>
-        <p:spPr>
+        <p:spPr bwMode="auto">
           <a:xfrm>
             <a:off x="7132320" y="2331720"/>
             <a:ext cx="914400" cy="310896"/>
           </a:xfrm>
           <a:prstGeom prst="roundRect">
-            <a:avLst/>
+            <a:avLst>
+              <a:gd name="adj" fmla="val 16667"/>
+            </a:avLst>
           </a:prstGeom>
           <a:solidFill>
             <a:srgbClr val="EBF4FC"/>
@@ -5006,17 +6610,20 @@
           <a:bodyPr rtlCol="0" anchor="ctr"/>
           <a:lstStyle/>
           <a:p>
-            <a:pPr algn="ctr"/>
-          </a:p>
-        </p:txBody>
-      </p:sp>
-      <p:sp>
-        <p:nvSpPr>
-          <p:cNvPr id="16" name="TextBox 15"/>
+            <a:pPr algn="ctr">
+              <a:defRPr/>
+            </a:pPr>
+            <a:endParaRPr/>
+          </a:p>
+        </p:txBody>
+      </p:sp>
+      <p:sp>
+        <p:nvSpPr>
+          <p:cNvPr id="1397241307" name="TextBox 15"/>
           <p:cNvSpPr txBox="1"/>
           <p:nvPr/>
         </p:nvSpPr>
-        <p:spPr>
+        <p:spPr bwMode="auto">
           <a:xfrm>
             <a:off x="7242048" y="2386584"/>
             <a:ext cx="694944" cy="164592"/>
@@ -5027,7 +6634,7 @@
           <a:noFill/>
         </p:spPr>
         <p:txBody>
-          <a:bodyPr wrap="none" lIns="0" rIns="0" tIns="0" bIns="0">
+          <a:bodyPr wrap="none" lIns="0" tIns="0" rIns="0" bIns="0">
             <a:spAutoFit/>
           </a:bodyPr>
           <a:lstStyle/>
@@ -5041,24 +6648,28 @@
               </a:defRPr>
             </a:pPr>
             <a:r>
+              <a:rPr/>
               <a:t>Regex</a:t>
             </a:r>
-          </a:p>
-        </p:txBody>
-      </p:sp>
-      <p:sp>
-        <p:nvSpPr>
-          <p:cNvPr id="17" name="Rounded Rectangle 16"/>
+            <a:endParaRPr/>
+          </a:p>
+        </p:txBody>
+      </p:sp>
+      <p:sp>
+        <p:nvSpPr>
+          <p:cNvPr id="504590066" name="Rounded Rectangle 16"/>
           <p:cNvSpPr/>
           <p:nvPr/>
         </p:nvSpPr>
-        <p:spPr>
+        <p:spPr bwMode="auto">
           <a:xfrm>
             <a:off x="5715000" y="2971800"/>
             <a:ext cx="2880360" cy="1188720"/>
           </a:xfrm>
           <a:prstGeom prst="roundRect">
-            <a:avLst/>
+            <a:avLst>
+              <a:gd name="adj" fmla="val 16667"/>
+            </a:avLst>
           </a:prstGeom>
           <a:solidFill>
             <a:srgbClr val="152437"/>
@@ -5087,17 +6698,20 @@
           <a:bodyPr rtlCol="0" anchor="ctr"/>
           <a:lstStyle/>
           <a:p>
-            <a:pPr algn="ctr"/>
-          </a:p>
-        </p:txBody>
-      </p:sp>
-      <p:sp>
-        <p:nvSpPr>
-          <p:cNvPr id="18" name="Rectangle 17"/>
+            <a:pPr algn="ctr">
+              <a:defRPr/>
+            </a:pPr>
+            <a:endParaRPr/>
+          </a:p>
+        </p:txBody>
+      </p:sp>
+      <p:sp>
+        <p:nvSpPr>
+          <p:cNvPr id="325282172" name="Rectangle 17"/>
           <p:cNvSpPr/>
           <p:nvPr/>
         </p:nvSpPr>
-        <p:spPr>
+        <p:spPr bwMode="auto">
           <a:xfrm>
             <a:off x="5715000" y="2971800"/>
             <a:ext cx="2880360" cy="384048"/>
@@ -5130,17 +6744,20 @@
           <a:bodyPr rtlCol="0" anchor="ctr"/>
           <a:lstStyle/>
           <a:p>
-            <a:pPr algn="ctr"/>
-          </a:p>
-        </p:txBody>
-      </p:sp>
-      <p:sp>
-        <p:nvSpPr>
-          <p:cNvPr id="19" name="Oval 18"/>
+            <a:pPr algn="ctr">
+              <a:defRPr/>
+            </a:pPr>
+            <a:endParaRPr/>
+          </a:p>
+        </p:txBody>
+      </p:sp>
+      <p:sp>
+        <p:nvSpPr>
+          <p:cNvPr id="1038564303" name="Oval 18"/>
           <p:cNvSpPr/>
           <p:nvPr/>
         </p:nvSpPr>
-        <p:spPr>
+        <p:spPr bwMode="auto">
           <a:xfrm>
             <a:off x="5833872" y="3118104"/>
             <a:ext cx="73152" cy="73152"/>
@@ -5173,17 +6790,20 @@
           <a:bodyPr rtlCol="0" anchor="ctr"/>
           <a:lstStyle/>
           <a:p>
-            <a:pPr algn="ctr"/>
-          </a:p>
-        </p:txBody>
-      </p:sp>
-      <p:sp>
-        <p:nvSpPr>
-          <p:cNvPr id="20" name="Oval 19"/>
+            <a:pPr algn="ctr">
+              <a:defRPr/>
+            </a:pPr>
+            <a:endParaRPr/>
+          </a:p>
+        </p:txBody>
+      </p:sp>
+      <p:sp>
+        <p:nvSpPr>
+          <p:cNvPr id="502827845" name="Oval 19"/>
           <p:cNvSpPr/>
           <p:nvPr/>
         </p:nvSpPr>
-        <p:spPr>
+        <p:spPr bwMode="auto">
           <a:xfrm>
             <a:off x="5998464" y="3118104"/>
             <a:ext cx="73152" cy="73152"/>
@@ -5216,17 +6836,20 @@
           <a:bodyPr rtlCol="0" anchor="ctr"/>
           <a:lstStyle/>
           <a:p>
-            <a:pPr algn="ctr"/>
-          </a:p>
-        </p:txBody>
-      </p:sp>
-      <p:sp>
-        <p:nvSpPr>
-          <p:cNvPr id="21" name="Oval 20"/>
+            <a:pPr algn="ctr">
+              <a:defRPr/>
+            </a:pPr>
+            <a:endParaRPr/>
+          </a:p>
+        </p:txBody>
+      </p:sp>
+      <p:sp>
+        <p:nvSpPr>
+          <p:cNvPr id="1674321676" name="Oval 20"/>
           <p:cNvSpPr/>
           <p:nvPr/>
         </p:nvSpPr>
-        <p:spPr>
+        <p:spPr bwMode="auto">
           <a:xfrm>
             <a:off x="6163056" y="3118104"/>
             <a:ext cx="73152" cy="73152"/>
@@ -5259,17 +6882,20 @@
           <a:bodyPr rtlCol="0" anchor="ctr"/>
           <a:lstStyle/>
           <a:p>
-            <a:pPr algn="ctr"/>
-          </a:p>
-        </p:txBody>
-      </p:sp>
-      <p:sp>
-        <p:nvSpPr>
-          <p:cNvPr id="22" name="TextBox 21"/>
+            <a:pPr algn="ctr">
+              <a:defRPr/>
+            </a:pPr>
+            <a:endParaRPr/>
+          </a:p>
+        </p:txBody>
+      </p:sp>
+      <p:sp>
+        <p:nvSpPr>
+          <p:cNvPr id="671925351" name="TextBox 21"/>
           <p:cNvSpPr txBox="1"/>
           <p:nvPr/>
         </p:nvSpPr>
-        <p:spPr>
+        <p:spPr bwMode="auto">
           <a:xfrm>
             <a:off x="6373368" y="3063240"/>
             <a:ext cx="2057400" cy="164592"/>
@@ -5280,7 +6906,7 @@
           <a:noFill/>
         </p:spPr>
         <p:txBody>
-          <a:bodyPr wrap="none" lIns="0" rIns="0" tIns="0" bIns="0">
+          <a:bodyPr wrap="none" lIns="0" tIns="0" rIns="0" bIns="0">
             <a:spAutoFit/>
           </a:bodyPr>
           <a:lstStyle/>
@@ -5294,18 +6920,20 @@
               </a:defRPr>
             </a:pPr>
             <a:r>
+              <a:rPr/>
               <a:t>файлы проекта</a:t>
             </a:r>
-          </a:p>
-        </p:txBody>
-      </p:sp>
-      <p:sp>
-        <p:nvSpPr>
-          <p:cNvPr id="23" name="TextBox 22"/>
+            <a:endParaRPr/>
+          </a:p>
+        </p:txBody>
+      </p:sp>
+      <p:sp>
+        <p:nvSpPr>
+          <p:cNvPr id="1089796103" name="TextBox 22"/>
           <p:cNvSpPr txBox="1"/>
           <p:nvPr/>
         </p:nvSpPr>
-        <p:spPr>
+        <p:spPr bwMode="auto">
           <a:xfrm>
             <a:off x="5879592" y="3474720"/>
             <a:ext cx="2587752" cy="594360"/>
@@ -5330,30 +6958,41 @@
               </a:defRPr>
             </a:pPr>
             <a:r>
+              <a:rPr/>
               <a:t>MainActivity.java</a:t>
             </a:r>
-            <a:br/>
-            <a:r>
+            <a:br>
+              <a:rPr/>
+            </a:br>
+            <a:r>
+              <a:rPr/>
               <a:t>SearchWebActivity.java</a:t>
             </a:r>
-            <a:br/>
-            <a:r>
+            <a:br>
+              <a:rPr/>
+            </a:br>
+            <a:r>
+              <a:rPr/>
               <a:t>activity_main.xml</a:t>
             </a:r>
-            <a:br/>
-            <a:r>
+            <a:br>
+              <a:rPr/>
+            </a:br>
+            <a:r>
+              <a:rPr/>
               <a:t>AndroidManifest.xml</a:t>
             </a:r>
-          </a:p>
-        </p:txBody>
-      </p:sp>
-      <p:sp>
-        <p:nvSpPr>
-          <p:cNvPr id="24" name="TextBox 23"/>
+            <a:endParaRPr/>
+          </a:p>
+        </p:txBody>
+      </p:sp>
+      <p:sp>
+        <p:nvSpPr>
+          <p:cNvPr id="521723392" name="TextBox 23"/>
           <p:cNvSpPr txBox="1"/>
           <p:nvPr/>
         </p:nvSpPr>
-        <p:spPr>
+        <p:spPr bwMode="auto">
           <a:xfrm>
             <a:off x="8119872" y="4764024"/>
             <a:ext cx="640080" cy="228600"/>
@@ -5364,7 +7003,7 @@
           <a:noFill/>
         </p:spPr>
         <p:txBody>
-          <a:bodyPr wrap="none" lIns="0" rIns="0" tIns="0" bIns="0">
+          <a:bodyPr wrap="none" lIns="0" tIns="0" rIns="0" bIns="0">
             <a:spAutoFit/>
           </a:bodyPr>
           <a:lstStyle/>
@@ -5378,8 +7017,10 @@
               </a:defRPr>
             </a:pPr>
             <a:r>
+              <a:rPr/>
               <a:t>3/10</a:t>
             </a:r>
+            <a:endParaRPr/>
           </a:p>
         </p:txBody>
       </p:sp>
@@ -5388,34 +7029,47 @@
   <p:clrMapOvr>
     <a:masterClrMapping/>
   </p:clrMapOvr>
+  <mc:AlternateContent xmlns:mc="http://schemas.openxmlformats.org/markup-compatibility/2006">
+    <mc:Choice xmlns:p159="http://schemas.microsoft.com/office/powerpoint/2015/09/main" xmlns:p14="http://schemas.microsoft.com/office/powerpoint/2010/main" Requires="p159">
+      <p:transition p14:dur="2000" advClick="1"/>
+    </mc:Choice>
+    <mc:Fallback>
+      <p:transition advClick="1"/>
+    </mc:Fallback>
+  </mc:AlternateContent>
 </p:sld>
 </file>
 
 <file path=ppt/slides/slide4.xml><?xml version="1.0" encoding="utf-8"?>
-<p:sld xmlns:a="http://schemas.openxmlformats.org/drawingml/2006/main" xmlns:p="http://schemas.openxmlformats.org/presentationml/2006/main" xmlns:r="http://schemas.openxmlformats.org/officeDocument/2006/relationships">
-  <p:cSld>
+<p:sld xmlns:a="http://schemas.openxmlformats.org/drawingml/2006/main" xmlns:r="http://schemas.openxmlformats.org/officeDocument/2006/relationships" xmlns:p="http://schemas.openxmlformats.org/presentationml/2006/main" xmlns:m="http://schemas.openxmlformats.org/officeDocument/2006/math" xmlns:w="http://schemas.openxmlformats.org/wordprocessingml/2006/main" xmlns:mc="http://schemas.openxmlformats.org/markup-compatibility/2006" showMasterPhAnim="0" showMasterSp="1" show="1">
+  <p:cSld name="">
     <p:spTree>
       <p:nvGrpSpPr>
         <p:cNvPr id="1" name=""/>
         <p:cNvGrpSpPr/>
         <p:nvPr/>
       </p:nvGrpSpPr>
-      <p:grpSpPr/>
+      <p:grpSpPr bwMode="auto">
+        <a:xfrm>
+          <a:off x="0" y="0"/>
+          <a:ext cx="0" cy="0"/>
+          <a:chOff x="0" y="0"/>
+          <a:chExt cx="0" cy="0"/>
+        </a:xfrm>
+      </p:grpSpPr>
       <p:pic>
         <p:nvPicPr>
-          <p:cNvPr id="2" name="Picture 1" descr="image1.jpeg"/>
+          <p:cNvPr id="1576000944" name="Picture 1" descr="image1.jpeg"/>
           <p:cNvPicPr>
             <a:picLocks noChangeAspect="1"/>
           </p:cNvPicPr>
           <p:nvPr/>
         </p:nvPicPr>
-        <p:blipFill>
-          <a:blip r:embed="rId2"/>
-          <a:stretch>
-            <a:fillRect/>
-          </a:stretch>
+        <p:blipFill rotWithShape="1">
+          <a:blip r:embed="rId3"/>
+          <a:stretch/>
         </p:blipFill>
-        <p:spPr>
+        <p:spPr bwMode="auto">
           <a:xfrm>
             <a:off x="0" y="0"/>
             <a:ext cx="9144000" cy="5143500"/>
@@ -5427,11 +7081,11 @@
       </p:pic>
       <p:sp>
         <p:nvSpPr>
-          <p:cNvPr id="3" name="TextBox 2"/>
+          <p:cNvPr id="1886007599" name="TextBox 2"/>
           <p:cNvSpPr txBox="1"/>
           <p:nvPr/>
         </p:nvSpPr>
-        <p:spPr>
+        <p:spPr bwMode="auto">
           <a:xfrm>
             <a:off x="640080" y="219456"/>
             <a:ext cx="7955279" cy="411480"/>
@@ -5442,7 +7096,7 @@
           <a:noFill/>
         </p:spPr>
         <p:txBody>
-          <a:bodyPr wrap="none" lIns="0" rIns="0" tIns="0" bIns="0">
+          <a:bodyPr wrap="none" lIns="0" tIns="0" rIns="0" bIns="0">
             <a:spAutoFit/>
           </a:bodyPr>
           <a:lstStyle/>
@@ -5456,21 +7110,23 @@
               </a:defRPr>
             </a:pPr>
             <a:r>
+              <a:rPr/>
               <a:t>Интерфейс приложения</a:t>
             </a:r>
-          </a:p>
-        </p:txBody>
-      </p:sp>
-      <p:sp>
-        <p:nvSpPr>
-          <p:cNvPr id="4" name="TextBox 3"/>
+            <a:endParaRPr/>
+          </a:p>
+        </p:txBody>
+      </p:sp>
+      <p:sp>
+        <p:nvSpPr>
+          <p:cNvPr id="1531766408" name="TextBox 3"/>
           <p:cNvSpPr txBox="1"/>
           <p:nvPr/>
         </p:nvSpPr>
-        <p:spPr>
+        <p:spPr bwMode="auto">
           <a:xfrm>
             <a:off x="658368" y="1097280"/>
-            <a:ext cx="4892040" cy="3474720"/>
+            <a:ext cx="4892039" cy="3474720"/>
           </a:xfrm>
           <a:prstGeom prst="rect">
             <a:avLst/>
@@ -5495,8 +7151,10 @@
               </a:defRPr>
             </a:pPr>
             <a:r>
+              <a:rPr/>
               <a:t>Верхняя часть: поле для ссылки или названия стихотворения.</a:t>
             </a:r>
+            <a:endParaRPr/>
           </a:p>
           <a:p>
             <a:pPr>
@@ -5511,8 +7169,10 @@
               </a:defRPr>
             </a:pPr>
             <a:r>
+              <a:rPr/>
               <a:t>Кнопка «Поиск» открывает два варианта: по ссылке и в интернете.</a:t>
             </a:r>
+            <a:endParaRPr/>
           </a:p>
           <a:p>
             <a:pPr>
@@ -5527,8 +7187,10 @@
               </a:defRPr>
             </a:pPr>
             <a:r>
+              <a:rPr/>
               <a:t>Основная область показывает правила, а затем текст стихотворения.</a:t>
             </a:r>
+            <a:endParaRPr/>
           </a:p>
           <a:p>
             <a:pPr>
@@ -5543,24 +7205,28 @@
               </a:defRPr>
             </a:pPr>
             <a:r>
+              <a:rPr/>
               <a:t>Кнопка «Действия» открывает проверку, следующий этап, сохранение и главный экран.</a:t>
             </a:r>
-          </a:p>
-        </p:txBody>
-      </p:sp>
-      <p:sp>
-        <p:nvSpPr>
-          <p:cNvPr id="5" name="Rounded Rectangle 4"/>
+            <a:endParaRPr/>
+          </a:p>
+        </p:txBody>
+      </p:sp>
+      <p:sp>
+        <p:nvSpPr>
+          <p:cNvPr id="414611611" name="Rounded Rectangle 4"/>
           <p:cNvSpPr/>
           <p:nvPr/>
         </p:nvSpPr>
-        <p:spPr>
+        <p:spPr bwMode="auto">
           <a:xfrm>
             <a:off x="5577840" y="1170432"/>
             <a:ext cx="3063240" cy="2788920"/>
           </a:xfrm>
           <a:prstGeom prst="roundRect">
-            <a:avLst/>
+            <a:avLst>
+              <a:gd name="adj" fmla="val 16667"/>
+            </a:avLst>
           </a:prstGeom>
           <a:solidFill>
             <a:srgbClr val="152437"/>
@@ -5589,17 +7255,20 @@
           <a:bodyPr rtlCol="0" anchor="ctr"/>
           <a:lstStyle/>
           <a:p>
-            <a:pPr algn="ctr"/>
-          </a:p>
-        </p:txBody>
-      </p:sp>
-      <p:sp>
-        <p:nvSpPr>
-          <p:cNvPr id="6" name="Rectangle 5"/>
+            <a:pPr algn="ctr">
+              <a:defRPr/>
+            </a:pPr>
+            <a:endParaRPr/>
+          </a:p>
+        </p:txBody>
+      </p:sp>
+      <p:sp>
+        <p:nvSpPr>
+          <p:cNvPr id="1446224967" name="Rectangle 5"/>
           <p:cNvSpPr/>
           <p:nvPr/>
         </p:nvSpPr>
-        <p:spPr>
+        <p:spPr bwMode="auto">
           <a:xfrm>
             <a:off x="5577840" y="1170432"/>
             <a:ext cx="3063240" cy="384048"/>
@@ -5632,17 +7301,20 @@
           <a:bodyPr rtlCol="0" anchor="ctr"/>
           <a:lstStyle/>
           <a:p>
-            <a:pPr algn="ctr"/>
-          </a:p>
-        </p:txBody>
-      </p:sp>
-      <p:sp>
-        <p:nvSpPr>
-          <p:cNvPr id="7" name="Oval 6"/>
+            <a:pPr algn="ctr">
+              <a:defRPr/>
+            </a:pPr>
+            <a:endParaRPr/>
+          </a:p>
+        </p:txBody>
+      </p:sp>
+      <p:sp>
+        <p:nvSpPr>
+          <p:cNvPr id="115602305" name="Oval 6"/>
           <p:cNvSpPr/>
           <p:nvPr/>
         </p:nvSpPr>
-        <p:spPr>
+        <p:spPr bwMode="auto">
           <a:xfrm>
             <a:off x="5696712" y="1316736"/>
             <a:ext cx="73152" cy="73152"/>
@@ -5675,17 +7347,20 @@
           <a:bodyPr rtlCol="0" anchor="ctr"/>
           <a:lstStyle/>
           <a:p>
-            <a:pPr algn="ctr"/>
-          </a:p>
-        </p:txBody>
-      </p:sp>
-      <p:sp>
-        <p:nvSpPr>
-          <p:cNvPr id="8" name="Oval 7"/>
+            <a:pPr algn="ctr">
+              <a:defRPr/>
+            </a:pPr>
+            <a:endParaRPr/>
+          </a:p>
+        </p:txBody>
+      </p:sp>
+      <p:sp>
+        <p:nvSpPr>
+          <p:cNvPr id="1722770555" name="Oval 7"/>
           <p:cNvSpPr/>
           <p:nvPr/>
         </p:nvSpPr>
-        <p:spPr>
+        <p:spPr bwMode="auto">
           <a:xfrm>
             <a:off x="5861303" y="1316736"/>
             <a:ext cx="73152" cy="73152"/>
@@ -5718,17 +7393,20 @@
           <a:bodyPr rtlCol="0" anchor="ctr"/>
           <a:lstStyle/>
           <a:p>
-            <a:pPr algn="ctr"/>
-          </a:p>
-        </p:txBody>
-      </p:sp>
-      <p:sp>
-        <p:nvSpPr>
-          <p:cNvPr id="9" name="Oval 8"/>
+            <a:pPr algn="ctr">
+              <a:defRPr/>
+            </a:pPr>
+            <a:endParaRPr/>
+          </a:p>
+        </p:txBody>
+      </p:sp>
+      <p:sp>
+        <p:nvSpPr>
+          <p:cNvPr id="677278460" name="Oval 8"/>
           <p:cNvSpPr/>
           <p:nvPr/>
         </p:nvSpPr>
-        <p:spPr>
+        <p:spPr bwMode="auto">
           <a:xfrm>
             <a:off x="6025896" y="1316736"/>
             <a:ext cx="73152" cy="73152"/>
@@ -5761,17 +7439,20 @@
           <a:bodyPr rtlCol="0" anchor="ctr"/>
           <a:lstStyle/>
           <a:p>
-            <a:pPr algn="ctr"/>
-          </a:p>
-        </p:txBody>
-      </p:sp>
-      <p:sp>
-        <p:nvSpPr>
-          <p:cNvPr id="10" name="TextBox 9"/>
+            <a:pPr algn="ctr">
+              <a:defRPr/>
+            </a:pPr>
+            <a:endParaRPr/>
+          </a:p>
+        </p:txBody>
+      </p:sp>
+      <p:sp>
+        <p:nvSpPr>
+          <p:cNvPr id="951122743" name="TextBox 9"/>
           <p:cNvSpPr txBox="1"/>
           <p:nvPr/>
         </p:nvSpPr>
-        <p:spPr>
+        <p:spPr bwMode="auto">
           <a:xfrm>
             <a:off x="6236207" y="1261872"/>
             <a:ext cx="2240280" cy="164592"/>
@@ -5782,7 +7463,7 @@
           <a:noFill/>
         </p:spPr>
         <p:txBody>
-          <a:bodyPr wrap="none" lIns="0" rIns="0" tIns="0" bIns="0">
+          <a:bodyPr wrap="none" lIns="0" tIns="0" rIns="0" bIns="0">
             <a:spAutoFit/>
           </a:bodyPr>
           <a:lstStyle/>
@@ -5796,18 +7477,20 @@
               </a:defRPr>
             </a:pPr>
             <a:r>
+              <a:rPr/>
               <a:t>activity_main.xml</a:t>
             </a:r>
-          </a:p>
-        </p:txBody>
-      </p:sp>
-      <p:sp>
-        <p:nvSpPr>
-          <p:cNvPr id="11" name="TextBox 10"/>
+            <a:endParaRPr/>
+          </a:p>
+        </p:txBody>
+      </p:sp>
+      <p:sp>
+        <p:nvSpPr>
+          <p:cNvPr id="1739735163" name="TextBox 10"/>
           <p:cNvSpPr txBox="1"/>
           <p:nvPr/>
         </p:nvSpPr>
-        <p:spPr>
+        <p:spPr bwMode="auto">
           <a:xfrm>
             <a:off x="5742431" y="1673352"/>
             <a:ext cx="2770632" cy="2194560"/>
@@ -5832,30 +7515,41 @@
               </a:defRPr>
             </a:pPr>
             <a:r>
+              <a:rPr/>
               <a:t>&lt;EditText</a:t>
             </a:r>
-            <a:br/>
-            <a:r>
+            <a:br>
+              <a:rPr/>
+            </a:br>
+            <a:r>
+              <a:rPr/>
               <a:t>    android:id="@+id/poemEditText"</a:t>
             </a:r>
-            <a:br/>
-            <a:r>
+            <a:br>
+              <a:rPr/>
+            </a:br>
+            <a:r>
+              <a:rPr/>
               <a:t>    android:inputType="textMultiLine"</a:t>
             </a:r>
-            <a:br/>
-            <a:r>
+            <a:br>
+              <a:rPr/>
+            </a:br>
+            <a:r>
+              <a:rPr/>
               <a:t>    android:imeOptions="flagNoExtractUi" /&gt;</a:t>
             </a:r>
-          </a:p>
-        </p:txBody>
-      </p:sp>
-      <p:sp>
-        <p:nvSpPr>
-          <p:cNvPr id="12" name="TextBox 11"/>
+            <a:endParaRPr/>
+          </a:p>
+        </p:txBody>
+      </p:sp>
+      <p:sp>
+        <p:nvSpPr>
+          <p:cNvPr id="1177563827" name="TextBox 11"/>
           <p:cNvSpPr txBox="1"/>
           <p:nvPr/>
         </p:nvSpPr>
-        <p:spPr>
+        <p:spPr bwMode="auto">
           <a:xfrm>
             <a:off x="8119872" y="4764024"/>
             <a:ext cx="640080" cy="228600"/>
@@ -5866,7 +7560,7 @@
           <a:noFill/>
         </p:spPr>
         <p:txBody>
-          <a:bodyPr wrap="none" lIns="0" rIns="0" tIns="0" bIns="0">
+          <a:bodyPr wrap="none" lIns="0" tIns="0" rIns="0" bIns="0">
             <a:spAutoFit/>
           </a:bodyPr>
           <a:lstStyle/>
@@ -5880,8 +7574,10 @@
               </a:defRPr>
             </a:pPr>
             <a:r>
+              <a:rPr/>
               <a:t>4/10</a:t>
             </a:r>
+            <a:endParaRPr/>
           </a:p>
         </p:txBody>
       </p:sp>
@@ -5890,34 +7586,47 @@
   <p:clrMapOvr>
     <a:masterClrMapping/>
   </p:clrMapOvr>
+  <mc:AlternateContent xmlns:mc="http://schemas.openxmlformats.org/markup-compatibility/2006">
+    <mc:Choice xmlns:p159="http://schemas.microsoft.com/office/powerpoint/2015/09/main" xmlns:p14="http://schemas.microsoft.com/office/powerpoint/2010/main" Requires="p159">
+      <p:transition p14:dur="2000" advClick="1"/>
+    </mc:Choice>
+    <mc:Fallback>
+      <p:transition advClick="1"/>
+    </mc:Fallback>
+  </mc:AlternateContent>
 </p:sld>
 </file>
 
 <file path=ppt/slides/slide5.xml><?xml version="1.0" encoding="utf-8"?>
-<p:sld xmlns:a="http://schemas.openxmlformats.org/drawingml/2006/main" xmlns:p="http://schemas.openxmlformats.org/presentationml/2006/main" xmlns:r="http://schemas.openxmlformats.org/officeDocument/2006/relationships">
-  <p:cSld>
+<p:sld xmlns:a="http://schemas.openxmlformats.org/drawingml/2006/main" xmlns:r="http://schemas.openxmlformats.org/officeDocument/2006/relationships" xmlns:p="http://schemas.openxmlformats.org/presentationml/2006/main" xmlns:m="http://schemas.openxmlformats.org/officeDocument/2006/math" xmlns:w="http://schemas.openxmlformats.org/wordprocessingml/2006/main" xmlns:mc="http://schemas.openxmlformats.org/markup-compatibility/2006" showMasterPhAnim="0" showMasterSp="1" show="1">
+  <p:cSld name="">
     <p:spTree>
       <p:nvGrpSpPr>
         <p:cNvPr id="1" name=""/>
         <p:cNvGrpSpPr/>
         <p:nvPr/>
       </p:nvGrpSpPr>
-      <p:grpSpPr/>
+      <p:grpSpPr bwMode="auto">
+        <a:xfrm>
+          <a:off x="0" y="0"/>
+          <a:ext cx="0" cy="0"/>
+          <a:chOff x="0" y="0"/>
+          <a:chExt cx="0" cy="0"/>
+        </a:xfrm>
+      </p:grpSpPr>
       <p:pic>
         <p:nvPicPr>
-          <p:cNvPr id="2" name="Picture 1" descr="image1.jpeg"/>
+          <p:cNvPr id="527754052" name="Picture 1" descr="image1.jpeg"/>
           <p:cNvPicPr>
             <a:picLocks noChangeAspect="1"/>
           </p:cNvPicPr>
           <p:nvPr/>
         </p:nvPicPr>
-        <p:blipFill>
-          <a:blip r:embed="rId2"/>
-          <a:stretch>
-            <a:fillRect/>
-          </a:stretch>
+        <p:blipFill rotWithShape="1">
+          <a:blip r:embed="rId3"/>
+          <a:stretch/>
         </p:blipFill>
-        <p:spPr>
+        <p:spPr bwMode="auto">
           <a:xfrm>
             <a:off x="0" y="0"/>
             <a:ext cx="9144000" cy="5143500"/>
@@ -5929,11 +7638,11 @@
       </p:pic>
       <p:sp>
         <p:nvSpPr>
-          <p:cNvPr id="3" name="TextBox 2"/>
+          <p:cNvPr id="687209163" name="TextBox 2"/>
           <p:cNvSpPr txBox="1"/>
           <p:nvPr/>
         </p:nvSpPr>
-        <p:spPr>
+        <p:spPr bwMode="auto">
           <a:xfrm>
             <a:off x="640080" y="219456"/>
             <a:ext cx="7955279" cy="411480"/>
@@ -5944,7 +7653,7 @@
           <a:noFill/>
         </p:spPr>
         <p:txBody>
-          <a:bodyPr wrap="none" lIns="0" rIns="0" tIns="0" bIns="0">
+          <a:bodyPr wrap="none" lIns="0" tIns="0" rIns="0" bIns="0">
             <a:spAutoFit/>
           </a:bodyPr>
           <a:lstStyle/>
@@ -5958,18 +7667,20 @@
               </a:defRPr>
             </a:pPr>
             <a:r>
+              <a:rPr/>
               <a:t>Поиск и загрузка текста</a:t>
             </a:r>
-          </a:p>
-        </p:txBody>
-      </p:sp>
-      <p:sp>
-        <p:nvSpPr>
-          <p:cNvPr id="4" name="TextBox 3"/>
+            <a:endParaRPr/>
+          </a:p>
+        </p:txBody>
+      </p:sp>
+      <p:sp>
+        <p:nvSpPr>
+          <p:cNvPr id="612410483" name="TextBox 3"/>
           <p:cNvSpPr txBox="1"/>
           <p:nvPr/>
         </p:nvSpPr>
-        <p:spPr>
+        <p:spPr bwMode="auto">
           <a:xfrm>
             <a:off x="658368" y="1207008"/>
             <a:ext cx="4846320" cy="3474720"/>
@@ -5997,8 +7708,10 @@
               </a:defRPr>
             </a:pPr>
             <a:r>
+              <a:rPr/>
               <a:t>Если пользователь вставляет ссылку ilibrary.ru или culture.ru, приложение грузит её напрямую.</a:t>
             </a:r>
+            <a:endParaRPr/>
           </a:p>
           <a:p>
             <a:pPr>
@@ -6013,8 +7726,10 @@
               </a:defRPr>
             </a:pPr>
             <a:r>
+              <a:rPr/>
               <a:t>Для других сайтов открывается встроенный WebView.</a:t>
             </a:r>
+            <a:endParaRPr/>
           </a:p>
           <a:p>
             <a:pPr>
@@ -6029,24 +7744,28 @@
               </a:defRPr>
             </a:pPr>
             <a:r>
+              <a:rPr/>
               <a:t>Внутри WebView можно выделить чистый текст стихотворения и вставить его обратно.</a:t>
             </a:r>
-          </a:p>
-        </p:txBody>
-      </p:sp>
-      <p:sp>
-        <p:nvSpPr>
-          <p:cNvPr id="5" name="Rounded Rectangle 4"/>
+            <a:endParaRPr/>
+          </a:p>
+        </p:txBody>
+      </p:sp>
+      <p:sp>
+        <p:nvSpPr>
+          <p:cNvPr id="535582304" name="Rounded Rectangle 4"/>
           <p:cNvSpPr/>
           <p:nvPr/>
         </p:nvSpPr>
-        <p:spPr>
+        <p:spPr bwMode="auto">
           <a:xfrm>
             <a:off x="5486400" y="1078992"/>
             <a:ext cx="3108960" cy="3474720"/>
           </a:xfrm>
           <a:prstGeom prst="roundRect">
-            <a:avLst/>
+            <a:avLst>
+              <a:gd name="adj" fmla="val 16667"/>
+            </a:avLst>
           </a:prstGeom>
           <a:solidFill>
             <a:srgbClr val="152437"/>
@@ -6075,17 +7794,20 @@
           <a:bodyPr rtlCol="0" anchor="ctr"/>
           <a:lstStyle/>
           <a:p>
-            <a:pPr algn="ctr"/>
-          </a:p>
-        </p:txBody>
-      </p:sp>
-      <p:sp>
-        <p:nvSpPr>
-          <p:cNvPr id="6" name="Rectangle 5"/>
+            <a:pPr algn="ctr">
+              <a:defRPr/>
+            </a:pPr>
+            <a:endParaRPr/>
+          </a:p>
+        </p:txBody>
+      </p:sp>
+      <p:sp>
+        <p:nvSpPr>
+          <p:cNvPr id="964027400" name="Rectangle 5"/>
           <p:cNvSpPr/>
           <p:nvPr/>
         </p:nvSpPr>
-        <p:spPr>
+        <p:spPr bwMode="auto">
           <a:xfrm>
             <a:off x="5486400" y="1078992"/>
             <a:ext cx="3108960" cy="384048"/>
@@ -6118,17 +7840,20 @@
           <a:bodyPr rtlCol="0" anchor="ctr"/>
           <a:lstStyle/>
           <a:p>
-            <a:pPr algn="ctr"/>
-          </a:p>
-        </p:txBody>
-      </p:sp>
-      <p:sp>
-        <p:nvSpPr>
-          <p:cNvPr id="7" name="Oval 6"/>
+            <a:pPr algn="ctr">
+              <a:defRPr/>
+            </a:pPr>
+            <a:endParaRPr/>
+          </a:p>
+        </p:txBody>
+      </p:sp>
+      <p:sp>
+        <p:nvSpPr>
+          <p:cNvPr id="1897496430" name="Oval 6"/>
           <p:cNvSpPr/>
           <p:nvPr/>
         </p:nvSpPr>
-        <p:spPr>
+        <p:spPr bwMode="auto">
           <a:xfrm>
             <a:off x="5605272" y="1225295"/>
             <a:ext cx="73152" cy="73152"/>
@@ -6161,17 +7886,20 @@
           <a:bodyPr rtlCol="0" anchor="ctr"/>
           <a:lstStyle/>
           <a:p>
-            <a:pPr algn="ctr"/>
-          </a:p>
-        </p:txBody>
-      </p:sp>
-      <p:sp>
-        <p:nvSpPr>
-          <p:cNvPr id="8" name="Oval 7"/>
+            <a:pPr algn="ctr">
+              <a:defRPr/>
+            </a:pPr>
+            <a:endParaRPr/>
+          </a:p>
+        </p:txBody>
+      </p:sp>
+      <p:sp>
+        <p:nvSpPr>
+          <p:cNvPr id="1585718680" name="Oval 7"/>
           <p:cNvSpPr/>
           <p:nvPr/>
         </p:nvSpPr>
-        <p:spPr>
+        <p:spPr bwMode="auto">
           <a:xfrm>
             <a:off x="5769864" y="1225295"/>
             <a:ext cx="73152" cy="73152"/>
@@ -6204,17 +7932,20 @@
           <a:bodyPr rtlCol="0" anchor="ctr"/>
           <a:lstStyle/>
           <a:p>
-            <a:pPr algn="ctr"/>
-          </a:p>
-        </p:txBody>
-      </p:sp>
-      <p:sp>
-        <p:nvSpPr>
-          <p:cNvPr id="9" name="Oval 8"/>
+            <a:pPr algn="ctr">
+              <a:defRPr/>
+            </a:pPr>
+            <a:endParaRPr/>
+          </a:p>
+        </p:txBody>
+      </p:sp>
+      <p:sp>
+        <p:nvSpPr>
+          <p:cNvPr id="1781574528" name="Oval 8"/>
           <p:cNvSpPr/>
           <p:nvPr/>
         </p:nvSpPr>
-        <p:spPr>
+        <p:spPr bwMode="auto">
           <a:xfrm>
             <a:off x="5934456" y="1225295"/>
             <a:ext cx="73152" cy="73152"/>
@@ -6247,17 +7978,20 @@
           <a:bodyPr rtlCol="0" anchor="ctr"/>
           <a:lstStyle/>
           <a:p>
-            <a:pPr algn="ctr"/>
-          </a:p>
-        </p:txBody>
-      </p:sp>
-      <p:sp>
-        <p:nvSpPr>
-          <p:cNvPr id="10" name="TextBox 9"/>
+            <a:pPr algn="ctr">
+              <a:defRPr/>
+            </a:pPr>
+            <a:endParaRPr/>
+          </a:p>
+        </p:txBody>
+      </p:sp>
+      <p:sp>
+        <p:nvSpPr>
+          <p:cNvPr id="1164338862" name="TextBox 9"/>
           <p:cNvSpPr txBox="1"/>
           <p:nvPr/>
         </p:nvSpPr>
-        <p:spPr>
+        <p:spPr bwMode="auto">
           <a:xfrm>
             <a:off x="6144768" y="1170432"/>
             <a:ext cx="2286000" cy="164592"/>
@@ -6268,7 +8002,7 @@
           <a:noFill/>
         </p:spPr>
         <p:txBody>
-          <a:bodyPr wrap="none" lIns="0" rIns="0" tIns="0" bIns="0">
+          <a:bodyPr wrap="none" lIns="0" tIns="0" rIns="0" bIns="0">
             <a:spAutoFit/>
           </a:bodyPr>
           <a:lstStyle/>
@@ -6282,18 +8016,20 @@
               </a:defRPr>
             </a:pPr>
             <a:r>
+              <a:rPr/>
               <a:t>обработка ссылки</a:t>
             </a:r>
-          </a:p>
-        </p:txBody>
-      </p:sp>
-      <p:sp>
-        <p:nvSpPr>
-          <p:cNvPr id="11" name="TextBox 10"/>
+            <a:endParaRPr/>
+          </a:p>
+        </p:txBody>
+      </p:sp>
+      <p:sp>
+        <p:nvSpPr>
+          <p:cNvPr id="975519215" name="TextBox 10"/>
           <p:cNvSpPr txBox="1"/>
           <p:nvPr/>
         </p:nvSpPr>
-        <p:spPr>
+        <p:spPr bwMode="auto">
           <a:xfrm>
             <a:off x="5650992" y="1581912"/>
             <a:ext cx="2816352" cy="2880360"/>
@@ -6318,43 +8054,65 @@
               </a:defRPr>
             </a:pPr>
             <a:r>
+              <a:rPr/>
               <a:t>if (isSupportedPoemUrl(url)) {</a:t>
             </a:r>
-            <a:br/>
-            <a:r>
+            <a:br>
+              <a:rPr/>
+            </a:br>
+            <a:r>
+              <a:rPr/>
               <a:t>    downloadPoemFromInternet(url);</a:t>
             </a:r>
-            <a:br/>
-            <a:r>
+            <a:br>
+              <a:rPr/>
+            </a:br>
+            <a:r>
+              <a:rPr/>
               <a:t>} else {</a:t>
             </a:r>
-            <a:br/>
-            <a:r>
+            <a:br>
+              <a:rPr/>
+            </a:br>
+            <a:r>
+              <a:rPr/>
               <a:t>    openWebSearchWithQuery(url);</a:t>
             </a:r>
-            <a:br/>
-            <a:r>
+            <a:br>
+              <a:rPr/>
+            </a:br>
+            <a:r>
+              <a:rPr/>
               <a:t>}</a:t>
             </a:r>
-            <a:br/>
-            <a:br/>
-            <a:r>
+            <a:br>
+              <a:rPr/>
+            </a:br>
+            <a:br>
+              <a:rPr/>
+            </a:br>
+            <a:r>
+              <a:rPr/>
               <a:t>startActivityForResult(intent,</a:t>
             </a:r>
-            <a:br/>
-            <a:r>
+            <a:br>
+              <a:rPr/>
+            </a:br>
+            <a:r>
+              <a:rPr/>
               <a:t>        REQUEST_WEB_SEARCH);</a:t>
             </a:r>
-          </a:p>
-        </p:txBody>
-      </p:sp>
-      <p:sp>
-        <p:nvSpPr>
-          <p:cNvPr id="12" name="TextBox 11"/>
+            <a:endParaRPr/>
+          </a:p>
+        </p:txBody>
+      </p:sp>
+      <p:sp>
+        <p:nvSpPr>
+          <p:cNvPr id="1773523944" name="TextBox 11"/>
           <p:cNvSpPr txBox="1"/>
           <p:nvPr/>
         </p:nvSpPr>
-        <p:spPr>
+        <p:spPr bwMode="auto">
           <a:xfrm>
             <a:off x="8119872" y="4764024"/>
             <a:ext cx="640080" cy="228600"/>
@@ -6365,7 +8123,7 @@
           <a:noFill/>
         </p:spPr>
         <p:txBody>
-          <a:bodyPr wrap="none" lIns="0" rIns="0" tIns="0" bIns="0">
+          <a:bodyPr wrap="none" lIns="0" tIns="0" rIns="0" bIns="0">
             <a:spAutoFit/>
           </a:bodyPr>
           <a:lstStyle/>
@@ -6379,8 +8137,10 @@
               </a:defRPr>
             </a:pPr>
             <a:r>
+              <a:rPr/>
               <a:t>5/10</a:t>
             </a:r>
+            <a:endParaRPr/>
           </a:p>
         </p:txBody>
       </p:sp>
@@ -6389,34 +8149,47 @@
   <p:clrMapOvr>
     <a:masterClrMapping/>
   </p:clrMapOvr>
+  <mc:AlternateContent xmlns:mc="http://schemas.openxmlformats.org/markup-compatibility/2006">
+    <mc:Choice xmlns:p159="http://schemas.microsoft.com/office/powerpoint/2015/09/main" xmlns:p14="http://schemas.microsoft.com/office/powerpoint/2010/main" Requires="p159">
+      <p:transition p14:dur="2000" advClick="1"/>
+    </mc:Choice>
+    <mc:Fallback>
+      <p:transition advClick="1"/>
+    </mc:Fallback>
+  </mc:AlternateContent>
 </p:sld>
 </file>
 
 <file path=ppt/slides/slide6.xml><?xml version="1.0" encoding="utf-8"?>
-<p:sld xmlns:a="http://schemas.openxmlformats.org/drawingml/2006/main" xmlns:p="http://schemas.openxmlformats.org/presentationml/2006/main" xmlns:r="http://schemas.openxmlformats.org/officeDocument/2006/relationships">
-  <p:cSld>
+<p:sld xmlns:a="http://schemas.openxmlformats.org/drawingml/2006/main" xmlns:r="http://schemas.openxmlformats.org/officeDocument/2006/relationships" xmlns:p="http://schemas.openxmlformats.org/presentationml/2006/main" xmlns:m="http://schemas.openxmlformats.org/officeDocument/2006/math" xmlns:w="http://schemas.openxmlformats.org/wordprocessingml/2006/main" xmlns:mc="http://schemas.openxmlformats.org/markup-compatibility/2006" showMasterPhAnim="0" showMasterSp="1" show="1">
+  <p:cSld name="">
     <p:spTree>
       <p:nvGrpSpPr>
         <p:cNvPr id="1" name=""/>
         <p:cNvGrpSpPr/>
         <p:nvPr/>
       </p:nvGrpSpPr>
-      <p:grpSpPr/>
+      <p:grpSpPr bwMode="auto">
+        <a:xfrm>
+          <a:off x="0" y="0"/>
+          <a:ext cx="0" cy="0"/>
+          <a:chOff x="0" y="0"/>
+          <a:chExt cx="0" cy="0"/>
+        </a:xfrm>
+      </p:grpSpPr>
       <p:pic>
         <p:nvPicPr>
-          <p:cNvPr id="2" name="Picture 1" descr="image1.jpeg"/>
+          <p:cNvPr id="650017878" name="Picture 1" descr="image1.jpeg"/>
           <p:cNvPicPr>
             <a:picLocks noChangeAspect="1"/>
           </p:cNvPicPr>
           <p:nvPr/>
         </p:nvPicPr>
-        <p:blipFill>
-          <a:blip r:embed="rId2"/>
-          <a:stretch>
-            <a:fillRect/>
-          </a:stretch>
+        <p:blipFill rotWithShape="1">
+          <a:blip r:embed="rId3"/>
+          <a:stretch/>
         </p:blipFill>
-        <p:spPr>
+        <p:spPr bwMode="auto">
           <a:xfrm>
             <a:off x="0" y="0"/>
             <a:ext cx="9144000" cy="5143500"/>
@@ -6428,11 +8201,11 @@
       </p:pic>
       <p:sp>
         <p:nvSpPr>
-          <p:cNvPr id="3" name="TextBox 2"/>
+          <p:cNvPr id="125727028" name="TextBox 2"/>
           <p:cNvSpPr txBox="1"/>
           <p:nvPr/>
         </p:nvSpPr>
-        <p:spPr>
+        <p:spPr bwMode="auto">
           <a:xfrm>
             <a:off x="640080" y="219456"/>
             <a:ext cx="7955279" cy="411480"/>
@@ -6443,7 +8216,7 @@
           <a:noFill/>
         </p:spPr>
         <p:txBody>
-          <a:bodyPr wrap="none" lIns="0" rIns="0" tIns="0" bIns="0">
+          <a:bodyPr wrap="none" lIns="0" tIns="0" rIns="0" bIns="0">
             <a:spAutoFit/>
           </a:bodyPr>
           <a:lstStyle/>
@@ -6457,18 +8230,20 @@
               </a:defRPr>
             </a:pPr>
             <a:r>
+              <a:rPr/>
               <a:t>Встроенный WebView</a:t>
             </a:r>
-          </a:p>
-        </p:txBody>
-      </p:sp>
-      <p:sp>
-        <p:nvSpPr>
-          <p:cNvPr id="4" name="TextBox 3"/>
+            <a:endParaRPr/>
+          </a:p>
+        </p:txBody>
+      </p:sp>
+      <p:sp>
+        <p:nvSpPr>
+          <p:cNvPr id="243681450" name="TextBox 3"/>
           <p:cNvSpPr txBox="1"/>
           <p:nvPr/>
         </p:nvSpPr>
-        <p:spPr>
+        <p:spPr bwMode="auto">
           <a:xfrm>
             <a:off x="658368" y="1207008"/>
             <a:ext cx="4846320" cy="3474720"/>
@@ -6496,8 +8271,10 @@
               </a:defRPr>
             </a:pPr>
             <a:r>
+              <a:rPr/>
               <a:t>SearchWebActivity работает как мини-браузер внутри приложения.</a:t>
             </a:r>
+            <a:endParaRPr/>
           </a:p>
           <a:p>
             <a:pPr>
@@ -6512,8 +8289,10 @@
               </a:defRPr>
             </a:pPr>
             <a:r>
+              <a:rPr/>
               <a:t>После открытия сайта пользователь нажимает «Вставить текст страницы».</a:t>
             </a:r>
+            <a:endParaRPr/>
           </a:p>
           <a:p>
             <a:pPr>
@@ -6528,24 +8307,28 @@
               </a:defRPr>
             </a:pPr>
             <a:r>
+              <a:rPr/>
               <a:t>Для точности лучше выделить только текст стихотворения на сайте.</a:t>
             </a:r>
-          </a:p>
-        </p:txBody>
-      </p:sp>
-      <p:sp>
-        <p:nvSpPr>
-          <p:cNvPr id="5" name="Rounded Rectangle 4"/>
+            <a:endParaRPr/>
+          </a:p>
+        </p:txBody>
+      </p:sp>
+      <p:sp>
+        <p:nvSpPr>
+          <p:cNvPr id="1062185287" name="Rounded Rectangle 4"/>
           <p:cNvSpPr/>
           <p:nvPr/>
         </p:nvSpPr>
-        <p:spPr>
+        <p:spPr bwMode="auto">
           <a:xfrm>
             <a:off x="5486400" y="1078992"/>
             <a:ext cx="3108960" cy="3474720"/>
           </a:xfrm>
           <a:prstGeom prst="roundRect">
-            <a:avLst/>
+            <a:avLst>
+              <a:gd name="adj" fmla="val 16667"/>
+            </a:avLst>
           </a:prstGeom>
           <a:solidFill>
             <a:srgbClr val="152437"/>
@@ -6574,17 +8357,20 @@
           <a:bodyPr rtlCol="0" anchor="ctr"/>
           <a:lstStyle/>
           <a:p>
-            <a:pPr algn="ctr"/>
-          </a:p>
-        </p:txBody>
-      </p:sp>
-      <p:sp>
-        <p:nvSpPr>
-          <p:cNvPr id="6" name="Rectangle 5"/>
+            <a:pPr algn="ctr">
+              <a:defRPr/>
+            </a:pPr>
+            <a:endParaRPr/>
+          </a:p>
+        </p:txBody>
+      </p:sp>
+      <p:sp>
+        <p:nvSpPr>
+          <p:cNvPr id="1306855573" name="Rectangle 5"/>
           <p:cNvSpPr/>
           <p:nvPr/>
         </p:nvSpPr>
-        <p:spPr>
+        <p:spPr bwMode="auto">
           <a:xfrm>
             <a:off x="5486400" y="1078992"/>
             <a:ext cx="3108960" cy="384048"/>
@@ -6617,17 +8403,20 @@
           <a:bodyPr rtlCol="0" anchor="ctr"/>
           <a:lstStyle/>
           <a:p>
-            <a:pPr algn="ctr"/>
-          </a:p>
-        </p:txBody>
-      </p:sp>
-      <p:sp>
-        <p:nvSpPr>
-          <p:cNvPr id="7" name="Oval 6"/>
+            <a:pPr algn="ctr">
+              <a:defRPr/>
+            </a:pPr>
+            <a:endParaRPr/>
+          </a:p>
+        </p:txBody>
+      </p:sp>
+      <p:sp>
+        <p:nvSpPr>
+          <p:cNvPr id="1843971651" name="Oval 6"/>
           <p:cNvSpPr/>
           <p:nvPr/>
         </p:nvSpPr>
-        <p:spPr>
+        <p:spPr bwMode="auto">
           <a:xfrm>
             <a:off x="5605272" y="1225295"/>
             <a:ext cx="73152" cy="73152"/>
@@ -6660,17 +8449,20 @@
           <a:bodyPr rtlCol="0" anchor="ctr"/>
           <a:lstStyle/>
           <a:p>
-            <a:pPr algn="ctr"/>
-          </a:p>
-        </p:txBody>
-      </p:sp>
-      <p:sp>
-        <p:nvSpPr>
-          <p:cNvPr id="8" name="Oval 7"/>
+            <a:pPr algn="ctr">
+              <a:defRPr/>
+            </a:pPr>
+            <a:endParaRPr/>
+          </a:p>
+        </p:txBody>
+      </p:sp>
+      <p:sp>
+        <p:nvSpPr>
+          <p:cNvPr id="1316563643" name="Oval 7"/>
           <p:cNvSpPr/>
           <p:nvPr/>
         </p:nvSpPr>
-        <p:spPr>
+        <p:spPr bwMode="auto">
           <a:xfrm>
             <a:off x="5769864" y="1225295"/>
             <a:ext cx="73152" cy="73152"/>
@@ -6703,17 +8495,20 @@
           <a:bodyPr rtlCol="0" anchor="ctr"/>
           <a:lstStyle/>
           <a:p>
-            <a:pPr algn="ctr"/>
-          </a:p>
-        </p:txBody>
-      </p:sp>
-      <p:sp>
-        <p:nvSpPr>
-          <p:cNvPr id="9" name="Oval 8"/>
+            <a:pPr algn="ctr">
+              <a:defRPr/>
+            </a:pPr>
+            <a:endParaRPr/>
+          </a:p>
+        </p:txBody>
+      </p:sp>
+      <p:sp>
+        <p:nvSpPr>
+          <p:cNvPr id="2102078230" name="Oval 8"/>
           <p:cNvSpPr/>
           <p:nvPr/>
         </p:nvSpPr>
-        <p:spPr>
+        <p:spPr bwMode="auto">
           <a:xfrm>
             <a:off x="5934456" y="1225295"/>
             <a:ext cx="73152" cy="73152"/>
@@ -6746,17 +8541,20 @@
           <a:bodyPr rtlCol="0" anchor="ctr"/>
           <a:lstStyle/>
           <a:p>
-            <a:pPr algn="ctr"/>
-          </a:p>
-        </p:txBody>
-      </p:sp>
-      <p:sp>
-        <p:nvSpPr>
-          <p:cNvPr id="10" name="TextBox 9"/>
+            <a:pPr algn="ctr">
+              <a:defRPr/>
+            </a:pPr>
+            <a:endParaRPr/>
+          </a:p>
+        </p:txBody>
+      </p:sp>
+      <p:sp>
+        <p:nvSpPr>
+          <p:cNvPr id="1617733815" name="TextBox 9"/>
           <p:cNvSpPr txBox="1"/>
           <p:nvPr/>
         </p:nvSpPr>
-        <p:spPr>
+        <p:spPr bwMode="auto">
           <a:xfrm>
             <a:off x="6144768" y="1170432"/>
             <a:ext cx="2286000" cy="164592"/>
@@ -6767,7 +8565,7 @@
           <a:noFill/>
         </p:spPr>
         <p:txBody>
-          <a:bodyPr wrap="none" lIns="0" rIns="0" tIns="0" bIns="0">
+          <a:bodyPr wrap="none" lIns="0" tIns="0" rIns="0" bIns="0">
             <a:spAutoFit/>
           </a:bodyPr>
           <a:lstStyle/>
@@ -6781,18 +8579,20 @@
               </a:defRPr>
             </a:pPr>
             <a:r>
+              <a:rPr/>
               <a:t>SearchWebActivity.java</a:t>
             </a:r>
-          </a:p>
-        </p:txBody>
-      </p:sp>
-      <p:sp>
-        <p:nvSpPr>
-          <p:cNvPr id="11" name="TextBox 10"/>
+            <a:endParaRPr/>
+          </a:p>
+        </p:txBody>
+      </p:sp>
+      <p:sp>
+        <p:nvSpPr>
+          <p:cNvPr id="686764225" name="TextBox 10"/>
           <p:cNvSpPr txBox="1"/>
           <p:nvPr/>
         </p:nvSpPr>
-        <p:spPr>
+        <p:spPr bwMode="auto">
           <a:xfrm>
             <a:off x="5650992" y="1581912"/>
             <a:ext cx="2816352" cy="2880360"/>
@@ -6817,36 +8617,54 @@
               </a:defRPr>
             </a:pPr>
             <a:r>
+              <a:rPr/>
               <a:t>var selected = window.getSelection().toString();</a:t>
             </a:r>
-            <a:br/>
-            <a:br/>
-            <a:r>
+            <a:br>
+              <a:rPr/>
+            </a:br>
+            <a:br>
+              <a:rPr/>
+            </a:br>
+            <a:r>
+              <a:rPr/>
               <a:t>if (selected.trim().length &gt; 20) {</a:t>
             </a:r>
-            <a:br/>
-            <a:r>
+            <a:br>
+              <a:rPr/>
+            </a:br>
+            <a:r>
+              <a:rPr/>
               <a:t>    PageTextBridge.setText(selected);</a:t>
             </a:r>
-            <a:br/>
-            <a:r>
+            <a:br>
+              <a:rPr/>
+            </a:br>
+            <a:r>
+              <a:rPr/>
               <a:t>}</a:t>
             </a:r>
-            <a:br/>
-            <a:br/>
-            <a:r>
+            <a:br>
+              <a:rPr/>
+            </a:br>
+            <a:br>
+              <a:rPr/>
+            </a:br>
+            <a:r>
+              <a:rPr/>
               <a:t>webView.loadUrl(searchUrl);</a:t>
             </a:r>
-          </a:p>
-        </p:txBody>
-      </p:sp>
-      <p:sp>
-        <p:nvSpPr>
-          <p:cNvPr id="12" name="TextBox 11"/>
+            <a:endParaRPr/>
+          </a:p>
+        </p:txBody>
+      </p:sp>
+      <p:sp>
+        <p:nvSpPr>
+          <p:cNvPr id="1256703690" name="TextBox 11"/>
           <p:cNvSpPr txBox="1"/>
           <p:nvPr/>
         </p:nvSpPr>
-        <p:spPr>
+        <p:spPr bwMode="auto">
           <a:xfrm>
             <a:off x="8119872" y="4764024"/>
             <a:ext cx="640080" cy="228600"/>
@@ -6857,7 +8675,7 @@
           <a:noFill/>
         </p:spPr>
         <p:txBody>
-          <a:bodyPr wrap="none" lIns="0" rIns="0" tIns="0" bIns="0">
+          <a:bodyPr wrap="none" lIns="0" tIns="0" rIns="0" bIns="0">
             <a:spAutoFit/>
           </a:bodyPr>
           <a:lstStyle/>
@@ -6871,8 +8689,10 @@
               </a:defRPr>
             </a:pPr>
             <a:r>
+              <a:rPr/>
               <a:t>6/10</a:t>
             </a:r>
+            <a:endParaRPr/>
           </a:p>
         </p:txBody>
       </p:sp>
@@ -6881,34 +8701,47 @@
   <p:clrMapOvr>
     <a:masterClrMapping/>
   </p:clrMapOvr>
+  <mc:AlternateContent xmlns:mc="http://schemas.openxmlformats.org/markup-compatibility/2006">
+    <mc:Choice xmlns:p159="http://schemas.microsoft.com/office/powerpoint/2015/09/main" xmlns:p14="http://schemas.microsoft.com/office/powerpoint/2010/main" Requires="p159">
+      <p:transition p14:dur="2000" advClick="1"/>
+    </mc:Choice>
+    <mc:Fallback>
+      <p:transition advClick="1"/>
+    </mc:Fallback>
+  </mc:AlternateContent>
 </p:sld>
 </file>
 
 <file path=ppt/slides/slide7.xml><?xml version="1.0" encoding="utf-8"?>
-<p:sld xmlns:a="http://schemas.openxmlformats.org/drawingml/2006/main" xmlns:p="http://schemas.openxmlformats.org/presentationml/2006/main" xmlns:r="http://schemas.openxmlformats.org/officeDocument/2006/relationships">
-  <p:cSld>
+<p:sld xmlns:a="http://schemas.openxmlformats.org/drawingml/2006/main" xmlns:r="http://schemas.openxmlformats.org/officeDocument/2006/relationships" xmlns:p="http://schemas.openxmlformats.org/presentationml/2006/main" xmlns:m="http://schemas.openxmlformats.org/officeDocument/2006/math" xmlns:w="http://schemas.openxmlformats.org/wordprocessingml/2006/main" xmlns:mc="http://schemas.openxmlformats.org/markup-compatibility/2006" showMasterPhAnim="0" showMasterSp="1" show="1">
+  <p:cSld name="">
     <p:spTree>
       <p:nvGrpSpPr>
         <p:cNvPr id="1" name=""/>
         <p:cNvGrpSpPr/>
         <p:nvPr/>
       </p:nvGrpSpPr>
-      <p:grpSpPr/>
+      <p:grpSpPr bwMode="auto">
+        <a:xfrm>
+          <a:off x="0" y="0"/>
+          <a:ext cx="0" cy="0"/>
+          <a:chOff x="0" y="0"/>
+          <a:chExt cx="0" cy="0"/>
+        </a:xfrm>
+      </p:grpSpPr>
       <p:pic>
         <p:nvPicPr>
-          <p:cNvPr id="2" name="Picture 1" descr="image1.jpeg"/>
+          <p:cNvPr id="1000570192" name="Picture 1" descr="image1.jpeg"/>
           <p:cNvPicPr>
             <a:picLocks noChangeAspect="1"/>
           </p:cNvPicPr>
           <p:nvPr/>
         </p:nvPicPr>
-        <p:blipFill>
-          <a:blip r:embed="rId2"/>
-          <a:stretch>
-            <a:fillRect/>
-          </a:stretch>
+        <p:blipFill rotWithShape="1">
+          <a:blip r:embed="rId3"/>
+          <a:stretch/>
         </p:blipFill>
-        <p:spPr>
+        <p:spPr bwMode="auto">
           <a:xfrm>
             <a:off x="0" y="0"/>
             <a:ext cx="9144000" cy="5143500"/>
@@ -6920,11 +8753,11 @@
       </p:pic>
       <p:sp>
         <p:nvSpPr>
-          <p:cNvPr id="3" name="TextBox 2"/>
+          <p:cNvPr id="1949703386" name="TextBox 2"/>
           <p:cNvSpPr txBox="1"/>
           <p:nvPr/>
         </p:nvSpPr>
-        <p:spPr>
+        <p:spPr bwMode="auto">
           <a:xfrm>
             <a:off x="640080" y="219456"/>
             <a:ext cx="7955279" cy="411480"/>
@@ -6935,7 +8768,7 @@
           <a:noFill/>
         </p:spPr>
         <p:txBody>
-          <a:bodyPr wrap="none" lIns="0" rIns="0" tIns="0" bIns="0">
+          <a:bodyPr wrap="none" lIns="0" tIns="0" rIns="0" bIns="0">
             <a:spAutoFit/>
           </a:bodyPr>
           <a:lstStyle/>
@@ -6949,18 +8782,20 @@
               </a:defRPr>
             </a:pPr>
             <a:r>
+              <a:rPr/>
               <a:t>Алгоритм скрытия слов</a:t>
             </a:r>
-          </a:p>
-        </p:txBody>
-      </p:sp>
-      <p:sp>
-        <p:nvSpPr>
-          <p:cNvPr id="4" name="TextBox 3"/>
+            <a:endParaRPr/>
+          </a:p>
+        </p:txBody>
+      </p:sp>
+      <p:sp>
+        <p:nvSpPr>
+          <p:cNvPr id="1906824065" name="TextBox 3"/>
           <p:cNvSpPr txBox="1"/>
           <p:nvPr/>
         </p:nvSpPr>
-        <p:spPr>
+        <p:spPr bwMode="auto">
           <a:xfrm>
             <a:off x="658368" y="1143000"/>
             <a:ext cx="4846320" cy="3474720"/>
@@ -6988,8 +8823,10 @@
               </a:defRPr>
             </a:pPr>
             <a:r>
+              <a:rPr/>
               <a:t>Текст разбивается на слова и разделители.</a:t>
             </a:r>
+            <a:endParaRPr/>
           </a:p>
           <a:p>
             <a:pPr>
@@ -7004,8 +8841,10 @@
               </a:defRPr>
             </a:pPr>
             <a:r>
+              <a:rPr/>
               <a:t>Порядок скрытия перемешивается случайно.</a:t>
             </a:r>
+            <a:endParaRPr/>
           </a:p>
           <a:p>
             <a:pPr>
@@ -7020,8 +8859,10 @@
               </a:defRPr>
             </a:pPr>
             <a:r>
+              <a:rPr/>
               <a:t>На каждом этапе скрывается всё больше слов: сначала около 10%, затем больше.</a:t>
             </a:r>
+            <a:endParaRPr/>
           </a:p>
           <a:p>
             <a:pPr>
@@ -7036,24 +8877,28 @@
               </a:defRPr>
             </a:pPr>
             <a:r>
+              <a:rPr/>
               <a:t>Ответы пользователя сохраняются, чтобы не терялись при повторной проверке.</a:t>
             </a:r>
-          </a:p>
-        </p:txBody>
-      </p:sp>
-      <p:sp>
-        <p:nvSpPr>
-          <p:cNvPr id="5" name="Rounded Rectangle 4"/>
+            <a:endParaRPr/>
+          </a:p>
+        </p:txBody>
+      </p:sp>
+      <p:sp>
+        <p:nvSpPr>
+          <p:cNvPr id="335094908" name="Rounded Rectangle 4"/>
           <p:cNvSpPr/>
           <p:nvPr/>
         </p:nvSpPr>
-        <p:spPr>
+        <p:spPr bwMode="auto">
           <a:xfrm>
             <a:off x="5486400" y="1042415"/>
             <a:ext cx="3154680" cy="3611880"/>
           </a:xfrm>
           <a:prstGeom prst="roundRect">
-            <a:avLst/>
+            <a:avLst>
+              <a:gd name="adj" fmla="val 16667"/>
+            </a:avLst>
           </a:prstGeom>
           <a:solidFill>
             <a:srgbClr val="152437"/>
@@ -7082,17 +8927,20 @@
           <a:bodyPr rtlCol="0" anchor="ctr"/>
           <a:lstStyle/>
           <a:p>
-            <a:pPr algn="ctr"/>
-          </a:p>
-        </p:txBody>
-      </p:sp>
-      <p:sp>
-        <p:nvSpPr>
-          <p:cNvPr id="6" name="Rectangle 5"/>
+            <a:pPr algn="ctr">
+              <a:defRPr/>
+            </a:pPr>
+            <a:endParaRPr/>
+          </a:p>
+        </p:txBody>
+      </p:sp>
+      <p:sp>
+        <p:nvSpPr>
+          <p:cNvPr id="709179094" name="Rectangle 5"/>
           <p:cNvSpPr/>
           <p:nvPr/>
         </p:nvSpPr>
-        <p:spPr>
+        <p:spPr bwMode="auto">
           <a:xfrm>
             <a:off x="5486400" y="1042415"/>
             <a:ext cx="3154680" cy="384048"/>
@@ -7125,17 +8973,20 @@
           <a:bodyPr rtlCol="0" anchor="ctr"/>
           <a:lstStyle/>
           <a:p>
-            <a:pPr algn="ctr"/>
-          </a:p>
-        </p:txBody>
-      </p:sp>
-      <p:sp>
-        <p:nvSpPr>
-          <p:cNvPr id="7" name="Oval 6"/>
+            <a:pPr algn="ctr">
+              <a:defRPr/>
+            </a:pPr>
+            <a:endParaRPr/>
+          </a:p>
+        </p:txBody>
+      </p:sp>
+      <p:sp>
+        <p:nvSpPr>
+          <p:cNvPr id="953461910" name="Oval 6"/>
           <p:cNvSpPr/>
           <p:nvPr/>
         </p:nvSpPr>
-        <p:spPr>
+        <p:spPr bwMode="auto">
           <a:xfrm>
             <a:off x="5605272" y="1188719"/>
             <a:ext cx="73152" cy="73152"/>
@@ -7168,17 +9019,20 @@
           <a:bodyPr rtlCol="0" anchor="ctr"/>
           <a:lstStyle/>
           <a:p>
-            <a:pPr algn="ctr"/>
-          </a:p>
-        </p:txBody>
-      </p:sp>
-      <p:sp>
-        <p:nvSpPr>
-          <p:cNvPr id="8" name="Oval 7"/>
+            <a:pPr algn="ctr">
+              <a:defRPr/>
+            </a:pPr>
+            <a:endParaRPr/>
+          </a:p>
+        </p:txBody>
+      </p:sp>
+      <p:sp>
+        <p:nvSpPr>
+          <p:cNvPr id="1577409697" name="Oval 7"/>
           <p:cNvSpPr/>
           <p:nvPr/>
         </p:nvSpPr>
-        <p:spPr>
+        <p:spPr bwMode="auto">
           <a:xfrm>
             <a:off x="5769864" y="1188719"/>
             <a:ext cx="73152" cy="73152"/>
@@ -7211,17 +9065,20 @@
           <a:bodyPr rtlCol="0" anchor="ctr"/>
           <a:lstStyle/>
           <a:p>
-            <a:pPr algn="ctr"/>
-          </a:p>
-        </p:txBody>
-      </p:sp>
-      <p:sp>
-        <p:nvSpPr>
-          <p:cNvPr id="9" name="Oval 8"/>
+            <a:pPr algn="ctr">
+              <a:defRPr/>
+            </a:pPr>
+            <a:endParaRPr/>
+          </a:p>
+        </p:txBody>
+      </p:sp>
+      <p:sp>
+        <p:nvSpPr>
+          <p:cNvPr id="1098849045" name="Oval 8"/>
           <p:cNvSpPr/>
           <p:nvPr/>
         </p:nvSpPr>
-        <p:spPr>
+        <p:spPr bwMode="auto">
           <a:xfrm>
             <a:off x="5934456" y="1188719"/>
             <a:ext cx="73152" cy="73152"/>
@@ -7254,17 +9111,20 @@
           <a:bodyPr rtlCol="0" anchor="ctr"/>
           <a:lstStyle/>
           <a:p>
-            <a:pPr algn="ctr"/>
-          </a:p>
-        </p:txBody>
-      </p:sp>
-      <p:sp>
-        <p:nvSpPr>
-          <p:cNvPr id="10" name="TextBox 9"/>
+            <a:pPr algn="ctr">
+              <a:defRPr/>
+            </a:pPr>
+            <a:endParaRPr/>
+          </a:p>
+        </p:txBody>
+      </p:sp>
+      <p:sp>
+        <p:nvSpPr>
+          <p:cNvPr id="908115900" name="TextBox 9"/>
           <p:cNvSpPr txBox="1"/>
           <p:nvPr/>
         </p:nvSpPr>
-        <p:spPr>
+        <p:spPr bwMode="auto">
           <a:xfrm>
             <a:off x="6144768" y="1133856"/>
             <a:ext cx="2331720" cy="164592"/>
@@ -7275,7 +9135,7 @@
           <a:noFill/>
         </p:spPr>
         <p:txBody>
-          <a:bodyPr wrap="none" lIns="0" rIns="0" tIns="0" bIns="0">
+          <a:bodyPr wrap="none" lIns="0" tIns="0" rIns="0" bIns="0">
             <a:spAutoFit/>
           </a:bodyPr>
           <a:lstStyle/>
@@ -7289,21 +9149,23 @@
               </a:defRPr>
             </a:pPr>
             <a:r>
+              <a:rPr/>
               <a:t>advanceHidingStage()</a:t>
             </a:r>
-          </a:p>
-        </p:txBody>
-      </p:sp>
-      <p:sp>
-        <p:nvSpPr>
-          <p:cNvPr id="11" name="TextBox 10"/>
+            <a:endParaRPr/>
+          </a:p>
+        </p:txBody>
+      </p:sp>
+      <p:sp>
+        <p:nvSpPr>
+          <p:cNvPr id="395322931" name="TextBox 10"/>
           <p:cNvSpPr txBox="1"/>
           <p:nvPr/>
         </p:nvSpPr>
-        <p:spPr>
+        <p:spPr bwMode="auto">
           <a:xfrm>
             <a:off x="5650992" y="1545336"/>
-            <a:ext cx="2862072" cy="3017520"/>
+            <a:ext cx="2862072" cy="3017519"/>
           </a:xfrm>
           <a:prstGeom prst="rect">
             <a:avLst/>
@@ -7325,36 +9187,54 @@
               </a:defRPr>
             </a:pPr>
             <a:r>
+              <a:rPr/>
               <a:t>double targetPercent = Math.min(1.0,</a:t>
             </a:r>
-            <a:br/>
-            <a:r>
+            <a:br>
+              <a:rPr/>
+            </a:br>
+            <a:r>
+              <a:rPr/>
               <a:t>        0.10 + hideStep * 0.15);</a:t>
             </a:r>
-            <a:br/>
-            <a:br/>
-            <a:r>
+            <a:br>
+              <a:rPr/>
+            </a:br>
+            <a:br>
+              <a:rPr/>
+            </a:br>
+            <a:r>
+              <a:rPr/>
               <a:t>int targetHiddenCount = (int) Math.ceil(</a:t>
             </a:r>
-            <a:br/>
-            <a:r>
+            <a:br>
+              <a:rPr/>
+            </a:br>
+            <a:r>
+              <a:rPr/>
               <a:t>        originalWords.size() * targetPercent);</a:t>
             </a:r>
-            <a:br/>
-            <a:br/>
-            <a:r>
+            <a:br>
+              <a:rPr/>
+            </a:br>
+            <a:br>
+              <a:rPr/>
+            </a:br>
+            <a:r>
+              <a:rPr/>
               <a:t>hiddenWordIndexes.add(hideOrder.get(i));</a:t>
             </a:r>
-          </a:p>
-        </p:txBody>
-      </p:sp>
-      <p:sp>
-        <p:nvSpPr>
-          <p:cNvPr id="12" name="TextBox 11"/>
+            <a:endParaRPr/>
+          </a:p>
+        </p:txBody>
+      </p:sp>
+      <p:sp>
+        <p:nvSpPr>
+          <p:cNvPr id="1956312081" name="TextBox 11"/>
           <p:cNvSpPr txBox="1"/>
           <p:nvPr/>
         </p:nvSpPr>
-        <p:spPr>
+        <p:spPr bwMode="auto">
           <a:xfrm>
             <a:off x="8119872" y="4764024"/>
             <a:ext cx="640080" cy="228600"/>
@@ -7365,7 +9245,7 @@
           <a:noFill/>
         </p:spPr>
         <p:txBody>
-          <a:bodyPr wrap="none" lIns="0" rIns="0" tIns="0" bIns="0">
+          <a:bodyPr wrap="none" lIns="0" tIns="0" rIns="0" bIns="0">
             <a:spAutoFit/>
           </a:bodyPr>
           <a:lstStyle/>
@@ -7379,8 +9259,10 @@
               </a:defRPr>
             </a:pPr>
             <a:r>
+              <a:rPr/>
               <a:t>7/10</a:t>
             </a:r>
+            <a:endParaRPr/>
           </a:p>
         </p:txBody>
       </p:sp>
@@ -7389,34 +9271,47 @@
   <p:clrMapOvr>
     <a:masterClrMapping/>
   </p:clrMapOvr>
+  <mc:AlternateContent xmlns:mc="http://schemas.openxmlformats.org/markup-compatibility/2006">
+    <mc:Choice xmlns:p159="http://schemas.microsoft.com/office/powerpoint/2015/09/main" xmlns:p14="http://schemas.microsoft.com/office/powerpoint/2010/main" Requires="p159">
+      <p:transition p14:dur="2000" advClick="1"/>
+    </mc:Choice>
+    <mc:Fallback>
+      <p:transition advClick="1"/>
+    </mc:Fallback>
+  </mc:AlternateContent>
 </p:sld>
 </file>
 
 <file path=ppt/slides/slide8.xml><?xml version="1.0" encoding="utf-8"?>
-<p:sld xmlns:a="http://schemas.openxmlformats.org/drawingml/2006/main" xmlns:p="http://schemas.openxmlformats.org/presentationml/2006/main" xmlns:r="http://schemas.openxmlformats.org/officeDocument/2006/relationships">
-  <p:cSld>
+<p:sld xmlns:a="http://schemas.openxmlformats.org/drawingml/2006/main" xmlns:r="http://schemas.openxmlformats.org/officeDocument/2006/relationships" xmlns:p="http://schemas.openxmlformats.org/presentationml/2006/main" xmlns:m="http://schemas.openxmlformats.org/officeDocument/2006/math" xmlns:w="http://schemas.openxmlformats.org/wordprocessingml/2006/main" xmlns:mc="http://schemas.openxmlformats.org/markup-compatibility/2006" showMasterPhAnim="0" showMasterSp="1" show="1">
+  <p:cSld name="">
     <p:spTree>
       <p:nvGrpSpPr>
         <p:cNvPr id="1" name=""/>
         <p:cNvGrpSpPr/>
         <p:nvPr/>
       </p:nvGrpSpPr>
-      <p:grpSpPr/>
+      <p:grpSpPr bwMode="auto">
+        <a:xfrm>
+          <a:off x="0" y="0"/>
+          <a:ext cx="0" cy="0"/>
+          <a:chOff x="0" y="0"/>
+          <a:chExt cx="0" cy="0"/>
+        </a:xfrm>
+      </p:grpSpPr>
       <p:pic>
         <p:nvPicPr>
-          <p:cNvPr id="2" name="Picture 1" descr="image1.jpeg"/>
+          <p:cNvPr id="1613239913" name="Picture 1" descr="image1.jpeg"/>
           <p:cNvPicPr>
             <a:picLocks noChangeAspect="1"/>
           </p:cNvPicPr>
           <p:nvPr/>
         </p:nvPicPr>
-        <p:blipFill>
-          <a:blip r:embed="rId2"/>
-          <a:stretch>
-            <a:fillRect/>
-          </a:stretch>
+        <p:blipFill rotWithShape="1">
+          <a:blip r:embed="rId3"/>
+          <a:stretch/>
         </p:blipFill>
-        <p:spPr>
+        <p:spPr bwMode="auto">
           <a:xfrm>
             <a:off x="0" y="0"/>
             <a:ext cx="9144000" cy="5143500"/>
@@ -7428,11 +9323,11 @@
       </p:pic>
       <p:sp>
         <p:nvSpPr>
-          <p:cNvPr id="3" name="TextBox 2"/>
+          <p:cNvPr id="167377018" name="TextBox 2"/>
           <p:cNvSpPr txBox="1"/>
           <p:nvPr/>
         </p:nvSpPr>
-        <p:spPr>
+        <p:spPr bwMode="auto">
           <a:xfrm>
             <a:off x="640080" y="219456"/>
             <a:ext cx="7955279" cy="411480"/>
@@ -7443,7 +9338,7 @@
           <a:noFill/>
         </p:spPr>
         <p:txBody>
-          <a:bodyPr wrap="none" lIns="0" rIns="0" tIns="0" bIns="0">
+          <a:bodyPr wrap="none" lIns="0" tIns="0" rIns="0" bIns="0">
             <a:spAutoFit/>
           </a:bodyPr>
           <a:lstStyle/>
@@ -7457,18 +9352,20 @@
               </a:defRPr>
             </a:pPr>
             <a:r>
+              <a:rPr/>
               <a:t>Проверка и баллы</a:t>
             </a:r>
-          </a:p>
-        </p:txBody>
-      </p:sp>
-      <p:sp>
-        <p:nvSpPr>
-          <p:cNvPr id="4" name="TextBox 3"/>
+            <a:endParaRPr/>
+          </a:p>
+        </p:txBody>
+      </p:sp>
+      <p:sp>
+        <p:nvSpPr>
+          <p:cNvPr id="2104393517" name="TextBox 3"/>
           <p:cNvSpPr txBox="1"/>
           <p:nvPr/>
         </p:nvSpPr>
-        <p:spPr>
+        <p:spPr bwMode="auto">
           <a:xfrm>
             <a:off x="658368" y="1207008"/>
             <a:ext cx="4846320" cy="3474720"/>
@@ -7496,8 +9393,10 @@
               </a:defRPr>
             </a:pPr>
             <a:r>
+              <a:rPr/>
               <a:t>Проверяются только скрытые слова — видимый текст остаётся подсказкой.</a:t>
             </a:r>
+            <a:endParaRPr/>
           </a:p>
           <a:p>
             <a:pPr>
@@ -7512,8 +9411,10 @@
               </a:defRPr>
             </a:pPr>
             <a:r>
+              <a:rPr/>
               <a:t>Ответ нормализуется: регистр не важен, «ё» и «е» считаются одинаковыми.</a:t>
             </a:r>
+            <a:endParaRPr/>
           </a:p>
           <a:p>
             <a:pPr>
@@ -7528,24 +9429,28 @@
               </a:defRPr>
             </a:pPr>
             <a:r>
+              <a:rPr/>
               <a:t>Итоговый балл считается как процент правильных ответов.</a:t>
             </a:r>
-          </a:p>
-        </p:txBody>
-      </p:sp>
-      <p:sp>
-        <p:nvSpPr>
-          <p:cNvPr id="5" name="Rounded Rectangle 4"/>
+            <a:endParaRPr/>
+          </a:p>
+        </p:txBody>
+      </p:sp>
+      <p:sp>
+        <p:nvSpPr>
+          <p:cNvPr id="1932434568" name="Rounded Rectangle 4"/>
           <p:cNvSpPr/>
           <p:nvPr/>
         </p:nvSpPr>
-        <p:spPr>
+        <p:spPr bwMode="auto">
           <a:xfrm>
             <a:off x="5486400" y="987552"/>
             <a:ext cx="3154680" cy="3703320"/>
           </a:xfrm>
           <a:prstGeom prst="roundRect">
-            <a:avLst/>
+            <a:avLst>
+              <a:gd name="adj" fmla="val 16667"/>
+            </a:avLst>
           </a:prstGeom>
           <a:solidFill>
             <a:srgbClr val="152437"/>
@@ -7574,17 +9479,20 @@
           <a:bodyPr rtlCol="0" anchor="ctr"/>
           <a:lstStyle/>
           <a:p>
-            <a:pPr algn="ctr"/>
-          </a:p>
-        </p:txBody>
-      </p:sp>
-      <p:sp>
-        <p:nvSpPr>
-          <p:cNvPr id="6" name="Rectangle 5"/>
+            <a:pPr algn="ctr">
+              <a:defRPr/>
+            </a:pPr>
+            <a:endParaRPr/>
+          </a:p>
+        </p:txBody>
+      </p:sp>
+      <p:sp>
+        <p:nvSpPr>
+          <p:cNvPr id="148042823" name="Rectangle 5"/>
           <p:cNvSpPr/>
           <p:nvPr/>
         </p:nvSpPr>
-        <p:spPr>
+        <p:spPr bwMode="auto">
           <a:xfrm>
             <a:off x="5486400" y="987552"/>
             <a:ext cx="3154680" cy="384048"/>
@@ -7617,17 +9525,20 @@
           <a:bodyPr rtlCol="0" anchor="ctr"/>
           <a:lstStyle/>
           <a:p>
-            <a:pPr algn="ctr"/>
-          </a:p>
-        </p:txBody>
-      </p:sp>
-      <p:sp>
-        <p:nvSpPr>
-          <p:cNvPr id="7" name="Oval 6"/>
+            <a:pPr algn="ctr">
+              <a:defRPr/>
+            </a:pPr>
+            <a:endParaRPr/>
+          </a:p>
+        </p:txBody>
+      </p:sp>
+      <p:sp>
+        <p:nvSpPr>
+          <p:cNvPr id="1450734997" name="Oval 6"/>
           <p:cNvSpPr/>
           <p:nvPr/>
         </p:nvSpPr>
-        <p:spPr>
+        <p:spPr bwMode="auto">
           <a:xfrm>
             <a:off x="5605272" y="1133856"/>
             <a:ext cx="73152" cy="73152"/>
@@ -7660,17 +9571,20 @@
           <a:bodyPr rtlCol="0" anchor="ctr"/>
           <a:lstStyle/>
           <a:p>
-            <a:pPr algn="ctr"/>
-          </a:p>
-        </p:txBody>
-      </p:sp>
-      <p:sp>
-        <p:nvSpPr>
-          <p:cNvPr id="8" name="Oval 7"/>
+            <a:pPr algn="ctr">
+              <a:defRPr/>
+            </a:pPr>
+            <a:endParaRPr/>
+          </a:p>
+        </p:txBody>
+      </p:sp>
+      <p:sp>
+        <p:nvSpPr>
+          <p:cNvPr id="1849826137" name="Oval 7"/>
           <p:cNvSpPr/>
           <p:nvPr/>
         </p:nvSpPr>
-        <p:spPr>
+        <p:spPr bwMode="auto">
           <a:xfrm>
             <a:off x="5769864" y="1133856"/>
             <a:ext cx="73152" cy="73152"/>
@@ -7703,17 +9617,20 @@
           <a:bodyPr rtlCol="0" anchor="ctr"/>
           <a:lstStyle/>
           <a:p>
-            <a:pPr algn="ctr"/>
-          </a:p>
-        </p:txBody>
-      </p:sp>
-      <p:sp>
-        <p:nvSpPr>
-          <p:cNvPr id="9" name="Oval 8"/>
+            <a:pPr algn="ctr">
+              <a:defRPr/>
+            </a:pPr>
+            <a:endParaRPr/>
+          </a:p>
+        </p:txBody>
+      </p:sp>
+      <p:sp>
+        <p:nvSpPr>
+          <p:cNvPr id="1202202863" name="Oval 8"/>
           <p:cNvSpPr/>
           <p:nvPr/>
         </p:nvSpPr>
-        <p:spPr>
+        <p:spPr bwMode="auto">
           <a:xfrm>
             <a:off x="5934456" y="1133856"/>
             <a:ext cx="73152" cy="73152"/>
@@ -7746,17 +9663,20 @@
           <a:bodyPr rtlCol="0" anchor="ctr"/>
           <a:lstStyle/>
           <a:p>
-            <a:pPr algn="ctr"/>
-          </a:p>
-        </p:txBody>
-      </p:sp>
-      <p:sp>
-        <p:nvSpPr>
-          <p:cNvPr id="10" name="TextBox 9"/>
+            <a:pPr algn="ctr">
+              <a:defRPr/>
+            </a:pPr>
+            <a:endParaRPr/>
+          </a:p>
+        </p:txBody>
+      </p:sp>
+      <p:sp>
+        <p:nvSpPr>
+          <p:cNvPr id="1651551214" name="TextBox 9"/>
           <p:cNvSpPr txBox="1"/>
           <p:nvPr/>
         </p:nvSpPr>
-        <p:spPr>
+        <p:spPr bwMode="auto">
           <a:xfrm>
             <a:off x="6144768" y="1078992"/>
             <a:ext cx="2331720" cy="164592"/>
@@ -7767,7 +9687,7 @@
           <a:noFill/>
         </p:spPr>
         <p:txBody>
-          <a:bodyPr wrap="none" lIns="0" rIns="0" tIns="0" bIns="0">
+          <a:bodyPr wrap="none" lIns="0" tIns="0" rIns="0" bIns="0">
             <a:spAutoFit/>
           </a:bodyPr>
           <a:lstStyle/>
@@ -7781,18 +9701,20 @@
               </a:defRPr>
             </a:pPr>
             <a:r>
+              <a:rPr/>
               <a:t>checkCurrentStage()</a:t>
             </a:r>
-          </a:p>
-        </p:txBody>
-      </p:sp>
-      <p:sp>
-        <p:nvSpPr>
-          <p:cNvPr id="11" name="TextBox 10"/>
+            <a:endParaRPr/>
+          </a:p>
+        </p:txBody>
+      </p:sp>
+      <p:sp>
+        <p:nvSpPr>
+          <p:cNvPr id="1338552939" name="TextBox 10"/>
           <p:cNvSpPr txBox="1"/>
           <p:nvPr/>
         </p:nvSpPr>
-        <p:spPr>
+        <p:spPr bwMode="auto">
           <a:xfrm>
             <a:off x="5650992" y="1490472"/>
             <a:ext cx="2862072" cy="3108960"/>
@@ -7817,48 +9739,75 @@
               </a:defRPr>
             </a:pPr>
             <a:r>
+              <a:rPr/>
               <a:t>String actual = normalizeAnswerWord(actualRaw);</a:t>
             </a:r>
-            <a:br/>
-            <a:r>
+            <a:br>
+              <a:rPr/>
+            </a:br>
+            <a:r>
+              <a:rPr/>
               <a:t>String expected = normalizeAnswerWord(expectedRaw);</a:t>
             </a:r>
-            <a:br/>
-            <a:br/>
-            <a:r>
+            <a:br>
+              <a:rPr/>
+            </a:br>
+            <a:br>
+              <a:rPr/>
+            </a:br>
+            <a:r>
+              <a:rPr/>
               <a:t>if (actual.equals(expected)) {</a:t>
             </a:r>
-            <a:br/>
-            <a:r>
+            <a:br>
+              <a:rPr/>
+            </a:br>
+            <a:r>
+              <a:rPr/>
               <a:t>    correct++;</a:t>
             </a:r>
-            <a:br/>
-            <a:r>
+            <a:br>
+              <a:rPr/>
+            </a:br>
+            <a:r>
+              <a:rPr/>
               <a:t>} else {</a:t>
             </a:r>
-            <a:br/>
-            <a:r>
+            <a:br>
+              <a:rPr/>
+            </a:br>
+            <a:r>
+              <a:rPr/>
               <a:t>    errors++;</a:t>
             </a:r>
-            <a:br/>
-            <a:r>
+            <a:br>
+              <a:rPr/>
+            </a:br>
+            <a:r>
+              <a:rPr/>
               <a:t>}</a:t>
             </a:r>
-            <a:br/>
-            <a:br/>
-            <a:r>
+            <a:br>
+              <a:rPr/>
+            </a:br>
+            <a:br>
+              <a:rPr/>
+            </a:br>
+            <a:r>
+              <a:rPr/>
               <a:t>percent = Math.round(correct * 100f / total);</a:t>
             </a:r>
-          </a:p>
-        </p:txBody>
-      </p:sp>
-      <p:sp>
-        <p:nvSpPr>
-          <p:cNvPr id="12" name="TextBox 11"/>
+            <a:endParaRPr/>
+          </a:p>
+        </p:txBody>
+      </p:sp>
+      <p:sp>
+        <p:nvSpPr>
+          <p:cNvPr id="1741889581" name="TextBox 11"/>
           <p:cNvSpPr txBox="1"/>
           <p:nvPr/>
         </p:nvSpPr>
-        <p:spPr>
+        <p:spPr bwMode="auto">
           <a:xfrm>
             <a:off x="8119872" y="4764024"/>
             <a:ext cx="640080" cy="228600"/>
@@ -7869,7 +9818,7 @@
           <a:noFill/>
         </p:spPr>
         <p:txBody>
-          <a:bodyPr wrap="none" lIns="0" rIns="0" tIns="0" bIns="0">
+          <a:bodyPr wrap="none" lIns="0" tIns="0" rIns="0" bIns="0">
             <a:spAutoFit/>
           </a:bodyPr>
           <a:lstStyle/>
@@ -7883,8 +9832,10 @@
               </a:defRPr>
             </a:pPr>
             <a:r>
+              <a:rPr/>
               <a:t>8/10</a:t>
             </a:r>
+            <a:endParaRPr/>
           </a:p>
         </p:txBody>
       </p:sp>
@@ -7893,34 +9844,47 @@
   <p:clrMapOvr>
     <a:masterClrMapping/>
   </p:clrMapOvr>
+  <mc:AlternateContent xmlns:mc="http://schemas.openxmlformats.org/markup-compatibility/2006">
+    <mc:Choice xmlns:p159="http://schemas.microsoft.com/office/powerpoint/2015/09/main" xmlns:p14="http://schemas.microsoft.com/office/powerpoint/2010/main" Requires="p159">
+      <p:transition p14:dur="2000" advClick="1"/>
+    </mc:Choice>
+    <mc:Fallback>
+      <p:transition advClick="1"/>
+    </mc:Fallback>
+  </mc:AlternateContent>
 </p:sld>
 </file>
 
 <file path=ppt/slides/slide9.xml><?xml version="1.0" encoding="utf-8"?>
-<p:sld xmlns:a="http://schemas.openxmlformats.org/drawingml/2006/main" xmlns:p="http://schemas.openxmlformats.org/presentationml/2006/main" xmlns:r="http://schemas.openxmlformats.org/officeDocument/2006/relationships">
-  <p:cSld>
+<p:sld xmlns:a="http://schemas.openxmlformats.org/drawingml/2006/main" xmlns:r="http://schemas.openxmlformats.org/officeDocument/2006/relationships" xmlns:p="http://schemas.openxmlformats.org/presentationml/2006/main" xmlns:m="http://schemas.openxmlformats.org/officeDocument/2006/math" xmlns:w="http://schemas.openxmlformats.org/wordprocessingml/2006/main" xmlns:mc="http://schemas.openxmlformats.org/markup-compatibility/2006" showMasterPhAnim="0" showMasterSp="1" show="1">
+  <p:cSld name="">
     <p:spTree>
       <p:nvGrpSpPr>
         <p:cNvPr id="1" name=""/>
         <p:cNvGrpSpPr/>
         <p:nvPr/>
       </p:nvGrpSpPr>
-      <p:grpSpPr/>
+      <p:grpSpPr bwMode="auto">
+        <a:xfrm>
+          <a:off x="0" y="0"/>
+          <a:ext cx="0" cy="0"/>
+          <a:chOff x="0" y="0"/>
+          <a:chExt cx="0" cy="0"/>
+        </a:xfrm>
+      </p:grpSpPr>
       <p:pic>
         <p:nvPicPr>
-          <p:cNvPr id="2" name="Picture 1" descr="image1.jpeg"/>
+          <p:cNvPr id="321266588" name="Picture 1" descr="image1.jpeg"/>
           <p:cNvPicPr>
             <a:picLocks noChangeAspect="1"/>
           </p:cNvPicPr>
           <p:nvPr/>
         </p:nvPicPr>
-        <p:blipFill>
-          <a:blip r:embed="rId2"/>
-          <a:stretch>
-            <a:fillRect/>
-          </a:stretch>
+        <p:blipFill rotWithShape="1">
+          <a:blip r:embed="rId3"/>
+          <a:stretch/>
         </p:blipFill>
-        <p:spPr>
+        <p:spPr bwMode="auto">
           <a:xfrm>
             <a:off x="0" y="0"/>
             <a:ext cx="9144000" cy="5143500"/>
@@ -7932,11 +9896,11 @@
       </p:pic>
       <p:sp>
         <p:nvSpPr>
-          <p:cNvPr id="3" name="TextBox 2"/>
+          <p:cNvPr id="968410907" name="TextBox 2"/>
           <p:cNvSpPr txBox="1"/>
           <p:nvPr/>
         </p:nvSpPr>
-        <p:spPr>
+        <p:spPr bwMode="auto">
           <a:xfrm>
             <a:off x="640080" y="219456"/>
             <a:ext cx="7955279" cy="411480"/>
@@ -7947,7 +9911,7 @@
           <a:noFill/>
         </p:spPr>
         <p:txBody>
-          <a:bodyPr wrap="none" lIns="0" rIns="0" tIns="0" bIns="0">
+          <a:bodyPr wrap="none" lIns="0" tIns="0" rIns="0" bIns="0">
             <a:spAutoFit/>
           </a:bodyPr>
           <a:lstStyle/>
@@ -7961,18 +9925,20 @@
               </a:defRPr>
             </a:pPr>
             <a:r>
+              <a:rPr/>
               <a:t>Таймер и сохранение состояния</a:t>
             </a:r>
-          </a:p>
-        </p:txBody>
-      </p:sp>
-      <p:sp>
-        <p:nvSpPr>
-          <p:cNvPr id="4" name="TextBox 3"/>
+            <a:endParaRPr/>
+          </a:p>
+        </p:txBody>
+      </p:sp>
+      <p:sp>
+        <p:nvSpPr>
+          <p:cNvPr id="1438369879" name="TextBox 3"/>
           <p:cNvSpPr txBox="1"/>
           <p:nvPr/>
         </p:nvSpPr>
-        <p:spPr>
+        <p:spPr bwMode="auto">
           <a:xfrm>
             <a:off x="658368" y="1143000"/>
             <a:ext cx="4800600" cy="3474720"/>
@@ -8000,8 +9966,10 @@
               </a:defRPr>
             </a:pPr>
             <a:r>
+              <a:rPr/>
               <a:t>Handler обновляет время каждую секунду.</a:t>
             </a:r>
+            <a:endParaRPr/>
           </a:p>
           <a:p>
             <a:pPr>
@@ -8016,8 +9984,10 @@
               </a:defRPr>
             </a:pPr>
             <a:r>
+              <a:rPr/>
               <a:t>Автоматический переход этапа происходит через заданный интервал.</a:t>
             </a:r>
+            <a:endParaRPr/>
           </a:p>
           <a:p>
             <a:pPr>
@@ -8032,8 +10002,10 @@
               </a:defRPr>
             </a:pPr>
             <a:r>
+              <a:rPr/>
               <a:t>При повороте экрана сохраняются исходный текст, скрытые слова и ответы.</a:t>
             </a:r>
+            <a:endParaRPr/>
           </a:p>
           <a:p>
             <a:pPr>
@@ -8048,24 +10020,28 @@
               </a:defRPr>
             </a:pPr>
             <a:r>
+              <a:rPr/>
               <a:t>Для клавиатуры используется adjustResize и flagNoExtractUi.</a:t>
             </a:r>
-          </a:p>
-        </p:txBody>
-      </p:sp>
-      <p:sp>
-        <p:nvSpPr>
-          <p:cNvPr id="5" name="Rounded Rectangle 4"/>
+            <a:endParaRPr/>
+          </a:p>
+        </p:txBody>
+      </p:sp>
+      <p:sp>
+        <p:nvSpPr>
+          <p:cNvPr id="1637487603" name="Rounded Rectangle 4"/>
           <p:cNvSpPr/>
           <p:nvPr/>
         </p:nvSpPr>
-        <p:spPr>
+        <p:spPr bwMode="auto">
           <a:xfrm>
             <a:off x="5486400" y="1078992"/>
             <a:ext cx="3154680" cy="3566160"/>
           </a:xfrm>
           <a:prstGeom prst="roundRect">
-            <a:avLst/>
+            <a:avLst>
+              <a:gd name="adj" fmla="val 16667"/>
+            </a:avLst>
           </a:prstGeom>
           <a:solidFill>
             <a:srgbClr val="152437"/>
@@ -8094,17 +10070,20 @@
           <a:bodyPr rtlCol="0" anchor="ctr"/>
           <a:lstStyle/>
           <a:p>
-            <a:pPr algn="ctr"/>
-          </a:p>
-        </p:txBody>
-      </p:sp>
-      <p:sp>
-        <p:nvSpPr>
-          <p:cNvPr id="6" name="Rectangle 5"/>
+            <a:pPr algn="ctr">
+              <a:defRPr/>
+            </a:pPr>
+            <a:endParaRPr/>
+          </a:p>
+        </p:txBody>
+      </p:sp>
+      <p:sp>
+        <p:nvSpPr>
+          <p:cNvPr id="535186422" name="Rectangle 5"/>
           <p:cNvSpPr/>
           <p:nvPr/>
         </p:nvSpPr>
-        <p:spPr>
+        <p:spPr bwMode="auto">
           <a:xfrm>
             <a:off x="5486400" y="1078992"/>
             <a:ext cx="3154680" cy="384048"/>
@@ -8137,17 +10116,20 @@
           <a:bodyPr rtlCol="0" anchor="ctr"/>
           <a:lstStyle/>
           <a:p>
-            <a:pPr algn="ctr"/>
-          </a:p>
-        </p:txBody>
-      </p:sp>
-      <p:sp>
-        <p:nvSpPr>
-          <p:cNvPr id="7" name="Oval 6"/>
+            <a:pPr algn="ctr">
+              <a:defRPr/>
+            </a:pPr>
+            <a:endParaRPr/>
+          </a:p>
+        </p:txBody>
+      </p:sp>
+      <p:sp>
+        <p:nvSpPr>
+          <p:cNvPr id="199722571" name="Oval 6"/>
           <p:cNvSpPr/>
           <p:nvPr/>
         </p:nvSpPr>
-        <p:spPr>
+        <p:spPr bwMode="auto">
           <a:xfrm>
             <a:off x="5605272" y="1225295"/>
             <a:ext cx="73152" cy="73152"/>
@@ -8180,17 +10162,20 @@
           <a:bodyPr rtlCol="0" anchor="ctr"/>
           <a:lstStyle/>
           <a:p>
-            <a:pPr algn="ctr"/>
-          </a:p>
-        </p:txBody>
-      </p:sp>
-      <p:sp>
-        <p:nvSpPr>
-          <p:cNvPr id="8" name="Oval 7"/>
+            <a:pPr algn="ctr">
+              <a:defRPr/>
+            </a:pPr>
+            <a:endParaRPr/>
+          </a:p>
+        </p:txBody>
+      </p:sp>
+      <p:sp>
+        <p:nvSpPr>
+          <p:cNvPr id="82209141" name="Oval 7"/>
           <p:cNvSpPr/>
           <p:nvPr/>
         </p:nvSpPr>
-        <p:spPr>
+        <p:spPr bwMode="auto">
           <a:xfrm>
             <a:off x="5769864" y="1225295"/>
             <a:ext cx="73152" cy="73152"/>
@@ -8223,17 +10208,20 @@
           <a:bodyPr rtlCol="0" anchor="ctr"/>
           <a:lstStyle/>
           <a:p>
-            <a:pPr algn="ctr"/>
-          </a:p>
-        </p:txBody>
-      </p:sp>
-      <p:sp>
-        <p:nvSpPr>
-          <p:cNvPr id="9" name="Oval 8"/>
+            <a:pPr algn="ctr">
+              <a:defRPr/>
+            </a:pPr>
+            <a:endParaRPr/>
+          </a:p>
+        </p:txBody>
+      </p:sp>
+      <p:sp>
+        <p:nvSpPr>
+          <p:cNvPr id="1767022300" name="Oval 8"/>
           <p:cNvSpPr/>
           <p:nvPr/>
         </p:nvSpPr>
-        <p:spPr>
+        <p:spPr bwMode="auto">
           <a:xfrm>
             <a:off x="5934456" y="1225295"/>
             <a:ext cx="73152" cy="73152"/>
@@ -8266,17 +10254,20 @@
           <a:bodyPr rtlCol="0" anchor="ctr"/>
           <a:lstStyle/>
           <a:p>
-            <a:pPr algn="ctr"/>
-          </a:p>
-        </p:txBody>
-      </p:sp>
-      <p:sp>
-        <p:nvSpPr>
-          <p:cNvPr id="10" name="TextBox 9"/>
+            <a:pPr algn="ctr">
+              <a:defRPr/>
+            </a:pPr>
+            <a:endParaRPr/>
+          </a:p>
+        </p:txBody>
+      </p:sp>
+      <p:sp>
+        <p:nvSpPr>
+          <p:cNvPr id="241732471" name="TextBox 9"/>
           <p:cNvSpPr txBox="1"/>
           <p:nvPr/>
         </p:nvSpPr>
-        <p:spPr>
+        <p:spPr bwMode="auto">
           <a:xfrm>
             <a:off x="6144768" y="1170432"/>
             <a:ext cx="2331720" cy="164592"/>
@@ -8287,7 +10278,7 @@
           <a:noFill/>
         </p:spPr>
         <p:txBody>
-          <a:bodyPr wrap="none" lIns="0" rIns="0" tIns="0" bIns="0">
+          <a:bodyPr wrap="none" lIns="0" tIns="0" rIns="0" bIns="0">
             <a:spAutoFit/>
           </a:bodyPr>
           <a:lstStyle/>
@@ -8301,18 +10292,20 @@
               </a:defRPr>
             </a:pPr>
             <a:r>
+              <a:rPr/>
               <a:t>таймер и Bundle</a:t>
             </a:r>
-          </a:p>
-        </p:txBody>
-      </p:sp>
-      <p:sp>
-        <p:nvSpPr>
-          <p:cNvPr id="11" name="TextBox 10"/>
+            <a:endParaRPr/>
+          </a:p>
+        </p:txBody>
+      </p:sp>
+      <p:sp>
+        <p:nvSpPr>
+          <p:cNvPr id="1423763625" name="TextBox 10"/>
           <p:cNvSpPr txBox="1"/>
           <p:nvPr/>
         </p:nvSpPr>
-        <p:spPr>
+        <p:spPr bwMode="auto">
           <a:xfrm>
             <a:off x="5650992" y="1581912"/>
             <a:ext cx="2862072" cy="2971800"/>
@@ -8337,35 +10330,51 @@
               </a:defRPr>
             </a:pPr>
             <a:r>
+              <a:rPr/>
               <a:t>handler.postDelayed(timerRunnable, 1000L);</a:t>
             </a:r>
-            <a:br/>
-            <a:br/>
-            <a:r>
+            <a:br>
+              <a:rPr/>
+            </a:br>
+            <a:br>
+              <a:rPr/>
+            </a:br>
+            <a:r>
+              <a:rPr/>
               <a:t>outState.putString("originalText", originalText);</a:t>
             </a:r>
-            <a:br/>
-            <a:r>
+            <a:br>
+              <a:rPr/>
+            </a:br>
+            <a:r>
+              <a:rPr/>
               <a:t>outState.putIntegerArrayList("hideOrder", hideOrder);</a:t>
             </a:r>
-            <a:br/>
-            <a:r>
+            <a:br>
+              <a:rPr/>
+            </a:br>
+            <a:r>
+              <a:rPr/>
               <a:t>outState.putLong("nextHideAtElapsedMs",</a:t>
             </a:r>
-            <a:br/>
-            <a:r>
+            <a:br>
+              <a:rPr/>
+            </a:br>
+            <a:r>
+              <a:rPr/>
               <a:t>        nextHideAtElapsedMs);</a:t>
             </a:r>
-          </a:p>
-        </p:txBody>
-      </p:sp>
-      <p:sp>
-        <p:nvSpPr>
-          <p:cNvPr id="12" name="TextBox 11"/>
+            <a:endParaRPr/>
+          </a:p>
+        </p:txBody>
+      </p:sp>
+      <p:sp>
+        <p:nvSpPr>
+          <p:cNvPr id="1273367998" name="TextBox 11"/>
           <p:cNvSpPr txBox="1"/>
           <p:nvPr/>
         </p:nvSpPr>
-        <p:spPr>
+        <p:spPr bwMode="auto">
           <a:xfrm>
             <a:off x="8119872" y="4764024"/>
             <a:ext cx="640080" cy="228600"/>
@@ -8376,7 +10385,7 @@
           <a:noFill/>
         </p:spPr>
         <p:txBody>
-          <a:bodyPr wrap="none" lIns="0" rIns="0" tIns="0" bIns="0">
+          <a:bodyPr wrap="none" lIns="0" tIns="0" rIns="0" bIns="0">
             <a:spAutoFit/>
           </a:bodyPr>
           <a:lstStyle/>
@@ -8390,8 +10399,10 @@
               </a:defRPr>
             </a:pPr>
             <a:r>
+              <a:rPr/>
               <a:t>9/10</a:t>
             </a:r>
+            <a:endParaRPr/>
           </a:p>
         </p:txBody>
       </p:sp>
@@ -8400,11 +10411,19 @@
   <p:clrMapOvr>
     <a:masterClrMapping/>
   </p:clrMapOvr>
+  <mc:AlternateContent xmlns:mc="http://schemas.openxmlformats.org/markup-compatibility/2006">
+    <mc:Choice xmlns:p159="http://schemas.microsoft.com/office/powerpoint/2015/09/main" xmlns:p14="http://schemas.microsoft.com/office/powerpoint/2010/main" Requires="p159">
+      <p:transition p14:dur="2000" advClick="1"/>
+    </mc:Choice>
+    <mc:Fallback>
+      <p:transition advClick="1"/>
+    </mc:Fallback>
+  </mc:AlternateContent>
 </p:sld>
 </file>
 
 <file path=ppt/theme/theme1.xml><?xml version="1.0" encoding="utf-8"?>
-<a:theme xmlns:a="http://schemas.openxmlformats.org/drawingml/2006/main" name="Office Theme">
+<a:theme xmlns:a="http://schemas.openxmlformats.org/drawingml/2006/main" xmlns:r="http://schemas.openxmlformats.org/officeDocument/2006/relationships" xmlns:p="http://schemas.openxmlformats.org/presentationml/2006/main" name="Office Theme">
   <a:themeElements>
     <a:clrScheme name="Office">
       <a:dk1>
@@ -8447,73 +10466,13 @@
     <a:fontScheme name="Office">
       <a:majorFont>
         <a:latin typeface="Calibri"/>
-        <a:ea typeface=""/>
-        <a:cs typeface=""/>
-        <a:font script="Jpan" typeface="ＭＳ Ｐゴシック"/>
-        <a:font script="Hang" typeface="맑은 고딕"/>
-        <a:font script="Hans" typeface="宋体"/>
-        <a:font script="Hant" typeface="新細明體"/>
-        <a:font script="Arab" typeface="Times New Roman"/>
-        <a:font script="Hebr" typeface="Times New Roman"/>
-        <a:font script="Thai" typeface="Angsana New"/>
-        <a:font script="Ethi" typeface="Nyala"/>
-        <a:font script="Beng" typeface="Vrinda"/>
-        <a:font script="Gujr" typeface="Shruti"/>
-        <a:font script="Khmr" typeface="MoolBoran"/>
-        <a:font script="Knda" typeface="Tunga"/>
-        <a:font script="Guru" typeface="Raavi"/>
-        <a:font script="Cans" typeface="Euphemia"/>
-        <a:font script="Cher" typeface="Plantagenet Cherokee"/>
-        <a:font script="Yiii" typeface="Microsoft Yi Baiti"/>
-        <a:font script="Tibt" typeface="Microsoft Himalaya"/>
-        <a:font script="Thaa" typeface="MV Boli"/>
-        <a:font script="Deva" typeface="Mangal"/>
-        <a:font script="Telu" typeface="Gautami"/>
-        <a:font script="Taml" typeface="Latha"/>
-        <a:font script="Syrc" typeface="Estrangelo Edessa"/>
-        <a:font script="Orya" typeface="Kalinga"/>
-        <a:font script="Mlym" typeface="Kartika"/>
-        <a:font script="Laoo" typeface="DokChampa"/>
-        <a:font script="Sinh" typeface="Iskoola Pota"/>
-        <a:font script="Mong" typeface="Mongolian Baiti"/>
-        <a:font script="Viet" typeface="Times New Roman"/>
-        <a:font script="Uigh" typeface="Microsoft Uighur"/>
-        <a:font script="Geor" typeface="Sylfaen"/>
+        <a:ea typeface="Arial"/>
+        <a:cs typeface="Arial"/>
       </a:majorFont>
       <a:minorFont>
         <a:latin typeface="Calibri"/>
-        <a:ea typeface=""/>
-        <a:cs typeface=""/>
-        <a:font script="Jpan" typeface="ＭＳ Ｐゴシック"/>
-        <a:font script="Hang" typeface="맑은 고딕"/>
-        <a:font script="Hans" typeface="宋体"/>
-        <a:font script="Hant" typeface="新細明體"/>
-        <a:font script="Arab" typeface="Arial"/>
-        <a:font script="Hebr" typeface="Arial"/>
-        <a:font script="Thai" typeface="Cordia New"/>
-        <a:font script="Ethi" typeface="Nyala"/>
-        <a:font script="Beng" typeface="Vrinda"/>
-        <a:font script="Gujr" typeface="Shruti"/>
-        <a:font script="Khmr" typeface="DaunPenh"/>
-        <a:font script="Knda" typeface="Tunga"/>
-        <a:font script="Guru" typeface="Raavi"/>
-        <a:font script="Cans" typeface="Euphemia"/>
-        <a:font script="Cher" typeface="Plantagenet Cherokee"/>
-        <a:font script="Yiii" typeface="Microsoft Yi Baiti"/>
-        <a:font script="Tibt" typeface="Microsoft Himalaya"/>
-        <a:font script="Thaa" typeface="MV Boli"/>
-        <a:font script="Deva" typeface="Mangal"/>
-        <a:font script="Telu" typeface="Gautami"/>
-        <a:font script="Taml" typeface="Latha"/>
-        <a:font script="Syrc" typeface="Estrangelo Edessa"/>
-        <a:font script="Orya" typeface="Kalinga"/>
-        <a:font script="Mlym" typeface="Kartika"/>
-        <a:font script="Laoo" typeface="DokChampa"/>
-        <a:font script="Sinh" typeface="Iskoola Pota"/>
-        <a:font script="Mong" typeface="Mongolian Baiti"/>
-        <a:font script="Viet" typeface="Arial"/>
-        <a:font script="Uigh" typeface="Microsoft Uighur"/>
-        <a:font script="Geor" typeface="Sylfaen"/>
+        <a:ea typeface="Arial"/>
+        <a:cs typeface="Arial"/>
       </a:minorFont>
     </a:fontScheme>
     <a:fmtScheme name="Office">
@@ -8521,7 +10480,7 @@
         <a:solidFill>
           <a:schemeClr val="phClr"/>
         </a:solidFill>
-        <a:gradFill rotWithShape="1">
+        <a:gradFill>
           <a:gsLst>
             <a:gs pos="0">
               <a:schemeClr val="phClr">
@@ -8544,7 +10503,7 @@
           </a:gsLst>
           <a:lin ang="16200000" scaled="1"/>
         </a:gradFill>
-        <a:gradFill rotWithShape="1">
+        <a:gradFill>
           <a:gsLst>
             <a:gs pos="0">
               <a:schemeClr val="phClr">
@@ -8631,7 +10590,7 @@
         <a:solidFill>
           <a:schemeClr val="phClr"/>
         </a:solidFill>
-        <a:gradFill rotWithShape="1">
+        <a:gradFill>
           <a:gsLst>
             <a:gs pos="0">
               <a:schemeClr val="phClr">
@@ -8653,11 +10612,9 @@
               </a:schemeClr>
             </a:gs>
           </a:gsLst>
-          <a:path path="circle">
-            <a:fillToRect l="50000" t="-80000" r="50000" b="180000"/>
-          </a:path>
+          <a:path path="circle"/>
         </a:gradFill>
-        <a:gradFill rotWithShape="1">
+        <a:gradFill>
           <a:gsLst>
             <a:gs pos="0">
               <a:schemeClr val="phClr">
@@ -8672,16 +10629,14 @@
               </a:schemeClr>
             </a:gs>
           </a:gsLst>
-          <a:path path="circle">
-            <a:fillToRect l="50000" t="50000" r="50000" b="50000"/>
-          </a:path>
+          <a:path path="circle"/>
         </a:gradFill>
       </a:bgFillStyleLst>
     </a:fmtScheme>
   </a:themeElements>
   <a:objectDefaults>
     <a:spDef>
-      <a:spPr/>
+      <a:spPr bwMode="auto"/>
       <a:bodyPr/>
       <a:lstStyle/>
       <a:style>
@@ -8700,7 +10655,7 @@
       </a:style>
     </a:spDef>
     <a:lnDef>
-      <a:spPr/>
+      <a:spPr bwMode="auto"/>
       <a:bodyPr/>
       <a:lstStyle/>
       <a:style>
@@ -8719,6 +10674,260 @@
       </a:style>
     </a:lnDef>
   </a:objectDefaults>
-  <a:extraClrSchemeLst/>
+</a:theme>
+</file>
+
+<file path=ppt/theme/theme2.xml><?xml version="1.0" encoding="utf-8"?>
+<a:theme xmlns:a="http://schemas.openxmlformats.org/drawingml/2006/main" xmlns:r="http://schemas.openxmlformats.org/officeDocument/2006/relationships" xmlns:p="http://schemas.openxmlformats.org/presentationml/2006/main" name="Office Theme">
+  <a:themeElements>
+    <a:clrScheme name="Office">
+      <a:dk1>
+        <a:sysClr val="windowText" lastClr="000000"/>
+      </a:dk1>
+      <a:lt1>
+        <a:sysClr val="window" lastClr="FFFFFF"/>
+      </a:lt1>
+      <a:dk2>
+        <a:srgbClr val="1F497D"/>
+      </a:dk2>
+      <a:lt2>
+        <a:srgbClr val="EEECE1"/>
+      </a:lt2>
+      <a:accent1>
+        <a:srgbClr val="4F81BD"/>
+      </a:accent1>
+      <a:accent2>
+        <a:srgbClr val="C0504D"/>
+      </a:accent2>
+      <a:accent3>
+        <a:srgbClr val="9BBB59"/>
+      </a:accent3>
+      <a:accent4>
+        <a:srgbClr val="8064A2"/>
+      </a:accent4>
+      <a:accent5>
+        <a:srgbClr val="4BACC6"/>
+      </a:accent5>
+      <a:accent6>
+        <a:srgbClr val="F79646"/>
+      </a:accent6>
+      <a:hlink>
+        <a:srgbClr val="0000FF"/>
+      </a:hlink>
+      <a:folHlink>
+        <a:srgbClr val="800080"/>
+      </a:folHlink>
+    </a:clrScheme>
+    <a:fontScheme name="">
+      <a:majorFont>
+        <a:latin typeface="Calibri"/>
+        <a:ea typeface="Arial"/>
+        <a:cs typeface="Arial"/>
+      </a:majorFont>
+      <a:minorFont>
+        <a:latin typeface="Calibri"/>
+        <a:ea typeface="Arial"/>
+        <a:cs typeface="Arial"/>
+      </a:minorFont>
+    </a:fontScheme>
+    <a:fmtScheme name="Office">
+      <a:fillStyleLst>
+        <a:solidFill>
+          <a:schemeClr val="phClr"/>
+        </a:solidFill>
+        <a:gradFill>
+          <a:gsLst>
+            <a:gs pos="0">
+              <a:schemeClr val="phClr">
+                <a:tint val="50000"/>
+                <a:satMod val="300000"/>
+              </a:schemeClr>
+            </a:gs>
+            <a:gs pos="35000">
+              <a:schemeClr val="phClr">
+                <a:tint val="37000"/>
+                <a:satMod val="300000"/>
+              </a:schemeClr>
+            </a:gs>
+            <a:gs pos="100000">
+              <a:schemeClr val="phClr">
+                <a:tint val="15000"/>
+                <a:satMod val="350000"/>
+              </a:schemeClr>
+            </a:gs>
+          </a:gsLst>
+          <a:lin ang="16200000" scaled="1"/>
+        </a:gradFill>
+        <a:gradFill>
+          <a:gsLst>
+            <a:gs pos="0">
+              <a:schemeClr val="phClr">
+                <a:tint val="100000"/>
+                <a:shade val="100000"/>
+                <a:satMod val="130000"/>
+              </a:schemeClr>
+            </a:gs>
+            <a:gs pos="100000">
+              <a:schemeClr val="phClr">
+                <a:tint val="50000"/>
+                <a:shade val="100000"/>
+                <a:satMod val="350000"/>
+              </a:schemeClr>
+            </a:gs>
+          </a:gsLst>
+          <a:lin ang="16200000" scaled="0"/>
+        </a:gradFill>
+      </a:fillStyleLst>
+      <a:lnStyleLst>
+        <a:ln w="9525" cap="flat" cmpd="sng" algn="ctr">
+          <a:solidFill>
+            <a:schemeClr val="phClr">
+              <a:shade val="95000"/>
+              <a:satMod val="105000"/>
+            </a:schemeClr>
+          </a:solidFill>
+          <a:prstDash val="solid"/>
+        </a:ln>
+        <a:ln w="25400" cap="flat" cmpd="sng" algn="ctr">
+          <a:solidFill>
+            <a:schemeClr val="phClr"/>
+          </a:solidFill>
+          <a:prstDash val="solid"/>
+        </a:ln>
+        <a:ln w="38100" cap="flat" cmpd="sng" algn="ctr">
+          <a:solidFill>
+            <a:schemeClr val="phClr"/>
+          </a:solidFill>
+          <a:prstDash val="solid"/>
+        </a:ln>
+      </a:lnStyleLst>
+      <a:effectStyleLst>
+        <a:effectStyle>
+          <a:effectLst>
+            <a:outerShdw blurRad="40000" dist="20000" dir="5400000" rotWithShape="0">
+              <a:srgbClr val="000000">
+                <a:alpha val="38000"/>
+              </a:srgbClr>
+            </a:outerShdw>
+          </a:effectLst>
+        </a:effectStyle>
+        <a:effectStyle>
+          <a:effectLst>
+            <a:outerShdw blurRad="40000" dist="23000" dir="5400000" rotWithShape="0">
+              <a:srgbClr val="000000">
+                <a:alpha val="35000"/>
+              </a:srgbClr>
+            </a:outerShdw>
+          </a:effectLst>
+        </a:effectStyle>
+        <a:effectStyle>
+          <a:effectLst>
+            <a:outerShdw blurRad="40000" dist="23000" dir="5400000" rotWithShape="0">
+              <a:srgbClr val="000000">
+                <a:alpha val="35000"/>
+              </a:srgbClr>
+            </a:outerShdw>
+          </a:effectLst>
+          <a:scene3d>
+            <a:camera prst="orthographicFront">
+              <a:rot lat="0" lon="0" rev="0"/>
+            </a:camera>
+            <a:lightRig rig="threePt" dir="t">
+              <a:rot lat="0" lon="0" rev="1200000"/>
+            </a:lightRig>
+          </a:scene3d>
+          <a:sp3d>
+            <a:bevelT w="63500" h="25400"/>
+          </a:sp3d>
+        </a:effectStyle>
+      </a:effectStyleLst>
+      <a:bgFillStyleLst>
+        <a:solidFill>
+          <a:schemeClr val="phClr"/>
+        </a:solidFill>
+        <a:gradFill>
+          <a:gsLst>
+            <a:gs pos="0">
+              <a:schemeClr val="phClr">
+                <a:tint val="40000"/>
+                <a:satMod val="350000"/>
+              </a:schemeClr>
+            </a:gs>
+            <a:gs pos="40000">
+              <a:schemeClr val="phClr">
+                <a:tint val="45000"/>
+                <a:shade val="99000"/>
+                <a:satMod val="350000"/>
+              </a:schemeClr>
+            </a:gs>
+            <a:gs pos="100000">
+              <a:schemeClr val="phClr">
+                <a:shade val="20000"/>
+                <a:satMod val="255000"/>
+              </a:schemeClr>
+            </a:gs>
+          </a:gsLst>
+          <a:path path="circle"/>
+        </a:gradFill>
+        <a:gradFill>
+          <a:gsLst>
+            <a:gs pos="0">
+              <a:schemeClr val="phClr">
+                <a:tint val="80000"/>
+                <a:satMod val="300000"/>
+              </a:schemeClr>
+            </a:gs>
+            <a:gs pos="100000">
+              <a:schemeClr val="phClr">
+                <a:shade val="30000"/>
+                <a:satMod val="200000"/>
+              </a:schemeClr>
+            </a:gs>
+          </a:gsLst>
+          <a:path path="circle"/>
+        </a:gradFill>
+      </a:bgFillStyleLst>
+    </a:fmtScheme>
+  </a:themeElements>
+  <a:objectDefaults>
+    <a:spDef>
+      <a:spPr bwMode="auto"/>
+      <a:bodyPr/>
+      <a:lstStyle/>
+      <a:style>
+        <a:lnRef idx="1">
+          <a:schemeClr val="accent1"/>
+        </a:lnRef>
+        <a:fillRef idx="3">
+          <a:schemeClr val="accent1"/>
+        </a:fillRef>
+        <a:effectRef idx="2">
+          <a:schemeClr val="accent1"/>
+        </a:effectRef>
+        <a:fontRef idx="minor">
+          <a:schemeClr val="lt1"/>
+        </a:fontRef>
+      </a:style>
+    </a:spDef>
+    <a:lnDef>
+      <a:spPr bwMode="auto"/>
+      <a:bodyPr/>
+      <a:lstStyle/>
+      <a:style>
+        <a:lnRef idx="2">
+          <a:schemeClr val="accent1"/>
+        </a:lnRef>
+        <a:fillRef idx="0">
+          <a:schemeClr val="accent1"/>
+        </a:fillRef>
+        <a:effectRef idx="1">
+          <a:schemeClr val="accent1"/>
+        </a:effectRef>
+        <a:fontRef idx="minor">
+          <a:schemeClr val="tx1"/>
+        </a:fontRef>
+      </a:style>
+    </a:lnDef>
+  </a:objectDefaults>
 </a:theme>
 </file>